--- a/2024/2024-03-01-AI-Updates.pptx
+++ b/2024/2024-03-01-AI-Updates.pptx
@@ -1,11 +1,11 @@
 
 <file path=ppt/presentation.xml><?xml version="1.0" encoding="utf-8"?>
-<p:presentation xmlns:a="http://schemas.openxmlformats.org/drawingml/2006/main" xmlns:r="http://schemas.openxmlformats.org/officeDocument/2006/relationships" xmlns:p="http://schemas.openxmlformats.org/presentationml/2006/main" strictFirstAndLastChars="0" saveSubsetFonts="1" autoCompressPictures="0">
+<p:presentation xmlns:a="http://schemas.openxmlformats.org/drawingml/2006/main" xmlns:r="http://schemas.openxmlformats.org/officeDocument/2006/relationships" xmlns:p="http://schemas.openxmlformats.org/presentationml/2006/main" strictFirstAndLastChars="0" embedTrueTypeFonts="1" saveSubsetFonts="1" autoCompressPictures="0">
   <p:sldMasterIdLst>
     <p:sldMasterId id="2147483659" r:id="rId1"/>
   </p:sldMasterIdLst>
   <p:notesMasterIdLst>
-    <p:notesMasterId r:id="rId15"/>
+    <p:notesMasterId r:id="rId18"/>
   </p:notesMasterIdLst>
   <p:sldIdLst>
     <p:sldId id="256" r:id="rId2"/>
@@ -21,9 +21,21 @@
     <p:sldId id="266" r:id="rId12"/>
     <p:sldId id="267" r:id="rId13"/>
     <p:sldId id="268" r:id="rId14"/>
+    <p:sldId id="269" r:id="rId15"/>
+    <p:sldId id="270" r:id="rId16"/>
+    <p:sldId id="271" r:id="rId17"/>
   </p:sldIdLst>
   <p:sldSz cx="9144000" cy="5143500" type="screen16x9"/>
   <p:notesSz cx="6858000" cy="9144000"/>
+  <p:embeddedFontLst>
+    <p:embeddedFont>
+      <p:font typeface="Roboto Mono" pitchFamily="49" charset="0"/>
+      <p:regular r:id="rId19"/>
+      <p:bold r:id="rId20"/>
+      <p:italic r:id="rId21"/>
+      <p:boldItalic r:id="rId22"/>
+    </p:embeddedFont>
+  </p:embeddedFontLst>
   <p:defaultTextStyle>
     <a:defPPr marR="0" lvl="0" algn="l" rtl="0">
       <a:lnSpc>
@@ -978,7 +990,7 @@
   <p:cSld>
     <p:spTree>
       <p:nvGrpSpPr>
-        <p:cNvPr id="1" name="Shape 129"/>
+        <p:cNvPr id="1" name="Shape 132"/>
         <p:cNvGrpSpPr/>
         <p:nvPr/>
       </p:nvGrpSpPr>
@@ -992,7 +1004,7 @@
       </p:grpSpPr>
       <p:sp>
         <p:nvSpPr>
-          <p:cNvPr id="130" name="Google Shape;130;g2bd2b85a9e6_0_0:notes"/>
+          <p:cNvPr id="133" name="Google Shape;133;g2bd6b57c3f9_0_0:notes"/>
           <p:cNvSpPr>
             <a:spLocks noGrp="1" noRot="1" noChangeAspect="1"/>
           </p:cNvSpPr>
@@ -1043,7 +1055,7 @@
       </p:sp>
       <p:sp>
         <p:nvSpPr>
-          <p:cNvPr id="131" name="Google Shape;131;g2bd2b85a9e6_0_0:notes"/>
+          <p:cNvPr id="134" name="Google Shape;134;g2bd6b57c3f9_0_0:notes"/>
           <p:cNvSpPr txBox="1">
             <a:spLocks noGrp="1"/>
           </p:cNvSpPr>
@@ -1100,7 +1112,7 @@
   <p:cSld>
     <p:spTree>
       <p:nvGrpSpPr>
-        <p:cNvPr id="1" name="Shape 135"/>
+        <p:cNvPr id="1" name="Shape 142"/>
         <p:cNvGrpSpPr/>
         <p:nvPr/>
       </p:nvGrpSpPr>
@@ -1114,7 +1126,7 @@
       </p:grpSpPr>
       <p:sp>
         <p:nvSpPr>
-          <p:cNvPr id="136" name="Google Shape;136;p10:notes"/>
+          <p:cNvPr id="143" name="Google Shape;143;g2bd583588fc_0_0:notes"/>
           <p:cNvSpPr>
             <a:spLocks noGrp="1" noRot="1" noChangeAspect="1"/>
           </p:cNvSpPr>
@@ -1165,7 +1177,7 @@
       </p:sp>
       <p:sp>
         <p:nvSpPr>
-          <p:cNvPr id="137" name="Google Shape;137;p10:notes"/>
+          <p:cNvPr id="144" name="Google Shape;144;g2bd583588fc_0_0:notes"/>
           <p:cNvSpPr txBox="1">
             <a:spLocks noGrp="1"/>
           </p:cNvSpPr>
@@ -1222,7 +1234,7 @@
   <p:cSld>
     <p:spTree>
       <p:nvGrpSpPr>
-        <p:cNvPr id="1" name="Shape 144"/>
+        <p:cNvPr id="1" name="Shape 152"/>
         <p:cNvGrpSpPr/>
         <p:nvPr/>
       </p:nvGrpSpPr>
@@ -1236,7 +1248,7 @@
       </p:grpSpPr>
       <p:sp>
         <p:nvSpPr>
-          <p:cNvPr id="145" name="Google Shape;145;p11:notes"/>
+          <p:cNvPr id="153" name="Google Shape;153;g2bd583588fc_0_12:notes"/>
           <p:cNvSpPr>
             <a:spLocks noGrp="1" noRot="1" noChangeAspect="1"/>
           </p:cNvSpPr>
@@ -1287,7 +1299,7 @@
       </p:sp>
       <p:sp>
         <p:nvSpPr>
-          <p:cNvPr id="146" name="Google Shape;146;p11:notes"/>
+          <p:cNvPr id="154" name="Google Shape;154;g2bd583588fc_0_12:notes"/>
           <p:cNvSpPr txBox="1">
             <a:spLocks noGrp="1"/>
           </p:cNvSpPr>
@@ -1344,7 +1356,7 @@
   <p:cSld>
     <p:spTree>
       <p:nvGrpSpPr>
-        <p:cNvPr id="1" name="Shape 152"/>
+        <p:cNvPr id="1" name="Shape 159"/>
         <p:cNvGrpSpPr/>
         <p:nvPr/>
       </p:nvGrpSpPr>
@@ -1358,7 +1370,7 @@
       </p:grpSpPr>
       <p:sp>
         <p:nvSpPr>
-          <p:cNvPr id="153" name="Google Shape;153;p12:notes"/>
+          <p:cNvPr id="160" name="Google Shape;160;g2bd7a686f3e_0_0:notes"/>
           <p:cNvSpPr>
             <a:spLocks noGrp="1" noRot="1" noChangeAspect="1"/>
           </p:cNvSpPr>
@@ -1409,7 +1421,373 @@
       </p:sp>
       <p:sp>
         <p:nvSpPr>
-          <p:cNvPr id="154" name="Google Shape;154;p12:notes"/>
+          <p:cNvPr id="161" name="Google Shape;161;g2bd7a686f3e_0_0:notes"/>
+          <p:cNvSpPr txBox="1">
+            <a:spLocks noGrp="1"/>
+          </p:cNvSpPr>
+          <p:nvPr>
+            <p:ph type="body" idx="1"/>
+          </p:nvPr>
+        </p:nvSpPr>
+        <p:spPr>
+          <a:xfrm>
+            <a:off x="685800" y="4343400"/>
+            <a:ext cx="5486400" cy="4114800"/>
+          </a:xfrm>
+          <a:prstGeom prst="rect">
+            <a:avLst/>
+          </a:prstGeom>
+          <a:noFill/>
+          <a:ln>
+            <a:noFill/>
+          </a:ln>
+        </p:spPr>
+        <p:txBody>
+          <a:bodyPr spcFirstLastPara="1" wrap="square" lIns="91425" tIns="91425" rIns="91425" bIns="91425" anchor="t" anchorCtr="0">
+            <a:noAutofit/>
+          </a:bodyPr>
+          <a:lstStyle/>
+          <a:p>
+            <a:pPr marL="0" lvl="0" indent="0" algn="l" rtl="0">
+              <a:lnSpc>
+                <a:spcPct val="100000"/>
+              </a:lnSpc>
+              <a:spcBef>
+                <a:spcPts val="0"/>
+              </a:spcBef>
+              <a:spcAft>
+                <a:spcPts val="0"/>
+              </a:spcAft>
+              <a:buSzPts val="1100"/>
+              <a:buNone/>
+            </a:pPr>
+            <a:endParaRPr/>
+          </a:p>
+        </p:txBody>
+      </p:sp>
+    </p:spTree>
+  </p:cSld>
+  <p:clrMapOvr>
+    <a:masterClrMapping/>
+  </p:clrMapOvr>
+</p:notes>
+</file>
+
+<file path=ppt/notesSlides/notesSlide14.xml><?xml version="1.0" encoding="utf-8"?>
+<p:notes xmlns:a="http://schemas.openxmlformats.org/drawingml/2006/main" xmlns:r="http://schemas.openxmlformats.org/officeDocument/2006/relationships" xmlns:p="http://schemas.openxmlformats.org/presentationml/2006/main" showMasterSp="0" showMasterPhAnim="0">
+  <p:cSld>
+    <p:spTree>
+      <p:nvGrpSpPr>
+        <p:cNvPr id="1" name="Shape 166"/>
+        <p:cNvGrpSpPr/>
+        <p:nvPr/>
+      </p:nvGrpSpPr>
+      <p:grpSpPr>
+        <a:xfrm>
+          <a:off x="0" y="0"/>
+          <a:ext cx="0" cy="0"/>
+          <a:chOff x="0" y="0"/>
+          <a:chExt cx="0" cy="0"/>
+        </a:xfrm>
+      </p:grpSpPr>
+      <p:sp>
+        <p:nvSpPr>
+          <p:cNvPr id="167" name="Google Shape;167;p10:notes"/>
+          <p:cNvSpPr>
+            <a:spLocks noGrp="1" noRot="1" noChangeAspect="1"/>
+          </p:cNvSpPr>
+          <p:nvPr>
+            <p:ph type="sldImg" idx="2"/>
+          </p:nvPr>
+        </p:nvSpPr>
+        <p:spPr>
+          <a:xfrm>
+            <a:off x="381300" y="685800"/>
+            <a:ext cx="6096000" cy="3429000"/>
+          </a:xfrm>
+          <a:custGeom>
+            <a:avLst/>
+            <a:gdLst/>
+            <a:ahLst/>
+            <a:cxnLst/>
+            <a:rect l="l" t="t" r="r" b="b"/>
+            <a:pathLst>
+              <a:path w="120000" h="120000" extrusionOk="0">
+                <a:moveTo>
+                  <a:pt x="0" y="0"/>
+                </a:moveTo>
+                <a:lnTo>
+                  <a:pt x="120000" y="0"/>
+                </a:lnTo>
+                <a:lnTo>
+                  <a:pt x="120000" y="120000"/>
+                </a:lnTo>
+                <a:lnTo>
+                  <a:pt x="0" y="120000"/>
+                </a:lnTo>
+                <a:close/>
+              </a:path>
+            </a:pathLst>
+          </a:custGeom>
+          <a:noFill/>
+          <a:ln w="9525" cap="flat" cmpd="sng">
+            <a:solidFill>
+              <a:srgbClr val="000000"/>
+            </a:solidFill>
+            <a:prstDash val="solid"/>
+            <a:round/>
+            <a:headEnd type="none" w="sm" len="sm"/>
+            <a:tailEnd type="none" w="sm" len="sm"/>
+          </a:ln>
+        </p:spPr>
+      </p:sp>
+      <p:sp>
+        <p:nvSpPr>
+          <p:cNvPr id="168" name="Google Shape;168;p10:notes"/>
+          <p:cNvSpPr txBox="1">
+            <a:spLocks noGrp="1"/>
+          </p:cNvSpPr>
+          <p:nvPr>
+            <p:ph type="body" idx="1"/>
+          </p:nvPr>
+        </p:nvSpPr>
+        <p:spPr>
+          <a:xfrm>
+            <a:off x="685800" y="4343400"/>
+            <a:ext cx="5486400" cy="4114800"/>
+          </a:xfrm>
+          <a:prstGeom prst="rect">
+            <a:avLst/>
+          </a:prstGeom>
+          <a:noFill/>
+          <a:ln>
+            <a:noFill/>
+          </a:ln>
+        </p:spPr>
+        <p:txBody>
+          <a:bodyPr spcFirstLastPara="1" wrap="square" lIns="91425" tIns="91425" rIns="91425" bIns="91425" anchor="t" anchorCtr="0">
+            <a:noAutofit/>
+          </a:bodyPr>
+          <a:lstStyle/>
+          <a:p>
+            <a:pPr marL="0" lvl="0" indent="0" algn="l" rtl="0">
+              <a:lnSpc>
+                <a:spcPct val="100000"/>
+              </a:lnSpc>
+              <a:spcBef>
+                <a:spcPts val="0"/>
+              </a:spcBef>
+              <a:spcAft>
+                <a:spcPts val="0"/>
+              </a:spcAft>
+              <a:buSzPts val="1100"/>
+              <a:buNone/>
+            </a:pPr>
+            <a:endParaRPr/>
+          </a:p>
+        </p:txBody>
+      </p:sp>
+    </p:spTree>
+  </p:cSld>
+  <p:clrMapOvr>
+    <a:masterClrMapping/>
+  </p:clrMapOvr>
+</p:notes>
+</file>
+
+<file path=ppt/notesSlides/notesSlide15.xml><?xml version="1.0" encoding="utf-8"?>
+<p:notes xmlns:a="http://schemas.openxmlformats.org/drawingml/2006/main" xmlns:r="http://schemas.openxmlformats.org/officeDocument/2006/relationships" xmlns:p="http://schemas.openxmlformats.org/presentationml/2006/main" showMasterSp="0" showMasterPhAnim="0">
+  <p:cSld>
+    <p:spTree>
+      <p:nvGrpSpPr>
+        <p:cNvPr id="1" name="Shape 175"/>
+        <p:cNvGrpSpPr/>
+        <p:nvPr/>
+      </p:nvGrpSpPr>
+      <p:grpSpPr>
+        <a:xfrm>
+          <a:off x="0" y="0"/>
+          <a:ext cx="0" cy="0"/>
+          <a:chOff x="0" y="0"/>
+          <a:chExt cx="0" cy="0"/>
+        </a:xfrm>
+      </p:grpSpPr>
+      <p:sp>
+        <p:nvSpPr>
+          <p:cNvPr id="176" name="Google Shape;176;p11:notes"/>
+          <p:cNvSpPr>
+            <a:spLocks noGrp="1" noRot="1" noChangeAspect="1"/>
+          </p:cNvSpPr>
+          <p:nvPr>
+            <p:ph type="sldImg" idx="2"/>
+          </p:nvPr>
+        </p:nvSpPr>
+        <p:spPr>
+          <a:xfrm>
+            <a:off x="381300" y="685800"/>
+            <a:ext cx="6096000" cy="3429000"/>
+          </a:xfrm>
+          <a:custGeom>
+            <a:avLst/>
+            <a:gdLst/>
+            <a:ahLst/>
+            <a:cxnLst/>
+            <a:rect l="l" t="t" r="r" b="b"/>
+            <a:pathLst>
+              <a:path w="120000" h="120000" extrusionOk="0">
+                <a:moveTo>
+                  <a:pt x="0" y="0"/>
+                </a:moveTo>
+                <a:lnTo>
+                  <a:pt x="120000" y="0"/>
+                </a:lnTo>
+                <a:lnTo>
+                  <a:pt x="120000" y="120000"/>
+                </a:lnTo>
+                <a:lnTo>
+                  <a:pt x="0" y="120000"/>
+                </a:lnTo>
+                <a:close/>
+              </a:path>
+            </a:pathLst>
+          </a:custGeom>
+          <a:noFill/>
+          <a:ln w="9525" cap="flat" cmpd="sng">
+            <a:solidFill>
+              <a:srgbClr val="000000"/>
+            </a:solidFill>
+            <a:prstDash val="solid"/>
+            <a:round/>
+            <a:headEnd type="none" w="sm" len="sm"/>
+            <a:tailEnd type="none" w="sm" len="sm"/>
+          </a:ln>
+        </p:spPr>
+      </p:sp>
+      <p:sp>
+        <p:nvSpPr>
+          <p:cNvPr id="177" name="Google Shape;177;p11:notes"/>
+          <p:cNvSpPr txBox="1">
+            <a:spLocks noGrp="1"/>
+          </p:cNvSpPr>
+          <p:nvPr>
+            <p:ph type="body" idx="1"/>
+          </p:nvPr>
+        </p:nvSpPr>
+        <p:spPr>
+          <a:xfrm>
+            <a:off x="685800" y="4343400"/>
+            <a:ext cx="5486400" cy="4114800"/>
+          </a:xfrm>
+          <a:prstGeom prst="rect">
+            <a:avLst/>
+          </a:prstGeom>
+          <a:noFill/>
+          <a:ln>
+            <a:noFill/>
+          </a:ln>
+        </p:spPr>
+        <p:txBody>
+          <a:bodyPr spcFirstLastPara="1" wrap="square" lIns="91425" tIns="91425" rIns="91425" bIns="91425" anchor="t" anchorCtr="0">
+            <a:noAutofit/>
+          </a:bodyPr>
+          <a:lstStyle/>
+          <a:p>
+            <a:pPr marL="0" lvl="0" indent="0" algn="l" rtl="0">
+              <a:lnSpc>
+                <a:spcPct val="100000"/>
+              </a:lnSpc>
+              <a:spcBef>
+                <a:spcPts val="0"/>
+              </a:spcBef>
+              <a:spcAft>
+                <a:spcPts val="0"/>
+              </a:spcAft>
+              <a:buSzPts val="1100"/>
+              <a:buNone/>
+            </a:pPr>
+            <a:endParaRPr/>
+          </a:p>
+        </p:txBody>
+      </p:sp>
+    </p:spTree>
+  </p:cSld>
+  <p:clrMapOvr>
+    <a:masterClrMapping/>
+  </p:clrMapOvr>
+</p:notes>
+</file>
+
+<file path=ppt/notesSlides/notesSlide16.xml><?xml version="1.0" encoding="utf-8"?>
+<p:notes xmlns:a="http://schemas.openxmlformats.org/drawingml/2006/main" xmlns:r="http://schemas.openxmlformats.org/officeDocument/2006/relationships" xmlns:p="http://schemas.openxmlformats.org/presentationml/2006/main" showMasterSp="0" showMasterPhAnim="0">
+  <p:cSld>
+    <p:spTree>
+      <p:nvGrpSpPr>
+        <p:cNvPr id="1" name="Shape 183"/>
+        <p:cNvGrpSpPr/>
+        <p:nvPr/>
+      </p:nvGrpSpPr>
+      <p:grpSpPr>
+        <a:xfrm>
+          <a:off x="0" y="0"/>
+          <a:ext cx="0" cy="0"/>
+          <a:chOff x="0" y="0"/>
+          <a:chExt cx="0" cy="0"/>
+        </a:xfrm>
+      </p:grpSpPr>
+      <p:sp>
+        <p:nvSpPr>
+          <p:cNvPr id="184" name="Google Shape;184;p12:notes"/>
+          <p:cNvSpPr>
+            <a:spLocks noGrp="1" noRot="1" noChangeAspect="1"/>
+          </p:cNvSpPr>
+          <p:nvPr>
+            <p:ph type="sldImg" idx="2"/>
+          </p:nvPr>
+        </p:nvSpPr>
+        <p:spPr>
+          <a:xfrm>
+            <a:off x="381300" y="685800"/>
+            <a:ext cx="6096000" cy="3429000"/>
+          </a:xfrm>
+          <a:custGeom>
+            <a:avLst/>
+            <a:gdLst/>
+            <a:ahLst/>
+            <a:cxnLst/>
+            <a:rect l="l" t="t" r="r" b="b"/>
+            <a:pathLst>
+              <a:path w="120000" h="120000" extrusionOk="0">
+                <a:moveTo>
+                  <a:pt x="0" y="0"/>
+                </a:moveTo>
+                <a:lnTo>
+                  <a:pt x="120000" y="0"/>
+                </a:lnTo>
+                <a:lnTo>
+                  <a:pt x="120000" y="120000"/>
+                </a:lnTo>
+                <a:lnTo>
+                  <a:pt x="0" y="120000"/>
+                </a:lnTo>
+                <a:close/>
+              </a:path>
+            </a:pathLst>
+          </a:custGeom>
+          <a:noFill/>
+          <a:ln w="9525" cap="flat" cmpd="sng">
+            <a:solidFill>
+              <a:srgbClr val="000000"/>
+            </a:solidFill>
+            <a:prstDash val="solid"/>
+            <a:round/>
+            <a:headEnd type="none" w="sm" len="sm"/>
+            <a:tailEnd type="none" w="sm" len="sm"/>
+          </a:ln>
+        </p:spPr>
+      </p:sp>
+      <p:sp>
+        <p:nvSpPr>
+          <p:cNvPr id="185" name="Google Shape;185;p12:notes"/>
           <p:cNvSpPr txBox="1">
             <a:spLocks noGrp="1"/>
           </p:cNvSpPr>
@@ -1856,7 +2234,7 @@
         </p:nvSpPr>
         <p:spPr>
           <a:xfrm>
-            <a:off x="381300" y="685800"/>
+            <a:off x="381000" y="685800"/>
             <a:ext cx="6096000" cy="3429000"/>
           </a:xfrm>
           <a:custGeom>
@@ -2198,7 +2576,7 @@
   <p:cSld>
     <p:spTree>
       <p:nvGrpSpPr>
-        <p:cNvPr id="1" name="Shape 107"/>
+        <p:cNvPr id="1" name="Shape 110"/>
         <p:cNvGrpSpPr/>
         <p:nvPr/>
       </p:nvGrpSpPr>
@@ -2212,7 +2590,129 @@
       </p:grpSpPr>
       <p:sp>
         <p:nvSpPr>
-          <p:cNvPr id="108" name="Google Shape;108;p8:notes"/>
+          <p:cNvPr id="111" name="Google Shape;111;p8:notes"/>
+          <p:cNvSpPr>
+            <a:spLocks noGrp="1" noRot="1" noChangeAspect="1"/>
+          </p:cNvSpPr>
+          <p:nvPr>
+            <p:ph type="sldImg" idx="2"/>
+          </p:nvPr>
+        </p:nvSpPr>
+        <p:spPr>
+          <a:xfrm>
+            <a:off x="381000" y="685800"/>
+            <a:ext cx="6096000" cy="3429000"/>
+          </a:xfrm>
+          <a:custGeom>
+            <a:avLst/>
+            <a:gdLst/>
+            <a:ahLst/>
+            <a:cxnLst/>
+            <a:rect l="l" t="t" r="r" b="b"/>
+            <a:pathLst>
+              <a:path w="120000" h="120000" extrusionOk="0">
+                <a:moveTo>
+                  <a:pt x="0" y="0"/>
+                </a:moveTo>
+                <a:lnTo>
+                  <a:pt x="120000" y="0"/>
+                </a:lnTo>
+                <a:lnTo>
+                  <a:pt x="120000" y="120000"/>
+                </a:lnTo>
+                <a:lnTo>
+                  <a:pt x="0" y="120000"/>
+                </a:lnTo>
+                <a:close/>
+              </a:path>
+            </a:pathLst>
+          </a:custGeom>
+          <a:noFill/>
+          <a:ln w="9525" cap="flat" cmpd="sng">
+            <a:solidFill>
+              <a:srgbClr val="000000"/>
+            </a:solidFill>
+            <a:prstDash val="solid"/>
+            <a:round/>
+            <a:headEnd type="none" w="sm" len="sm"/>
+            <a:tailEnd type="none" w="sm" len="sm"/>
+          </a:ln>
+        </p:spPr>
+      </p:sp>
+      <p:sp>
+        <p:nvSpPr>
+          <p:cNvPr id="112" name="Google Shape;112;p8:notes"/>
+          <p:cNvSpPr txBox="1">
+            <a:spLocks noGrp="1"/>
+          </p:cNvSpPr>
+          <p:nvPr>
+            <p:ph type="body" idx="1"/>
+          </p:nvPr>
+        </p:nvSpPr>
+        <p:spPr>
+          <a:xfrm>
+            <a:off x="685800" y="4343400"/>
+            <a:ext cx="5486400" cy="4114800"/>
+          </a:xfrm>
+          <a:prstGeom prst="rect">
+            <a:avLst/>
+          </a:prstGeom>
+          <a:noFill/>
+          <a:ln>
+            <a:noFill/>
+          </a:ln>
+        </p:spPr>
+        <p:txBody>
+          <a:bodyPr spcFirstLastPara="1" wrap="square" lIns="91425" tIns="91425" rIns="91425" bIns="91425" anchor="t" anchorCtr="0">
+            <a:noAutofit/>
+          </a:bodyPr>
+          <a:lstStyle/>
+          <a:p>
+            <a:pPr marL="0" lvl="0" indent="0" algn="l" rtl="0">
+              <a:lnSpc>
+                <a:spcPct val="100000"/>
+              </a:lnSpc>
+              <a:spcBef>
+                <a:spcPts val="0"/>
+              </a:spcBef>
+              <a:spcAft>
+                <a:spcPts val="0"/>
+              </a:spcAft>
+              <a:buSzPts val="1100"/>
+              <a:buNone/>
+            </a:pPr>
+            <a:endParaRPr/>
+          </a:p>
+        </p:txBody>
+      </p:sp>
+    </p:spTree>
+  </p:cSld>
+  <p:clrMapOvr>
+    <a:masterClrMapping/>
+  </p:clrMapOvr>
+</p:notes>
+</file>
+
+<file path=ppt/notesSlides/notesSlide9.xml><?xml version="1.0" encoding="utf-8"?>
+<p:notes xmlns:a="http://schemas.openxmlformats.org/drawingml/2006/main" xmlns:r="http://schemas.openxmlformats.org/officeDocument/2006/relationships" xmlns:p="http://schemas.openxmlformats.org/presentationml/2006/main" showMasterSp="0" showMasterPhAnim="0">
+  <p:cSld>
+    <p:spTree>
+      <p:nvGrpSpPr>
+        <p:cNvPr id="1" name="Shape 119"/>
+        <p:cNvGrpSpPr/>
+        <p:nvPr/>
+      </p:nvGrpSpPr>
+      <p:grpSpPr>
+        <a:xfrm>
+          <a:off x="0" y="0"/>
+          <a:ext cx="0" cy="0"/>
+          <a:chOff x="0" y="0"/>
+          <a:chExt cx="0" cy="0"/>
+        </a:xfrm>
+      </p:grpSpPr>
+      <p:sp>
+        <p:nvSpPr>
+          <p:cNvPr id="120" name="Google Shape;120;p9:notes"/>
           <p:cNvSpPr>
             <a:spLocks noGrp="1" noRot="1" noChangeAspect="1"/>
           </p:cNvSpPr>
@@ -2263,129 +2763,7 @@
       </p:sp>
       <p:sp>
         <p:nvSpPr>
-          <p:cNvPr id="109" name="Google Shape;109;p8:notes"/>
-          <p:cNvSpPr txBox="1">
-            <a:spLocks noGrp="1"/>
-          </p:cNvSpPr>
-          <p:nvPr>
-            <p:ph type="body" idx="1"/>
-          </p:nvPr>
-        </p:nvSpPr>
-        <p:spPr>
-          <a:xfrm>
-            <a:off x="685800" y="4343400"/>
-            <a:ext cx="5486400" cy="4114800"/>
-          </a:xfrm>
-          <a:prstGeom prst="rect">
-            <a:avLst/>
-          </a:prstGeom>
-          <a:noFill/>
-          <a:ln>
-            <a:noFill/>
-          </a:ln>
-        </p:spPr>
-        <p:txBody>
-          <a:bodyPr spcFirstLastPara="1" wrap="square" lIns="91425" tIns="91425" rIns="91425" bIns="91425" anchor="t" anchorCtr="0">
-            <a:noAutofit/>
-          </a:bodyPr>
-          <a:lstStyle/>
-          <a:p>
-            <a:pPr marL="0" lvl="0" indent="0" algn="l" rtl="0">
-              <a:lnSpc>
-                <a:spcPct val="100000"/>
-              </a:lnSpc>
-              <a:spcBef>
-                <a:spcPts val="0"/>
-              </a:spcBef>
-              <a:spcAft>
-                <a:spcPts val="0"/>
-              </a:spcAft>
-              <a:buSzPts val="1100"/>
-              <a:buNone/>
-            </a:pPr>
-            <a:endParaRPr/>
-          </a:p>
-        </p:txBody>
-      </p:sp>
-    </p:spTree>
-  </p:cSld>
-  <p:clrMapOvr>
-    <a:masterClrMapping/>
-  </p:clrMapOvr>
-</p:notes>
-</file>
-
-<file path=ppt/notesSlides/notesSlide9.xml><?xml version="1.0" encoding="utf-8"?>
-<p:notes xmlns:a="http://schemas.openxmlformats.org/drawingml/2006/main" xmlns:r="http://schemas.openxmlformats.org/officeDocument/2006/relationships" xmlns:p="http://schemas.openxmlformats.org/presentationml/2006/main" showMasterSp="0" showMasterPhAnim="0">
-  <p:cSld>
-    <p:spTree>
-      <p:nvGrpSpPr>
-        <p:cNvPr id="1" name="Shape 116"/>
-        <p:cNvGrpSpPr/>
-        <p:nvPr/>
-      </p:nvGrpSpPr>
-      <p:grpSpPr>
-        <a:xfrm>
-          <a:off x="0" y="0"/>
-          <a:ext cx="0" cy="0"/>
-          <a:chOff x="0" y="0"/>
-          <a:chExt cx="0" cy="0"/>
-        </a:xfrm>
-      </p:grpSpPr>
-      <p:sp>
-        <p:nvSpPr>
-          <p:cNvPr id="117" name="Google Shape;117;p9:notes"/>
-          <p:cNvSpPr>
-            <a:spLocks noGrp="1" noRot="1" noChangeAspect="1"/>
-          </p:cNvSpPr>
-          <p:nvPr>
-            <p:ph type="sldImg" idx="2"/>
-          </p:nvPr>
-        </p:nvSpPr>
-        <p:spPr>
-          <a:xfrm>
-            <a:off x="381300" y="685800"/>
-            <a:ext cx="6096000" cy="3429000"/>
-          </a:xfrm>
-          <a:custGeom>
-            <a:avLst/>
-            <a:gdLst/>
-            <a:ahLst/>
-            <a:cxnLst/>
-            <a:rect l="l" t="t" r="r" b="b"/>
-            <a:pathLst>
-              <a:path w="120000" h="120000" extrusionOk="0">
-                <a:moveTo>
-                  <a:pt x="0" y="0"/>
-                </a:moveTo>
-                <a:lnTo>
-                  <a:pt x="120000" y="0"/>
-                </a:lnTo>
-                <a:lnTo>
-                  <a:pt x="120000" y="120000"/>
-                </a:lnTo>
-                <a:lnTo>
-                  <a:pt x="0" y="120000"/>
-                </a:lnTo>
-                <a:close/>
-              </a:path>
-            </a:pathLst>
-          </a:custGeom>
-          <a:noFill/>
-          <a:ln w="9525" cap="flat" cmpd="sng">
-            <a:solidFill>
-              <a:srgbClr val="000000"/>
-            </a:solidFill>
-            <a:prstDash val="solid"/>
-            <a:round/>
-            <a:headEnd type="none" w="sm" len="sm"/>
-            <a:tailEnd type="none" w="sm" len="sm"/>
-          </a:ln>
-        </p:spPr>
-      </p:sp>
-      <p:sp>
-        <p:nvSpPr>
-          <p:cNvPr id="118" name="Google Shape;118;p9:notes"/>
+          <p:cNvPr id="121" name="Google Shape;121;p9:notes"/>
           <p:cNvSpPr txBox="1">
             <a:spLocks noGrp="1"/>
           </p:cNvSpPr>
@@ -10206,7 +10584,7 @@
         <p:spPr>
           <a:xfrm>
             <a:off x="137850" y="1280228"/>
-            <a:ext cx="4342500" cy="431100"/>
+            <a:ext cx="4342500" cy="3386400"/>
           </a:xfrm>
           <a:prstGeom prst="rect">
             <a:avLst/>
@@ -10246,25 +10624,400 @@
               <a:buChar char="●"/>
             </a:pPr>
             <a:r>
-              <a:rPr lang="en" sz="1600" b="1" i="0" u="none" strike="noStrike" cap="none">
+              <a:rPr lang="en" sz="1600" b="1">
                 <a:solidFill>
                   <a:srgbClr val="3C78D8"/>
                 </a:solidFill>
-                <a:latin typeface="Arial"/>
-                <a:ea typeface="Arial"/>
-                <a:cs typeface="Arial"/>
-                <a:sym typeface="Arial"/>
-              </a:rPr>
-              <a:t>xxx</a:t>
-            </a:r>
-            <a:endParaRPr sz="1600" b="1" i="0" u="none" strike="noStrike" cap="none">
+              </a:rPr>
+              <a:t>Mistral Large </a:t>
+            </a:r>
+            <a:endParaRPr sz="1600" b="1">
               <a:solidFill>
                 <a:srgbClr val="3C78D8"/>
               </a:solidFill>
-              <a:latin typeface="Arial"/>
-              <a:ea typeface="Arial"/>
-              <a:cs typeface="Arial"/>
-              <a:sym typeface="Arial"/>
+            </a:endParaRPr>
+          </a:p>
+          <a:p>
+            <a:pPr marL="228600" marR="0" lvl="0" indent="-215900" algn="l" rtl="0">
+              <a:lnSpc>
+                <a:spcPct val="100000"/>
+              </a:lnSpc>
+              <a:spcBef>
+                <a:spcPts val="0"/>
+              </a:spcBef>
+              <a:spcAft>
+                <a:spcPts val="0"/>
+              </a:spcAft>
+              <a:buClr>
+                <a:srgbClr val="3C78D8"/>
+              </a:buClr>
+              <a:buSzPts val="1600"/>
+              <a:buFont typeface="Arial"/>
+              <a:buChar char="●"/>
+            </a:pPr>
+            <a:r>
+              <a:rPr lang="en" sz="1600" b="1">
+                <a:solidFill>
+                  <a:srgbClr val="3C78D8"/>
+                </a:solidFill>
+              </a:rPr>
+              <a:t>Andrej Karpathy - Tokenizers</a:t>
+            </a:r>
+            <a:endParaRPr sz="1600" b="1">
+              <a:solidFill>
+                <a:srgbClr val="3C78D8"/>
+              </a:solidFill>
+            </a:endParaRPr>
+          </a:p>
+          <a:p>
+            <a:pPr marL="228600" marR="0" lvl="0" indent="-215900" algn="l" rtl="0">
+              <a:lnSpc>
+                <a:spcPct val="100000"/>
+              </a:lnSpc>
+              <a:spcBef>
+                <a:spcPts val="0"/>
+              </a:spcBef>
+              <a:spcAft>
+                <a:spcPts val="0"/>
+              </a:spcAft>
+              <a:buClr>
+                <a:srgbClr val="3C78D8"/>
+              </a:buClr>
+              <a:buSzPts val="1600"/>
+              <a:buFont typeface="Arial"/>
+              <a:buChar char="●"/>
+            </a:pPr>
+            <a:r>
+              <a:rPr lang="en" sz="1600" b="1">
+                <a:solidFill>
+                  <a:srgbClr val="3C78D8"/>
+                </a:solidFill>
+              </a:rPr>
+              <a:t>Robotics</a:t>
+            </a:r>
+            <a:endParaRPr sz="1600" b="1">
+              <a:solidFill>
+                <a:srgbClr val="3C78D8"/>
+              </a:solidFill>
+            </a:endParaRPr>
+          </a:p>
+          <a:p>
+            <a:pPr marL="228600" marR="0" lvl="0" indent="-215900" algn="l" rtl="0">
+              <a:lnSpc>
+                <a:spcPct val="100000"/>
+              </a:lnSpc>
+              <a:spcBef>
+                <a:spcPts val="0"/>
+              </a:spcBef>
+              <a:spcAft>
+                <a:spcPts val="0"/>
+              </a:spcAft>
+              <a:buClr>
+                <a:srgbClr val="3C78D8"/>
+              </a:buClr>
+              <a:buSzPts val="1600"/>
+              <a:buFont typeface="Arial"/>
+              <a:buChar char="●"/>
+            </a:pPr>
+            <a:r>
+              <a:rPr lang="en" sz="1600" b="1">
+                <a:solidFill>
+                  <a:srgbClr val="3C78D8"/>
+                </a:solidFill>
+              </a:rPr>
+              <a:t>NVIDIA Foundation Agent</a:t>
+            </a:r>
+            <a:endParaRPr sz="1600" b="1">
+              <a:solidFill>
+                <a:srgbClr val="3C78D8"/>
+              </a:solidFill>
+            </a:endParaRPr>
+          </a:p>
+          <a:p>
+            <a:pPr marL="228600" marR="0" lvl="0" indent="-215900" algn="l" rtl="0">
+              <a:lnSpc>
+                <a:spcPct val="100000"/>
+              </a:lnSpc>
+              <a:spcBef>
+                <a:spcPts val="0"/>
+              </a:spcBef>
+              <a:spcAft>
+                <a:spcPts val="0"/>
+              </a:spcAft>
+              <a:buClr>
+                <a:srgbClr val="3C78D8"/>
+              </a:buClr>
+              <a:buSzPts val="1600"/>
+              <a:buFont typeface="Arial"/>
+              <a:buChar char="●"/>
+            </a:pPr>
+            <a:r>
+              <a:rPr lang="en" sz="1600" b="1">
+                <a:solidFill>
+                  <a:srgbClr val="3C78D8"/>
+                </a:solidFill>
+              </a:rPr>
+              <a:t>RAG, Embeddings</a:t>
+            </a:r>
+            <a:endParaRPr sz="1600" b="1">
+              <a:solidFill>
+                <a:srgbClr val="3C78D8"/>
+              </a:solidFill>
+            </a:endParaRPr>
+          </a:p>
+          <a:p>
+            <a:pPr marL="228600" marR="0" lvl="0" indent="-215900" algn="l" rtl="0">
+              <a:lnSpc>
+                <a:spcPct val="100000"/>
+              </a:lnSpc>
+              <a:spcBef>
+                <a:spcPts val="0"/>
+              </a:spcBef>
+              <a:spcAft>
+                <a:spcPts val="0"/>
+              </a:spcAft>
+              <a:buClr>
+                <a:srgbClr val="3C78D8"/>
+              </a:buClr>
+              <a:buSzPts val="1600"/>
+              <a:buFont typeface="Arial"/>
+              <a:buChar char="●"/>
+            </a:pPr>
+            <a:r>
+              <a:rPr lang="en" sz="1600" b="1">
+                <a:solidFill>
+                  <a:srgbClr val="3C78D8"/>
+                </a:solidFill>
+              </a:rPr>
+              <a:t>When AI Robots Will Do Everything</a:t>
+            </a:r>
+            <a:endParaRPr sz="1600" b="1">
+              <a:solidFill>
+                <a:srgbClr val="3C78D8"/>
+              </a:solidFill>
+            </a:endParaRPr>
+          </a:p>
+          <a:p>
+            <a:pPr marL="228600" marR="0" lvl="0" indent="-215900" algn="l" rtl="0">
+              <a:lnSpc>
+                <a:spcPct val="100000"/>
+              </a:lnSpc>
+              <a:spcBef>
+                <a:spcPts val="0"/>
+              </a:spcBef>
+              <a:spcAft>
+                <a:spcPts val="0"/>
+              </a:spcAft>
+              <a:buClr>
+                <a:srgbClr val="3C78D8"/>
+              </a:buClr>
+              <a:buSzPts val="1600"/>
+              <a:buFont typeface="Arial"/>
+              <a:buChar char="●"/>
+            </a:pPr>
+            <a:r>
+              <a:rPr lang="en" sz="1600" b="1">
+                <a:solidFill>
+                  <a:srgbClr val="3C78D8"/>
+                </a:solidFill>
+              </a:rPr>
+              <a:t>Post-Scarcity Economics</a:t>
+            </a:r>
+            <a:endParaRPr sz="1600" b="1">
+              <a:solidFill>
+                <a:srgbClr val="3C78D8"/>
+              </a:solidFill>
+            </a:endParaRPr>
+          </a:p>
+          <a:p>
+            <a:pPr marL="228600" marR="0" lvl="0" indent="-215900" algn="l" rtl="0">
+              <a:lnSpc>
+                <a:spcPct val="100000"/>
+              </a:lnSpc>
+              <a:spcBef>
+                <a:spcPts val="0"/>
+              </a:spcBef>
+              <a:spcAft>
+                <a:spcPts val="0"/>
+              </a:spcAft>
+              <a:buClr>
+                <a:srgbClr val="3C78D8"/>
+              </a:buClr>
+              <a:buSzPts val="1600"/>
+              <a:buFont typeface="Arial"/>
+              <a:buChar char="●"/>
+            </a:pPr>
+            <a:r>
+              <a:rPr lang="en" sz="1600" b="1">
+                <a:solidFill>
+                  <a:srgbClr val="3C78D8"/>
+                </a:solidFill>
+              </a:rPr>
+              <a:t>Exponential Growth - Ray Kurzweil</a:t>
+            </a:r>
+            <a:endParaRPr sz="1600" b="1">
+              <a:solidFill>
+                <a:srgbClr val="3C78D8"/>
+              </a:solidFill>
+            </a:endParaRPr>
+          </a:p>
+          <a:p>
+            <a:pPr marL="228600" marR="0" lvl="0" indent="-215900" algn="l" rtl="0">
+              <a:lnSpc>
+                <a:spcPct val="100000"/>
+              </a:lnSpc>
+              <a:spcBef>
+                <a:spcPts val="0"/>
+              </a:spcBef>
+              <a:spcAft>
+                <a:spcPts val="0"/>
+              </a:spcAft>
+              <a:buClr>
+                <a:srgbClr val="3C78D8"/>
+              </a:buClr>
+              <a:buSzPts val="1600"/>
+              <a:buFont typeface="Arial"/>
+              <a:buChar char="●"/>
+            </a:pPr>
+            <a:r>
+              <a:rPr lang="en" sz="1600" b="1">
+                <a:solidFill>
+                  <a:srgbClr val="3C78D8"/>
+                </a:solidFill>
+              </a:rPr>
+              <a:t>How To Make a Simple AI Chatbot</a:t>
+            </a:r>
+            <a:endParaRPr sz="1600" b="1">
+              <a:solidFill>
+                <a:srgbClr val="3C78D8"/>
+              </a:solidFill>
+            </a:endParaRPr>
+          </a:p>
+          <a:p>
+            <a:pPr marL="228600" marR="0" lvl="0" indent="-215900" algn="l" rtl="0">
+              <a:lnSpc>
+                <a:spcPct val="100000"/>
+              </a:lnSpc>
+              <a:spcBef>
+                <a:spcPts val="0"/>
+              </a:spcBef>
+              <a:spcAft>
+                <a:spcPts val="0"/>
+              </a:spcAft>
+              <a:buClr>
+                <a:srgbClr val="3C78D8"/>
+              </a:buClr>
+              <a:buSzPts val="1600"/>
+              <a:buFont typeface="Arial"/>
+              <a:buChar char="●"/>
+            </a:pPr>
+            <a:r>
+              <a:rPr lang="en" sz="1600" b="1">
+                <a:solidFill>
+                  <a:srgbClr val="3C78D8"/>
+                </a:solidFill>
+              </a:rPr>
+              <a:t>Multiple Ways to Create AI Chatbots</a:t>
+            </a:r>
+            <a:endParaRPr sz="1600" b="1">
+              <a:solidFill>
+                <a:srgbClr val="3C78D8"/>
+              </a:solidFill>
+            </a:endParaRPr>
+          </a:p>
+          <a:p>
+            <a:pPr marL="228600" marR="0" lvl="0" indent="-215900" algn="l" rtl="0">
+              <a:lnSpc>
+                <a:spcPct val="100000"/>
+              </a:lnSpc>
+              <a:spcBef>
+                <a:spcPts val="0"/>
+              </a:spcBef>
+              <a:spcAft>
+                <a:spcPts val="0"/>
+              </a:spcAft>
+              <a:buClr>
+                <a:srgbClr val="3C78D8"/>
+              </a:buClr>
+              <a:buSzPts val="1600"/>
+              <a:buFont typeface="Arial"/>
+              <a:buChar char="●"/>
+            </a:pPr>
+            <a:r>
+              <a:rPr lang="en" sz="1600" b="1">
+                <a:solidFill>
+                  <a:srgbClr val="3C78D8"/>
+                </a:solidFill>
+              </a:rPr>
+              <a:t>Web Research using LLM</a:t>
+            </a:r>
+            <a:endParaRPr sz="1600" b="1">
+              <a:solidFill>
+                <a:srgbClr val="3C78D8"/>
+              </a:solidFill>
+            </a:endParaRPr>
+          </a:p>
+          <a:p>
+            <a:pPr marL="228600" marR="0" lvl="0" indent="-215900" algn="l" rtl="0">
+              <a:lnSpc>
+                <a:spcPct val="100000"/>
+              </a:lnSpc>
+              <a:spcBef>
+                <a:spcPts val="0"/>
+              </a:spcBef>
+              <a:spcAft>
+                <a:spcPts val="0"/>
+              </a:spcAft>
+              <a:buClr>
+                <a:srgbClr val="3C78D8"/>
+              </a:buClr>
+              <a:buSzPts val="1600"/>
+              <a:buFont typeface="Arial"/>
+              <a:buChar char="●"/>
+            </a:pPr>
+            <a:r>
+              <a:rPr lang="en" sz="1600" b="1">
+                <a:solidFill>
+                  <a:srgbClr val="3C78D8"/>
+                </a:solidFill>
+              </a:rPr>
+              <a:t>Crowd-sourced "Arena" Leaderboard</a:t>
+            </a:r>
+            <a:endParaRPr sz="1600" b="1">
+              <a:solidFill>
+                <a:srgbClr val="3C78D8"/>
+              </a:solidFill>
+            </a:endParaRPr>
+          </a:p>
+          <a:p>
+            <a:pPr marL="228600" marR="0" lvl="0" indent="-215900" algn="l" rtl="0">
+              <a:lnSpc>
+                <a:spcPct val="100000"/>
+              </a:lnSpc>
+              <a:spcBef>
+                <a:spcPts val="0"/>
+              </a:spcBef>
+              <a:spcAft>
+                <a:spcPts val="0"/>
+              </a:spcAft>
+              <a:buClr>
+                <a:srgbClr val="3C78D8"/>
+              </a:buClr>
+              <a:buSzPts val="1600"/>
+              <a:buChar char="●"/>
+            </a:pPr>
+            <a:r>
+              <a:rPr lang="en" sz="1600" b="1">
+                <a:solidFill>
+                  <a:srgbClr val="3C78D8"/>
+                </a:solidFill>
+              </a:rPr>
+              <a:t>Layoffs.fyi</a:t>
+            </a:r>
+            <a:endParaRPr sz="1600" b="1">
+              <a:solidFill>
+                <a:srgbClr val="3C78D8"/>
+              </a:solidFill>
             </a:endParaRPr>
           </a:p>
         </p:txBody>
@@ -10460,7 +11213,7 @@
   <p:cSld>
     <p:spTree>
       <p:nvGrpSpPr>
-        <p:cNvPr id="1" name="Shape 132"/>
+        <p:cNvPr id="1" name="Shape 135"/>
         <p:cNvGrpSpPr/>
         <p:nvPr/>
       </p:nvGrpSpPr>
@@ -10474,7 +11227,7 @@
       </p:grpSpPr>
       <p:sp>
         <p:nvSpPr>
-          <p:cNvPr id="133" name="Google Shape;133;p22"/>
+          <p:cNvPr id="136" name="Google Shape;136;p22"/>
           <p:cNvSpPr txBox="1"/>
           <p:nvPr/>
         </p:nvSpPr>
@@ -10515,7 +11268,7 @@
               <a:buNone/>
             </a:pPr>
             <a:r>
-              <a:rPr lang="en" sz="2000" b="1" i="0" u="none" strike="noStrike" cap="none">
+              <a:rPr lang="en" sz="2000" b="1">
                 <a:solidFill>
                   <a:schemeClr val="dk1"/>
                 </a:solidFill>
@@ -10524,7 +11277,7 @@
                 <a:cs typeface="Calibri"/>
                 <a:sym typeface="Calibri"/>
               </a:rPr>
-              <a:t>Post-Scarcity Economics</a:t>
+              <a:t>Exponential Growth</a:t>
             </a:r>
             <a:endParaRPr sz="2000" b="1" i="0" u="none" strike="noStrike" cap="none">
               <a:solidFill>
@@ -10540,14 +11293,14 @@
       </p:sp>
       <p:sp>
         <p:nvSpPr>
-          <p:cNvPr id="134" name="Google Shape;134;p22"/>
+          <p:cNvPr id="137" name="Google Shape;137;p22"/>
           <p:cNvSpPr txBox="1"/>
           <p:nvPr/>
         </p:nvSpPr>
         <p:spPr>
           <a:xfrm>
             <a:off x="178175" y="439700"/>
-            <a:ext cx="4133400" cy="585000"/>
+            <a:ext cx="1676400" cy="585000"/>
           </a:xfrm>
           <a:prstGeom prst="rect">
             <a:avLst/>
@@ -10571,22 +11324,17 @@
           </a:bodyPr>
           <a:lstStyle/>
           <a:p>
-            <a:pPr marL="457200" marR="0" lvl="0" indent="-311150" algn="l" rtl="0">
-              <a:lnSpc>
-                <a:spcPct val="100000"/>
-              </a:lnSpc>
-              <a:spcBef>
-                <a:spcPts val="0"/>
-              </a:spcBef>
-              <a:spcAft>
-                <a:spcPts val="0"/>
-              </a:spcAft>
-              <a:buClr>
-                <a:schemeClr val="dk1"/>
-              </a:buClr>
-              <a:buSzPts val="1300"/>
-              <a:buFont typeface="Calibri"/>
-              <a:buChar char="●"/>
+            <a:pPr marL="0" marR="0" lvl="0" indent="0" algn="l" rtl="0">
+              <a:lnSpc>
+                <a:spcPct val="100000"/>
+              </a:lnSpc>
+              <a:spcBef>
+                <a:spcPts val="0"/>
+              </a:spcBef>
+              <a:spcAft>
+                <a:spcPts val="0"/>
+              </a:spcAft>
+              <a:buNone/>
             </a:pPr>
             <a:r>
               <a:rPr lang="en" sz="1300">
@@ -10598,9 +11346,368 @@
                 <a:cs typeface="Calibri"/>
                 <a:sym typeface="Calibri"/>
               </a:rPr>
-              <a:t>Ai was supposed to take boring jobs and allow people to be creative but the opposite happened </a:t>
-            </a:r>
-            <a:endParaRPr sz="1300" b="0" i="0" u="none" strike="noStrike" cap="none">
+              <a:t>1939 - 0.00001 = 1e-5  </a:t>
+            </a:r>
+            <a:endParaRPr sz="1300">
+              <a:solidFill>
+                <a:schemeClr val="dk1"/>
+              </a:solidFill>
+              <a:latin typeface="Calibri"/>
+              <a:ea typeface="Calibri"/>
+              <a:cs typeface="Calibri"/>
+              <a:sym typeface="Calibri"/>
+            </a:endParaRPr>
+          </a:p>
+          <a:p>
+            <a:pPr marL="0" marR="0" lvl="0" indent="0" algn="l" rtl="0">
+              <a:lnSpc>
+                <a:spcPct val="100000"/>
+              </a:lnSpc>
+              <a:spcBef>
+                <a:spcPts val="0"/>
+              </a:spcBef>
+              <a:spcAft>
+                <a:spcPts val="0"/>
+              </a:spcAft>
+              <a:buNone/>
+            </a:pPr>
+            <a:r>
+              <a:rPr lang="en" sz="1300">
+                <a:solidFill>
+                  <a:schemeClr val="dk1"/>
+                </a:solidFill>
+                <a:latin typeface="Calibri"/>
+                <a:ea typeface="Calibri"/>
+                <a:cs typeface="Calibri"/>
+                <a:sym typeface="Calibri"/>
+              </a:rPr>
+              <a:t>2021 - 100 Bln = 1e11</a:t>
+            </a:r>
+            <a:endParaRPr sz="1300">
+              <a:solidFill>
+                <a:schemeClr val="dk1"/>
+              </a:solidFill>
+              <a:latin typeface="Calibri"/>
+              <a:ea typeface="Calibri"/>
+              <a:cs typeface="Calibri"/>
+              <a:sym typeface="Calibri"/>
+            </a:endParaRPr>
+          </a:p>
+        </p:txBody>
+      </p:sp>
+      <p:pic>
+        <p:nvPicPr>
+          <p:cNvPr id="138" name="Google Shape;138;p22"/>
+          <p:cNvPicPr preferRelativeResize="0"/>
+          <p:nvPr/>
+        </p:nvPicPr>
+        <p:blipFill>
+          <a:blip r:embed="rId3" cstate="email">
+            <a:alphaModFix/>
+            <a:extLst>
+              <a:ext uri="{28A0092B-C50C-407E-A947-70E740481C1C}">
+                <a14:useLocalDpi xmlns:a14="http://schemas.microsoft.com/office/drawing/2010/main"/>
+              </a:ext>
+            </a:extLst>
+          </a:blip>
+          <a:stretch>
+            <a:fillRect/>
+          </a:stretch>
+        </p:blipFill>
+        <p:spPr>
+          <a:xfrm>
+            <a:off x="152400" y="1338100"/>
+            <a:ext cx="6579901" cy="3652999"/>
+          </a:xfrm>
+          <a:prstGeom prst="rect">
+            <a:avLst/>
+          </a:prstGeom>
+          <a:noFill/>
+          <a:ln>
+            <a:noFill/>
+          </a:ln>
+        </p:spPr>
+      </p:pic>
+      <p:sp>
+        <p:nvSpPr>
+          <p:cNvPr id="139" name="Google Shape;139;p22"/>
+          <p:cNvSpPr txBox="1"/>
+          <p:nvPr/>
+        </p:nvSpPr>
+        <p:spPr>
+          <a:xfrm>
+            <a:off x="2008950" y="439700"/>
+            <a:ext cx="2960100" cy="785100"/>
+          </a:xfrm>
+          <a:prstGeom prst="rect">
+            <a:avLst/>
+          </a:prstGeom>
+          <a:solidFill>
+            <a:srgbClr val="FFF2CC"/>
+          </a:solidFill>
+          <a:ln w="9525" cap="flat" cmpd="sng">
+            <a:solidFill>
+              <a:srgbClr val="FF0000"/>
+            </a:solidFill>
+            <a:prstDash val="solid"/>
+            <a:round/>
+            <a:headEnd type="none" w="sm" len="sm"/>
+            <a:tailEnd type="none" w="sm" len="sm"/>
+          </a:ln>
+        </p:spPr>
+        <p:txBody>
+          <a:bodyPr spcFirstLastPara="1" wrap="square" lIns="91425" tIns="91425" rIns="91425" bIns="91425" anchor="t" anchorCtr="0">
+            <a:spAutoFit/>
+          </a:bodyPr>
+          <a:lstStyle/>
+          <a:p>
+            <a:pPr marL="0" marR="0" lvl="0" indent="0" algn="l" rtl="0">
+              <a:lnSpc>
+                <a:spcPct val="100000"/>
+              </a:lnSpc>
+              <a:spcBef>
+                <a:spcPts val="0"/>
+              </a:spcBef>
+              <a:spcAft>
+                <a:spcPts val="0"/>
+              </a:spcAft>
+              <a:buNone/>
+            </a:pPr>
+            <a:r>
+              <a:rPr lang="en" sz="1300">
+                <a:solidFill>
+                  <a:schemeClr val="dk1"/>
+                </a:solidFill>
+                <a:latin typeface="Calibri"/>
+                <a:ea typeface="Calibri"/>
+                <a:cs typeface="Calibri"/>
+                <a:sym typeface="Calibri"/>
+              </a:rPr>
+              <a:t>82 years, 16 orders of 10,  53 orders of 2</a:t>
+            </a:r>
+            <a:endParaRPr sz="1300">
+              <a:solidFill>
+                <a:schemeClr val="dk1"/>
+              </a:solidFill>
+              <a:latin typeface="Calibri"/>
+              <a:ea typeface="Calibri"/>
+              <a:cs typeface="Calibri"/>
+              <a:sym typeface="Calibri"/>
+            </a:endParaRPr>
+          </a:p>
+          <a:p>
+            <a:pPr marL="0" marR="0" lvl="0" indent="0" algn="l" rtl="0">
+              <a:lnSpc>
+                <a:spcPct val="100000"/>
+              </a:lnSpc>
+              <a:spcBef>
+                <a:spcPts val="0"/>
+              </a:spcBef>
+              <a:spcAft>
+                <a:spcPts val="0"/>
+              </a:spcAft>
+              <a:buNone/>
+            </a:pPr>
+            <a:r>
+              <a:rPr lang="en" sz="1300">
+                <a:solidFill>
+                  <a:schemeClr val="dk1"/>
+                </a:solidFill>
+                <a:latin typeface="Calibri"/>
+                <a:ea typeface="Calibri"/>
+                <a:cs typeface="Calibri"/>
+                <a:sym typeface="Calibri"/>
+              </a:rPr>
+              <a:t>82/16 =  5.125 years to x10 performance</a:t>
+            </a:r>
+            <a:endParaRPr sz="1300">
+              <a:solidFill>
+                <a:schemeClr val="dk1"/>
+              </a:solidFill>
+              <a:latin typeface="Calibri"/>
+              <a:ea typeface="Calibri"/>
+              <a:cs typeface="Calibri"/>
+              <a:sym typeface="Calibri"/>
+            </a:endParaRPr>
+          </a:p>
+          <a:p>
+            <a:pPr marL="0" marR="0" lvl="0" indent="0" algn="l" rtl="0">
+              <a:lnSpc>
+                <a:spcPct val="100000"/>
+              </a:lnSpc>
+              <a:spcBef>
+                <a:spcPts val="0"/>
+              </a:spcBef>
+              <a:spcAft>
+                <a:spcPts val="0"/>
+              </a:spcAft>
+              <a:buNone/>
+            </a:pPr>
+            <a:r>
+              <a:rPr lang="en" sz="1300">
+                <a:solidFill>
+                  <a:schemeClr val="dk1"/>
+                </a:solidFill>
+                <a:latin typeface="Calibri"/>
+                <a:ea typeface="Calibri"/>
+                <a:cs typeface="Calibri"/>
+                <a:sym typeface="Calibri"/>
+              </a:rPr>
+              <a:t>82/53 =  1.55   years to   x2 performance</a:t>
+            </a:r>
+            <a:endParaRPr sz="1300">
+              <a:solidFill>
+                <a:schemeClr val="dk1"/>
+              </a:solidFill>
+              <a:latin typeface="Calibri"/>
+              <a:ea typeface="Calibri"/>
+              <a:cs typeface="Calibri"/>
+              <a:sym typeface="Calibri"/>
+            </a:endParaRPr>
+          </a:p>
+        </p:txBody>
+      </p:sp>
+      <p:pic>
+        <p:nvPicPr>
+          <p:cNvPr id="140" name="Google Shape;140;p22"/>
+          <p:cNvPicPr preferRelativeResize="0"/>
+          <p:nvPr/>
+        </p:nvPicPr>
+        <p:blipFill>
+          <a:blip r:embed="rId4" cstate="email">
+            <a:alphaModFix/>
+            <a:extLst>
+              <a:ext uri="{28A0092B-C50C-407E-A947-70E740481C1C}">
+                <a14:useLocalDpi xmlns:a14="http://schemas.microsoft.com/office/drawing/2010/main"/>
+              </a:ext>
+            </a:extLst>
+          </a:blip>
+          <a:stretch>
+            <a:fillRect/>
+          </a:stretch>
+        </p:blipFill>
+        <p:spPr>
+          <a:xfrm>
+            <a:off x="6924326" y="81075"/>
+            <a:ext cx="2106899" cy="2216178"/>
+          </a:xfrm>
+          <a:prstGeom prst="rect">
+            <a:avLst/>
+          </a:prstGeom>
+          <a:noFill/>
+          <a:ln>
+            <a:noFill/>
+          </a:ln>
+        </p:spPr>
+      </p:pic>
+      <p:sp>
+        <p:nvSpPr>
+          <p:cNvPr id="141" name="Google Shape;141;p22"/>
+          <p:cNvSpPr txBox="1"/>
+          <p:nvPr/>
+        </p:nvSpPr>
+        <p:spPr>
+          <a:xfrm>
+            <a:off x="7182925" y="2297250"/>
+            <a:ext cx="1589700" cy="634200"/>
+          </a:xfrm>
+          <a:prstGeom prst="rect">
+            <a:avLst/>
+          </a:prstGeom>
+          <a:noFill/>
+          <a:ln>
+            <a:noFill/>
+          </a:ln>
+        </p:spPr>
+        <p:txBody>
+          <a:bodyPr spcFirstLastPara="1" wrap="square" lIns="9125" tIns="9125" rIns="9125" bIns="9125" anchor="t" anchorCtr="0">
+            <a:spAutoFit/>
+          </a:bodyPr>
+          <a:lstStyle/>
+          <a:p>
+            <a:pPr marL="0" marR="0" lvl="0" indent="0" algn="ctr" rtl="0">
+              <a:lnSpc>
+                <a:spcPct val="100000"/>
+              </a:lnSpc>
+              <a:spcBef>
+                <a:spcPts val="0"/>
+              </a:spcBef>
+              <a:spcAft>
+                <a:spcPts val="0"/>
+              </a:spcAft>
+              <a:buClr>
+                <a:srgbClr val="000000"/>
+              </a:buClr>
+              <a:buSzPts val="2000"/>
+              <a:buFont typeface="Arial"/>
+              <a:buNone/>
+            </a:pPr>
+            <a:r>
+              <a:rPr lang="en" sz="2000" b="1">
+                <a:solidFill>
+                  <a:schemeClr val="dk1"/>
+                </a:solidFill>
+                <a:latin typeface="Calibri"/>
+                <a:ea typeface="Calibri"/>
+                <a:cs typeface="Calibri"/>
+                <a:sym typeface="Calibri"/>
+              </a:rPr>
+              <a:t>Ray Kurzweil</a:t>
+            </a:r>
+            <a:endParaRPr sz="2000" b="1">
+              <a:solidFill>
+                <a:schemeClr val="dk1"/>
+              </a:solidFill>
+              <a:latin typeface="Calibri"/>
+              <a:ea typeface="Calibri"/>
+              <a:cs typeface="Calibri"/>
+              <a:sym typeface="Calibri"/>
+            </a:endParaRPr>
+          </a:p>
+          <a:p>
+            <a:pPr marL="0" marR="0" lvl="0" indent="0" algn="ctr" rtl="0">
+              <a:lnSpc>
+                <a:spcPct val="100000"/>
+              </a:lnSpc>
+              <a:spcBef>
+                <a:spcPts val="0"/>
+              </a:spcBef>
+              <a:spcAft>
+                <a:spcPts val="0"/>
+              </a:spcAft>
+              <a:buClr>
+                <a:srgbClr val="000000"/>
+              </a:buClr>
+              <a:buSzPts val="2000"/>
+              <a:buFont typeface="Arial"/>
+              <a:buNone/>
+            </a:pPr>
+            <a:r>
+              <a:rPr lang="en" sz="1000" b="1" u="sng">
+                <a:solidFill>
+                  <a:schemeClr val="hlink"/>
+                </a:solidFill>
+                <a:latin typeface="Calibri"/>
+                <a:ea typeface="Calibri"/>
+                <a:cs typeface="Calibri"/>
+                <a:sym typeface="Calibri"/>
+                <a:hlinkClick r:id="rId5"/>
+              </a:rPr>
+              <a:t>https://www.youtube.com/watch?v=hLFzBZz5IkY</a:t>
+            </a:r>
+            <a:r>
+              <a:rPr lang="en" sz="1000" b="1">
+                <a:solidFill>
+                  <a:schemeClr val="dk1"/>
+                </a:solidFill>
+                <a:latin typeface="Calibri"/>
+                <a:ea typeface="Calibri"/>
+                <a:cs typeface="Calibri"/>
+                <a:sym typeface="Calibri"/>
+              </a:rPr>
+              <a:t> </a:t>
+            </a:r>
+            <a:endParaRPr sz="1000" b="1">
               <a:solidFill>
                 <a:schemeClr val="dk1"/>
               </a:solidFill>
@@ -10625,7 +11732,7 @@
   <p:cSld>
     <p:spTree>
       <p:nvGrpSpPr>
-        <p:cNvPr id="1" name="Shape 138"/>
+        <p:cNvPr id="1" name="Shape 145"/>
         <p:cNvGrpSpPr/>
         <p:nvPr/>
       </p:nvGrpSpPr>
@@ -10639,7 +11746,4521 @@
       </p:grpSpPr>
       <p:sp>
         <p:nvSpPr>
-          <p:cNvPr id="139" name="Google Shape;139;p23"/>
+          <p:cNvPr id="146" name="Google Shape;146;p23"/>
+          <p:cNvSpPr txBox="1"/>
+          <p:nvPr/>
+        </p:nvSpPr>
+        <p:spPr>
+          <a:xfrm>
+            <a:off x="72300" y="0"/>
+            <a:ext cx="4133400" cy="326400"/>
+          </a:xfrm>
+          <a:prstGeom prst="rect">
+            <a:avLst/>
+          </a:prstGeom>
+          <a:noFill/>
+          <a:ln>
+            <a:noFill/>
+          </a:ln>
+        </p:spPr>
+        <p:txBody>
+          <a:bodyPr spcFirstLastPara="1" wrap="square" lIns="9125" tIns="9125" rIns="9125" bIns="9125" anchor="t" anchorCtr="0">
+            <a:spAutoFit/>
+          </a:bodyPr>
+          <a:lstStyle/>
+          <a:p>
+            <a:pPr marL="0" marR="0" lvl="0" indent="0" algn="l" rtl="0">
+              <a:lnSpc>
+                <a:spcPct val="100000"/>
+              </a:lnSpc>
+              <a:spcBef>
+                <a:spcPts val="0"/>
+              </a:spcBef>
+              <a:spcAft>
+                <a:spcPts val="0"/>
+              </a:spcAft>
+              <a:buClr>
+                <a:srgbClr val="000000"/>
+              </a:buClr>
+              <a:buSzPts val="2000"/>
+              <a:buFont typeface="Arial"/>
+              <a:buNone/>
+            </a:pPr>
+            <a:r>
+              <a:rPr lang="en" sz="2000" b="1">
+                <a:solidFill>
+                  <a:schemeClr val="dk1"/>
+                </a:solidFill>
+                <a:latin typeface="Calibri"/>
+                <a:ea typeface="Calibri"/>
+                <a:cs typeface="Calibri"/>
+                <a:sym typeface="Calibri"/>
+              </a:rPr>
+              <a:t>How To Make a Simple AI Chatbot</a:t>
+            </a:r>
+            <a:endParaRPr sz="2000" b="1" i="0" u="none" strike="noStrike" cap="none">
+              <a:solidFill>
+                <a:srgbClr val="000000"/>
+              </a:solidFill>
+              <a:latin typeface="Calibri"/>
+              <a:ea typeface="Calibri"/>
+              <a:cs typeface="Calibri"/>
+              <a:sym typeface="Calibri"/>
+            </a:endParaRPr>
+          </a:p>
+        </p:txBody>
+      </p:sp>
+      <p:sp>
+        <p:nvSpPr>
+          <p:cNvPr id="147" name="Google Shape;147;p23"/>
+          <p:cNvSpPr txBox="1"/>
+          <p:nvPr/>
+        </p:nvSpPr>
+        <p:spPr>
+          <a:xfrm>
+            <a:off x="4806025" y="574275"/>
+            <a:ext cx="4133400" cy="2955300"/>
+          </a:xfrm>
+          <a:prstGeom prst="rect">
+            <a:avLst/>
+          </a:prstGeom>
+          <a:solidFill>
+            <a:srgbClr val="FFF2CC"/>
+          </a:solidFill>
+          <a:ln w="9525" cap="flat" cmpd="sng">
+            <a:solidFill>
+              <a:srgbClr val="FF0000"/>
+            </a:solidFill>
+            <a:prstDash val="solid"/>
+            <a:round/>
+            <a:headEnd type="none" w="sm" len="sm"/>
+            <a:tailEnd type="none" w="sm" len="sm"/>
+          </a:ln>
+        </p:spPr>
+        <p:txBody>
+          <a:bodyPr spcFirstLastPara="1" wrap="square" lIns="91425" tIns="91425" rIns="91425" bIns="91425" anchor="t" anchorCtr="0">
+            <a:spAutoFit/>
+          </a:bodyPr>
+          <a:lstStyle/>
+          <a:p>
+            <a:pPr marL="0" lvl="0" indent="0" algn="l" rtl="0">
+              <a:spcBef>
+                <a:spcPts val="0"/>
+              </a:spcBef>
+              <a:spcAft>
+                <a:spcPts val="0"/>
+              </a:spcAft>
+              <a:buClr>
+                <a:schemeClr val="dk1"/>
+              </a:buClr>
+              <a:buSzPts val="1100"/>
+              <a:buFont typeface="Arial"/>
+              <a:buNone/>
+            </a:pPr>
+            <a:r>
+              <a:rPr lang="en" sz="1000">
+                <a:solidFill>
+                  <a:srgbClr val="3C78D8"/>
+                </a:solidFill>
+                <a:latin typeface="Roboto Mono"/>
+                <a:ea typeface="Roboto Mono"/>
+                <a:cs typeface="Roboto Mono"/>
+                <a:sym typeface="Roboto Mono"/>
+              </a:rPr>
+              <a:t>&lt;!DOCTYPE html&gt;</a:t>
+            </a:r>
+            <a:endParaRPr sz="1000">
+              <a:solidFill>
+                <a:srgbClr val="3C78D8"/>
+              </a:solidFill>
+              <a:latin typeface="Roboto Mono"/>
+              <a:ea typeface="Roboto Mono"/>
+              <a:cs typeface="Roboto Mono"/>
+              <a:sym typeface="Roboto Mono"/>
+            </a:endParaRPr>
+          </a:p>
+          <a:p>
+            <a:pPr marL="0" lvl="0" indent="0" algn="l" rtl="0">
+              <a:spcBef>
+                <a:spcPts val="0"/>
+              </a:spcBef>
+              <a:spcAft>
+                <a:spcPts val="0"/>
+              </a:spcAft>
+              <a:buClr>
+                <a:schemeClr val="dk1"/>
+              </a:buClr>
+              <a:buSzPts val="1100"/>
+              <a:buFont typeface="Arial"/>
+              <a:buNone/>
+            </a:pPr>
+            <a:r>
+              <a:rPr lang="en" sz="1000">
+                <a:solidFill>
+                  <a:srgbClr val="3C78D8"/>
+                </a:solidFill>
+                <a:latin typeface="Roboto Mono"/>
+                <a:ea typeface="Roboto Mono"/>
+                <a:cs typeface="Roboto Mono"/>
+                <a:sym typeface="Roboto Mono"/>
+              </a:rPr>
+              <a:t>&lt;html&gt;</a:t>
+            </a:r>
+            <a:endParaRPr sz="1000">
+              <a:solidFill>
+                <a:srgbClr val="3C78D8"/>
+              </a:solidFill>
+              <a:latin typeface="Roboto Mono"/>
+              <a:ea typeface="Roboto Mono"/>
+              <a:cs typeface="Roboto Mono"/>
+              <a:sym typeface="Roboto Mono"/>
+            </a:endParaRPr>
+          </a:p>
+          <a:p>
+            <a:pPr marL="0" lvl="0" indent="0" algn="l" rtl="0">
+              <a:spcBef>
+                <a:spcPts val="0"/>
+              </a:spcBef>
+              <a:spcAft>
+                <a:spcPts val="0"/>
+              </a:spcAft>
+              <a:buClr>
+                <a:schemeClr val="dk1"/>
+              </a:buClr>
+              <a:buSzPts val="1100"/>
+              <a:buFont typeface="Arial"/>
+              <a:buNone/>
+            </a:pPr>
+            <a:r>
+              <a:rPr lang="en" sz="1000">
+                <a:solidFill>
+                  <a:srgbClr val="3C78D8"/>
+                </a:solidFill>
+                <a:latin typeface="Roboto Mono"/>
+                <a:ea typeface="Roboto Mono"/>
+                <a:cs typeface="Roboto Mono"/>
+                <a:sym typeface="Roboto Mono"/>
+              </a:rPr>
+              <a:t>&lt;head&gt;</a:t>
+            </a:r>
+            <a:endParaRPr sz="1000">
+              <a:solidFill>
+                <a:srgbClr val="3C78D8"/>
+              </a:solidFill>
+              <a:latin typeface="Roboto Mono"/>
+              <a:ea typeface="Roboto Mono"/>
+              <a:cs typeface="Roboto Mono"/>
+              <a:sym typeface="Roboto Mono"/>
+            </a:endParaRPr>
+          </a:p>
+          <a:p>
+            <a:pPr marL="0" lvl="0" indent="0" algn="l" rtl="0">
+              <a:spcBef>
+                <a:spcPts val="0"/>
+              </a:spcBef>
+              <a:spcAft>
+                <a:spcPts val="0"/>
+              </a:spcAft>
+              <a:buClr>
+                <a:schemeClr val="dk1"/>
+              </a:buClr>
+              <a:buSzPts val="1100"/>
+              <a:buFont typeface="Arial"/>
+              <a:buNone/>
+            </a:pPr>
+            <a:r>
+              <a:rPr lang="en" sz="1000">
+                <a:solidFill>
+                  <a:srgbClr val="3C78D8"/>
+                </a:solidFill>
+                <a:latin typeface="Roboto Mono"/>
+                <a:ea typeface="Roboto Mono"/>
+                <a:cs typeface="Roboto Mono"/>
+                <a:sym typeface="Roboto Mono"/>
+              </a:rPr>
+              <a:t>    &lt;title&gt;Chatbot&lt;/title&gt;</a:t>
+            </a:r>
+            <a:endParaRPr sz="1000">
+              <a:solidFill>
+                <a:srgbClr val="3C78D8"/>
+              </a:solidFill>
+              <a:latin typeface="Roboto Mono"/>
+              <a:ea typeface="Roboto Mono"/>
+              <a:cs typeface="Roboto Mono"/>
+              <a:sym typeface="Roboto Mono"/>
+            </a:endParaRPr>
+          </a:p>
+          <a:p>
+            <a:pPr marL="0" lvl="0" indent="0" algn="l" rtl="0">
+              <a:spcBef>
+                <a:spcPts val="0"/>
+              </a:spcBef>
+              <a:spcAft>
+                <a:spcPts val="0"/>
+              </a:spcAft>
+              <a:buClr>
+                <a:schemeClr val="dk1"/>
+              </a:buClr>
+              <a:buSzPts val="1100"/>
+              <a:buFont typeface="Arial"/>
+              <a:buNone/>
+            </a:pPr>
+            <a:r>
+              <a:rPr lang="en" sz="1000">
+                <a:solidFill>
+                  <a:srgbClr val="3C78D8"/>
+                </a:solidFill>
+                <a:latin typeface="Roboto Mono"/>
+                <a:ea typeface="Roboto Mono"/>
+                <a:cs typeface="Roboto Mono"/>
+                <a:sym typeface="Roboto Mono"/>
+              </a:rPr>
+              <a:t>&lt;/head&gt;</a:t>
+            </a:r>
+            <a:endParaRPr sz="1000">
+              <a:solidFill>
+                <a:srgbClr val="3C78D8"/>
+              </a:solidFill>
+              <a:latin typeface="Roboto Mono"/>
+              <a:ea typeface="Roboto Mono"/>
+              <a:cs typeface="Roboto Mono"/>
+              <a:sym typeface="Roboto Mono"/>
+            </a:endParaRPr>
+          </a:p>
+          <a:p>
+            <a:pPr marL="0" lvl="0" indent="0" algn="l" rtl="0">
+              <a:spcBef>
+                <a:spcPts val="0"/>
+              </a:spcBef>
+              <a:spcAft>
+                <a:spcPts val="0"/>
+              </a:spcAft>
+              <a:buClr>
+                <a:schemeClr val="dk1"/>
+              </a:buClr>
+              <a:buSzPts val="1100"/>
+              <a:buFont typeface="Arial"/>
+              <a:buNone/>
+            </a:pPr>
+            <a:r>
+              <a:rPr lang="en" sz="1000">
+                <a:solidFill>
+                  <a:srgbClr val="3C78D8"/>
+                </a:solidFill>
+                <a:latin typeface="Roboto Mono"/>
+                <a:ea typeface="Roboto Mono"/>
+                <a:cs typeface="Roboto Mono"/>
+                <a:sym typeface="Roboto Mono"/>
+              </a:rPr>
+              <a:t>&lt;body&gt;</a:t>
+            </a:r>
+            <a:endParaRPr sz="1000">
+              <a:solidFill>
+                <a:srgbClr val="3C78D8"/>
+              </a:solidFill>
+              <a:latin typeface="Roboto Mono"/>
+              <a:ea typeface="Roboto Mono"/>
+              <a:cs typeface="Roboto Mono"/>
+              <a:sym typeface="Roboto Mono"/>
+            </a:endParaRPr>
+          </a:p>
+          <a:p>
+            <a:pPr marL="0" lvl="0" indent="0" algn="l" rtl="0">
+              <a:spcBef>
+                <a:spcPts val="0"/>
+              </a:spcBef>
+              <a:spcAft>
+                <a:spcPts val="0"/>
+              </a:spcAft>
+              <a:buClr>
+                <a:schemeClr val="dk1"/>
+              </a:buClr>
+              <a:buSzPts val="1100"/>
+              <a:buFont typeface="Arial"/>
+              <a:buNone/>
+            </a:pPr>
+            <a:r>
+              <a:rPr lang="en" sz="1000">
+                <a:solidFill>
+                  <a:srgbClr val="3C78D8"/>
+                </a:solidFill>
+                <a:latin typeface="Roboto Mono"/>
+                <a:ea typeface="Roboto Mono"/>
+                <a:cs typeface="Roboto Mono"/>
+                <a:sym typeface="Roboto Mono"/>
+              </a:rPr>
+              <a:t>    &lt;h1&gt;Chatbot&lt;/h1&gt;</a:t>
+            </a:r>
+            <a:endParaRPr sz="1000">
+              <a:solidFill>
+                <a:srgbClr val="3C78D8"/>
+              </a:solidFill>
+              <a:latin typeface="Roboto Mono"/>
+              <a:ea typeface="Roboto Mono"/>
+              <a:cs typeface="Roboto Mono"/>
+              <a:sym typeface="Roboto Mono"/>
+            </a:endParaRPr>
+          </a:p>
+          <a:p>
+            <a:pPr marL="0" lvl="0" indent="0" algn="l" rtl="0">
+              <a:spcBef>
+                <a:spcPts val="0"/>
+              </a:spcBef>
+              <a:spcAft>
+                <a:spcPts val="0"/>
+              </a:spcAft>
+              <a:buClr>
+                <a:schemeClr val="dk1"/>
+              </a:buClr>
+              <a:buSzPts val="1100"/>
+              <a:buFont typeface="Arial"/>
+              <a:buNone/>
+            </a:pPr>
+            <a:r>
+              <a:rPr lang="en" sz="1000">
+                <a:solidFill>
+                  <a:srgbClr val="3C78D8"/>
+                </a:solidFill>
+                <a:latin typeface="Roboto Mono"/>
+                <a:ea typeface="Roboto Mono"/>
+                <a:cs typeface="Roboto Mono"/>
+                <a:sym typeface="Roboto Mono"/>
+              </a:rPr>
+              <a:t>    &lt;form action="/chat" method="POST"&gt;</a:t>
+            </a:r>
+            <a:endParaRPr sz="1000">
+              <a:solidFill>
+                <a:srgbClr val="3C78D8"/>
+              </a:solidFill>
+              <a:latin typeface="Roboto Mono"/>
+              <a:ea typeface="Roboto Mono"/>
+              <a:cs typeface="Roboto Mono"/>
+              <a:sym typeface="Roboto Mono"/>
+            </a:endParaRPr>
+          </a:p>
+          <a:p>
+            <a:pPr marL="0" lvl="0" indent="0" algn="l" rtl="0">
+              <a:spcBef>
+                <a:spcPts val="0"/>
+              </a:spcBef>
+              <a:spcAft>
+                <a:spcPts val="0"/>
+              </a:spcAft>
+              <a:buNone/>
+            </a:pPr>
+            <a:r>
+              <a:rPr lang="en" sz="1000">
+                <a:solidFill>
+                  <a:srgbClr val="3C78D8"/>
+                </a:solidFill>
+                <a:latin typeface="Roboto Mono"/>
+                <a:ea typeface="Roboto Mono"/>
+                <a:cs typeface="Roboto Mono"/>
+                <a:sym typeface="Roboto Mono"/>
+              </a:rPr>
+              <a:t>        &lt;input type="text" name="user_input" </a:t>
+            </a:r>
+            <a:endParaRPr sz="1000">
+              <a:solidFill>
+                <a:srgbClr val="3C78D8"/>
+              </a:solidFill>
+              <a:latin typeface="Roboto Mono"/>
+              <a:ea typeface="Roboto Mono"/>
+              <a:cs typeface="Roboto Mono"/>
+              <a:sym typeface="Roboto Mono"/>
+            </a:endParaRPr>
+          </a:p>
+          <a:p>
+            <a:pPr marL="0" lvl="0" indent="0" algn="l" rtl="0">
+              <a:spcBef>
+                <a:spcPts val="0"/>
+              </a:spcBef>
+              <a:spcAft>
+                <a:spcPts val="0"/>
+              </a:spcAft>
+              <a:buClr>
+                <a:schemeClr val="dk1"/>
+              </a:buClr>
+              <a:buSzPts val="1100"/>
+              <a:buFont typeface="Arial"/>
+              <a:buNone/>
+            </a:pPr>
+            <a:r>
+              <a:rPr lang="en" sz="1000">
+                <a:solidFill>
+                  <a:srgbClr val="3C78D8"/>
+                </a:solidFill>
+                <a:latin typeface="Roboto Mono"/>
+                <a:ea typeface="Roboto Mono"/>
+                <a:cs typeface="Roboto Mono"/>
+                <a:sym typeface="Roboto Mono"/>
+              </a:rPr>
+              <a:t>               placeholder="Enter your message"&gt;</a:t>
+            </a:r>
+            <a:endParaRPr sz="1000">
+              <a:solidFill>
+                <a:srgbClr val="3C78D8"/>
+              </a:solidFill>
+              <a:latin typeface="Roboto Mono"/>
+              <a:ea typeface="Roboto Mono"/>
+              <a:cs typeface="Roboto Mono"/>
+              <a:sym typeface="Roboto Mono"/>
+            </a:endParaRPr>
+          </a:p>
+          <a:p>
+            <a:pPr marL="0" lvl="0" indent="0" algn="l" rtl="0">
+              <a:spcBef>
+                <a:spcPts val="0"/>
+              </a:spcBef>
+              <a:spcAft>
+                <a:spcPts val="0"/>
+              </a:spcAft>
+              <a:buClr>
+                <a:schemeClr val="dk1"/>
+              </a:buClr>
+              <a:buSzPts val="1100"/>
+              <a:buFont typeface="Arial"/>
+              <a:buNone/>
+            </a:pPr>
+            <a:r>
+              <a:rPr lang="en" sz="1000">
+                <a:solidFill>
+                  <a:srgbClr val="3C78D8"/>
+                </a:solidFill>
+                <a:latin typeface="Roboto Mono"/>
+                <a:ea typeface="Roboto Mono"/>
+                <a:cs typeface="Roboto Mono"/>
+                <a:sym typeface="Roboto Mono"/>
+              </a:rPr>
+              <a:t>        &lt;button type="submit"&gt;Send&lt;/button&gt;</a:t>
+            </a:r>
+            <a:endParaRPr sz="1000">
+              <a:solidFill>
+                <a:srgbClr val="3C78D8"/>
+              </a:solidFill>
+              <a:latin typeface="Roboto Mono"/>
+              <a:ea typeface="Roboto Mono"/>
+              <a:cs typeface="Roboto Mono"/>
+              <a:sym typeface="Roboto Mono"/>
+            </a:endParaRPr>
+          </a:p>
+          <a:p>
+            <a:pPr marL="0" lvl="0" indent="0" algn="l" rtl="0">
+              <a:spcBef>
+                <a:spcPts val="0"/>
+              </a:spcBef>
+              <a:spcAft>
+                <a:spcPts val="0"/>
+              </a:spcAft>
+              <a:buClr>
+                <a:schemeClr val="dk1"/>
+              </a:buClr>
+              <a:buSzPts val="1100"/>
+              <a:buFont typeface="Arial"/>
+              <a:buNone/>
+            </a:pPr>
+            <a:r>
+              <a:rPr lang="en" sz="1000">
+                <a:solidFill>
+                  <a:srgbClr val="3C78D8"/>
+                </a:solidFill>
+                <a:latin typeface="Roboto Mono"/>
+                <a:ea typeface="Roboto Mono"/>
+                <a:cs typeface="Roboto Mono"/>
+                <a:sym typeface="Roboto Mono"/>
+              </a:rPr>
+              <a:t>    &lt;/form&gt;</a:t>
+            </a:r>
+            <a:endParaRPr sz="1000">
+              <a:solidFill>
+                <a:srgbClr val="3C78D8"/>
+              </a:solidFill>
+              <a:latin typeface="Roboto Mono"/>
+              <a:ea typeface="Roboto Mono"/>
+              <a:cs typeface="Roboto Mono"/>
+              <a:sym typeface="Roboto Mono"/>
+            </a:endParaRPr>
+          </a:p>
+          <a:p>
+            <a:pPr marL="0" lvl="0" indent="0" algn="l" rtl="0">
+              <a:spcBef>
+                <a:spcPts val="0"/>
+              </a:spcBef>
+              <a:spcAft>
+                <a:spcPts val="0"/>
+              </a:spcAft>
+              <a:buClr>
+                <a:schemeClr val="dk1"/>
+              </a:buClr>
+              <a:buSzPts val="1100"/>
+              <a:buFont typeface="Arial"/>
+              <a:buNone/>
+            </a:pPr>
+            <a:r>
+              <a:rPr lang="en" sz="1000">
+                <a:solidFill>
+                  <a:srgbClr val="3C78D8"/>
+                </a:solidFill>
+                <a:latin typeface="Roboto Mono"/>
+                <a:ea typeface="Roboto Mono"/>
+                <a:cs typeface="Roboto Mono"/>
+                <a:sym typeface="Roboto Mono"/>
+              </a:rPr>
+              <a:t>    {% if user_input %}</a:t>
+            </a:r>
+            <a:endParaRPr sz="1000">
+              <a:solidFill>
+                <a:srgbClr val="3C78D8"/>
+              </a:solidFill>
+              <a:latin typeface="Roboto Mono"/>
+              <a:ea typeface="Roboto Mono"/>
+              <a:cs typeface="Roboto Mono"/>
+              <a:sym typeface="Roboto Mono"/>
+            </a:endParaRPr>
+          </a:p>
+          <a:p>
+            <a:pPr marL="0" lvl="0" indent="0" algn="l" rtl="0">
+              <a:spcBef>
+                <a:spcPts val="0"/>
+              </a:spcBef>
+              <a:spcAft>
+                <a:spcPts val="0"/>
+              </a:spcAft>
+              <a:buClr>
+                <a:schemeClr val="dk1"/>
+              </a:buClr>
+              <a:buSzPts val="1100"/>
+              <a:buFont typeface="Arial"/>
+              <a:buNone/>
+            </a:pPr>
+            <a:r>
+              <a:rPr lang="en" sz="1000">
+                <a:solidFill>
+                  <a:srgbClr val="3C78D8"/>
+                </a:solidFill>
+                <a:latin typeface="Roboto Mono"/>
+                <a:ea typeface="Roboto Mono"/>
+                <a:cs typeface="Roboto Mono"/>
+                <a:sym typeface="Roboto Mono"/>
+              </a:rPr>
+              <a:t>        &lt;p&gt;You: {{ user_input }}&lt;/p&gt;</a:t>
+            </a:r>
+            <a:endParaRPr sz="1000">
+              <a:solidFill>
+                <a:srgbClr val="3C78D8"/>
+              </a:solidFill>
+              <a:latin typeface="Roboto Mono"/>
+              <a:ea typeface="Roboto Mono"/>
+              <a:cs typeface="Roboto Mono"/>
+              <a:sym typeface="Roboto Mono"/>
+            </a:endParaRPr>
+          </a:p>
+          <a:p>
+            <a:pPr marL="0" lvl="0" indent="0" algn="l" rtl="0">
+              <a:spcBef>
+                <a:spcPts val="0"/>
+              </a:spcBef>
+              <a:spcAft>
+                <a:spcPts val="0"/>
+              </a:spcAft>
+              <a:buClr>
+                <a:schemeClr val="dk1"/>
+              </a:buClr>
+              <a:buSzPts val="1100"/>
+              <a:buFont typeface="Arial"/>
+              <a:buNone/>
+            </a:pPr>
+            <a:r>
+              <a:rPr lang="en" sz="1000">
+                <a:solidFill>
+                  <a:srgbClr val="3C78D8"/>
+                </a:solidFill>
+                <a:latin typeface="Roboto Mono"/>
+                <a:ea typeface="Roboto Mono"/>
+                <a:cs typeface="Roboto Mono"/>
+                <a:sym typeface="Roboto Mono"/>
+              </a:rPr>
+              <a:t>        &lt;p&gt;Chatbot: {{ ai_response }}&lt;/p&gt;</a:t>
+            </a:r>
+            <a:endParaRPr sz="1000">
+              <a:solidFill>
+                <a:srgbClr val="3C78D8"/>
+              </a:solidFill>
+              <a:latin typeface="Roboto Mono"/>
+              <a:ea typeface="Roboto Mono"/>
+              <a:cs typeface="Roboto Mono"/>
+              <a:sym typeface="Roboto Mono"/>
+            </a:endParaRPr>
+          </a:p>
+          <a:p>
+            <a:pPr marL="0" lvl="0" indent="0" algn="l" rtl="0">
+              <a:spcBef>
+                <a:spcPts val="0"/>
+              </a:spcBef>
+              <a:spcAft>
+                <a:spcPts val="0"/>
+              </a:spcAft>
+              <a:buClr>
+                <a:schemeClr val="dk1"/>
+              </a:buClr>
+              <a:buSzPts val="1100"/>
+              <a:buFont typeface="Arial"/>
+              <a:buNone/>
+            </a:pPr>
+            <a:r>
+              <a:rPr lang="en" sz="1000">
+                <a:solidFill>
+                  <a:srgbClr val="3C78D8"/>
+                </a:solidFill>
+                <a:latin typeface="Roboto Mono"/>
+                <a:ea typeface="Roboto Mono"/>
+                <a:cs typeface="Roboto Mono"/>
+                <a:sym typeface="Roboto Mono"/>
+              </a:rPr>
+              <a:t>    {% endif %}</a:t>
+            </a:r>
+            <a:endParaRPr sz="1000">
+              <a:solidFill>
+                <a:srgbClr val="3C78D8"/>
+              </a:solidFill>
+              <a:latin typeface="Roboto Mono"/>
+              <a:ea typeface="Roboto Mono"/>
+              <a:cs typeface="Roboto Mono"/>
+              <a:sym typeface="Roboto Mono"/>
+            </a:endParaRPr>
+          </a:p>
+          <a:p>
+            <a:pPr marL="0" lvl="0" indent="0" algn="l" rtl="0">
+              <a:spcBef>
+                <a:spcPts val="0"/>
+              </a:spcBef>
+              <a:spcAft>
+                <a:spcPts val="0"/>
+              </a:spcAft>
+              <a:buClr>
+                <a:schemeClr val="dk1"/>
+              </a:buClr>
+              <a:buSzPts val="1100"/>
+              <a:buFont typeface="Arial"/>
+              <a:buNone/>
+            </a:pPr>
+            <a:r>
+              <a:rPr lang="en" sz="1000">
+                <a:solidFill>
+                  <a:srgbClr val="3C78D8"/>
+                </a:solidFill>
+                <a:latin typeface="Roboto Mono"/>
+                <a:ea typeface="Roboto Mono"/>
+                <a:cs typeface="Roboto Mono"/>
+                <a:sym typeface="Roboto Mono"/>
+              </a:rPr>
+              <a:t>&lt;/body&gt;</a:t>
+            </a:r>
+            <a:endParaRPr sz="1000">
+              <a:solidFill>
+                <a:srgbClr val="3C78D8"/>
+              </a:solidFill>
+              <a:latin typeface="Roboto Mono"/>
+              <a:ea typeface="Roboto Mono"/>
+              <a:cs typeface="Roboto Mono"/>
+              <a:sym typeface="Roboto Mono"/>
+            </a:endParaRPr>
+          </a:p>
+          <a:p>
+            <a:pPr marL="0" lvl="0" indent="0" algn="l" rtl="0">
+              <a:spcBef>
+                <a:spcPts val="0"/>
+              </a:spcBef>
+              <a:spcAft>
+                <a:spcPts val="0"/>
+              </a:spcAft>
+              <a:buNone/>
+            </a:pPr>
+            <a:r>
+              <a:rPr lang="en" sz="1000">
+                <a:solidFill>
+                  <a:srgbClr val="3C78D8"/>
+                </a:solidFill>
+                <a:latin typeface="Roboto Mono"/>
+                <a:ea typeface="Roboto Mono"/>
+                <a:cs typeface="Roboto Mono"/>
+                <a:sym typeface="Roboto Mono"/>
+              </a:rPr>
+              <a:t>&lt;/html&gt;</a:t>
+            </a:r>
+            <a:endParaRPr sz="1000">
+              <a:solidFill>
+                <a:srgbClr val="3C78D8"/>
+              </a:solidFill>
+              <a:latin typeface="Roboto Mono"/>
+              <a:ea typeface="Roboto Mono"/>
+              <a:cs typeface="Roboto Mono"/>
+              <a:sym typeface="Roboto Mono"/>
+            </a:endParaRPr>
+          </a:p>
+        </p:txBody>
+      </p:sp>
+      <p:sp>
+        <p:nvSpPr>
+          <p:cNvPr id="148" name="Google Shape;148;p23"/>
+          <p:cNvSpPr txBox="1"/>
+          <p:nvPr/>
+        </p:nvSpPr>
+        <p:spPr>
+          <a:xfrm>
+            <a:off x="72300" y="574280"/>
+            <a:ext cx="4622100" cy="4340700"/>
+          </a:xfrm>
+          <a:prstGeom prst="rect">
+            <a:avLst/>
+          </a:prstGeom>
+          <a:solidFill>
+            <a:srgbClr val="FFF2CC"/>
+          </a:solidFill>
+          <a:ln w="9525" cap="flat" cmpd="sng">
+            <a:solidFill>
+              <a:srgbClr val="FF0000"/>
+            </a:solidFill>
+            <a:prstDash val="solid"/>
+            <a:round/>
+            <a:headEnd type="none" w="sm" len="sm"/>
+            <a:tailEnd type="none" w="sm" len="sm"/>
+          </a:ln>
+        </p:spPr>
+        <p:txBody>
+          <a:bodyPr spcFirstLastPara="1" wrap="square" lIns="91425" tIns="91425" rIns="91425" bIns="91425" anchor="t" anchorCtr="0">
+            <a:spAutoFit/>
+          </a:bodyPr>
+          <a:lstStyle/>
+          <a:p>
+            <a:pPr marL="0" lvl="0" indent="0" algn="l" rtl="0">
+              <a:spcBef>
+                <a:spcPts val="0"/>
+              </a:spcBef>
+              <a:spcAft>
+                <a:spcPts val="0"/>
+              </a:spcAft>
+              <a:buClr>
+                <a:schemeClr val="dk1"/>
+              </a:buClr>
+              <a:buSzPts val="1100"/>
+              <a:buFont typeface="Arial"/>
+              <a:buNone/>
+            </a:pPr>
+            <a:r>
+              <a:rPr lang="en" sz="1000">
+                <a:solidFill>
+                  <a:srgbClr val="3C78D8"/>
+                </a:solidFill>
+                <a:latin typeface="Roboto Mono"/>
+                <a:ea typeface="Roboto Mono"/>
+                <a:cs typeface="Roboto Mono"/>
+                <a:sym typeface="Roboto Mono"/>
+              </a:rPr>
+              <a:t># pip install flask, openai</a:t>
+            </a:r>
+            <a:endParaRPr sz="1000">
+              <a:solidFill>
+                <a:srgbClr val="3C78D8"/>
+              </a:solidFill>
+              <a:latin typeface="Roboto Mono"/>
+              <a:ea typeface="Roboto Mono"/>
+              <a:cs typeface="Roboto Mono"/>
+              <a:sym typeface="Roboto Mono"/>
+            </a:endParaRPr>
+          </a:p>
+          <a:p>
+            <a:pPr marL="0" lvl="0" indent="0" algn="l" rtl="0">
+              <a:spcBef>
+                <a:spcPts val="0"/>
+              </a:spcBef>
+              <a:spcAft>
+                <a:spcPts val="0"/>
+              </a:spcAft>
+              <a:buClr>
+                <a:schemeClr val="dk1"/>
+              </a:buClr>
+              <a:buSzPts val="1100"/>
+              <a:buFont typeface="Arial"/>
+              <a:buNone/>
+            </a:pPr>
+            <a:r>
+              <a:rPr lang="en" sz="1000">
+                <a:solidFill>
+                  <a:srgbClr val="3C78D8"/>
+                </a:solidFill>
+                <a:latin typeface="Roboto Mono"/>
+                <a:ea typeface="Roboto Mono"/>
+                <a:cs typeface="Roboto Mono"/>
+                <a:sym typeface="Roboto Mono"/>
+              </a:rPr>
+              <a:t>import os</a:t>
+            </a:r>
+            <a:endParaRPr sz="1000">
+              <a:solidFill>
+                <a:srgbClr val="3C78D8"/>
+              </a:solidFill>
+              <a:latin typeface="Roboto Mono"/>
+              <a:ea typeface="Roboto Mono"/>
+              <a:cs typeface="Roboto Mono"/>
+              <a:sym typeface="Roboto Mono"/>
+            </a:endParaRPr>
+          </a:p>
+          <a:p>
+            <a:pPr marL="0" lvl="0" indent="0" algn="l" rtl="0">
+              <a:spcBef>
+                <a:spcPts val="0"/>
+              </a:spcBef>
+              <a:spcAft>
+                <a:spcPts val="0"/>
+              </a:spcAft>
+              <a:buClr>
+                <a:schemeClr val="dk1"/>
+              </a:buClr>
+              <a:buSzPts val="1100"/>
+              <a:buFont typeface="Arial"/>
+              <a:buNone/>
+            </a:pPr>
+            <a:r>
+              <a:rPr lang="en" sz="1000">
+                <a:solidFill>
+                  <a:srgbClr val="3C78D8"/>
+                </a:solidFill>
+                <a:latin typeface="Roboto Mono"/>
+                <a:ea typeface="Roboto Mono"/>
+                <a:cs typeface="Roboto Mono"/>
+                <a:sym typeface="Roboto Mono"/>
+              </a:rPr>
+              <a:t>from flask import Flask, render_template, request</a:t>
+            </a:r>
+            <a:endParaRPr sz="1000">
+              <a:solidFill>
+                <a:srgbClr val="3C78D8"/>
+              </a:solidFill>
+              <a:latin typeface="Roboto Mono"/>
+              <a:ea typeface="Roboto Mono"/>
+              <a:cs typeface="Roboto Mono"/>
+              <a:sym typeface="Roboto Mono"/>
+            </a:endParaRPr>
+          </a:p>
+          <a:p>
+            <a:pPr marL="0" lvl="0" indent="0" algn="l" rtl="0">
+              <a:spcBef>
+                <a:spcPts val="0"/>
+              </a:spcBef>
+              <a:spcAft>
+                <a:spcPts val="0"/>
+              </a:spcAft>
+              <a:buClr>
+                <a:schemeClr val="dk1"/>
+              </a:buClr>
+              <a:buSzPts val="1100"/>
+              <a:buFont typeface="Arial"/>
+              <a:buNone/>
+            </a:pPr>
+            <a:r>
+              <a:rPr lang="en" sz="1000">
+                <a:solidFill>
+                  <a:srgbClr val="3C78D8"/>
+                </a:solidFill>
+                <a:latin typeface="Roboto Mono"/>
+                <a:ea typeface="Roboto Mono"/>
+                <a:cs typeface="Roboto Mono"/>
+                <a:sym typeface="Roboto Mono"/>
+              </a:rPr>
+              <a:t>from openai import OpenAI</a:t>
+            </a:r>
+            <a:endParaRPr sz="1000">
+              <a:solidFill>
+                <a:srgbClr val="3C78D8"/>
+              </a:solidFill>
+              <a:latin typeface="Roboto Mono"/>
+              <a:ea typeface="Roboto Mono"/>
+              <a:cs typeface="Roboto Mono"/>
+              <a:sym typeface="Roboto Mono"/>
+            </a:endParaRPr>
+          </a:p>
+          <a:p>
+            <a:pPr marL="0" lvl="0" indent="0" algn="l" rtl="0">
+              <a:spcBef>
+                <a:spcPts val="0"/>
+              </a:spcBef>
+              <a:spcAft>
+                <a:spcPts val="0"/>
+              </a:spcAft>
+              <a:buClr>
+                <a:schemeClr val="dk1"/>
+              </a:buClr>
+              <a:buSzPts val="1100"/>
+              <a:buFont typeface="Arial"/>
+              <a:buNone/>
+            </a:pPr>
+            <a:r>
+              <a:rPr lang="en" sz="1000">
+                <a:solidFill>
+                  <a:srgbClr val="3C78D8"/>
+                </a:solidFill>
+                <a:latin typeface="Roboto Mono"/>
+                <a:ea typeface="Roboto Mono"/>
+                <a:cs typeface="Roboto Mono"/>
+                <a:sym typeface="Roboto Mono"/>
+              </a:rPr>
+              <a:t>client = OpenAI(api_key=os.environ.get("OPENAI_API_KEY"))</a:t>
+            </a:r>
+            <a:endParaRPr sz="1000">
+              <a:solidFill>
+                <a:srgbClr val="3C78D8"/>
+              </a:solidFill>
+              <a:latin typeface="Roboto Mono"/>
+              <a:ea typeface="Roboto Mono"/>
+              <a:cs typeface="Roboto Mono"/>
+              <a:sym typeface="Roboto Mono"/>
+            </a:endParaRPr>
+          </a:p>
+          <a:p>
+            <a:pPr marL="0" lvl="0" indent="0" algn="l" rtl="0">
+              <a:spcBef>
+                <a:spcPts val="0"/>
+              </a:spcBef>
+              <a:spcAft>
+                <a:spcPts val="0"/>
+              </a:spcAft>
+              <a:buClr>
+                <a:schemeClr val="dk1"/>
+              </a:buClr>
+              <a:buSzPts val="1100"/>
+              <a:buFont typeface="Arial"/>
+              <a:buNone/>
+            </a:pPr>
+            <a:r>
+              <a:rPr lang="en" sz="1000">
+                <a:solidFill>
+                  <a:srgbClr val="3C78D8"/>
+                </a:solidFill>
+                <a:latin typeface="Roboto Mono"/>
+                <a:ea typeface="Roboto Mono"/>
+                <a:cs typeface="Roboto Mono"/>
+                <a:sym typeface="Roboto Mono"/>
+              </a:rPr>
+              <a:t>app = Flask(__name__)</a:t>
+            </a:r>
+            <a:endParaRPr sz="1000">
+              <a:solidFill>
+                <a:srgbClr val="3C78D8"/>
+              </a:solidFill>
+              <a:latin typeface="Roboto Mono"/>
+              <a:ea typeface="Roboto Mono"/>
+              <a:cs typeface="Roboto Mono"/>
+              <a:sym typeface="Roboto Mono"/>
+            </a:endParaRPr>
+          </a:p>
+          <a:p>
+            <a:pPr marL="0" lvl="0" indent="0" algn="l" rtl="0">
+              <a:spcBef>
+                <a:spcPts val="0"/>
+              </a:spcBef>
+              <a:spcAft>
+                <a:spcPts val="0"/>
+              </a:spcAft>
+              <a:buClr>
+                <a:schemeClr val="dk1"/>
+              </a:buClr>
+              <a:buSzPts val="1100"/>
+              <a:buFont typeface="Arial"/>
+              <a:buNone/>
+            </a:pPr>
+            <a:endParaRPr sz="1000">
+              <a:solidFill>
+                <a:srgbClr val="3C78D8"/>
+              </a:solidFill>
+              <a:latin typeface="Roboto Mono"/>
+              <a:ea typeface="Roboto Mono"/>
+              <a:cs typeface="Roboto Mono"/>
+              <a:sym typeface="Roboto Mono"/>
+            </a:endParaRPr>
+          </a:p>
+          <a:p>
+            <a:pPr marL="0" lvl="0" indent="0" algn="l" rtl="0">
+              <a:spcBef>
+                <a:spcPts val="0"/>
+              </a:spcBef>
+              <a:spcAft>
+                <a:spcPts val="0"/>
+              </a:spcAft>
+              <a:buClr>
+                <a:schemeClr val="dk1"/>
+              </a:buClr>
+              <a:buSzPts val="1100"/>
+              <a:buFont typeface="Arial"/>
+              <a:buNone/>
+            </a:pPr>
+            <a:r>
+              <a:rPr lang="en" sz="1000">
+                <a:solidFill>
+                  <a:srgbClr val="3C78D8"/>
+                </a:solidFill>
+                <a:latin typeface="Roboto Mono"/>
+                <a:ea typeface="Roboto Mono"/>
+                <a:cs typeface="Roboto Mono"/>
+                <a:sym typeface="Roboto Mono"/>
+              </a:rPr>
+              <a:t>@app.route("/")</a:t>
+            </a:r>
+            <a:endParaRPr sz="1000">
+              <a:solidFill>
+                <a:srgbClr val="3C78D8"/>
+              </a:solidFill>
+              <a:latin typeface="Roboto Mono"/>
+              <a:ea typeface="Roboto Mono"/>
+              <a:cs typeface="Roboto Mono"/>
+              <a:sym typeface="Roboto Mono"/>
+            </a:endParaRPr>
+          </a:p>
+          <a:p>
+            <a:pPr marL="0" lvl="0" indent="0" algn="l" rtl="0">
+              <a:spcBef>
+                <a:spcPts val="0"/>
+              </a:spcBef>
+              <a:spcAft>
+                <a:spcPts val="0"/>
+              </a:spcAft>
+              <a:buClr>
+                <a:schemeClr val="dk1"/>
+              </a:buClr>
+              <a:buSzPts val="1100"/>
+              <a:buFont typeface="Arial"/>
+              <a:buNone/>
+            </a:pPr>
+            <a:r>
+              <a:rPr lang="en" sz="1000">
+                <a:solidFill>
+                  <a:srgbClr val="3C78D8"/>
+                </a:solidFill>
+                <a:latin typeface="Roboto Mono"/>
+                <a:ea typeface="Roboto Mono"/>
+                <a:cs typeface="Roboto Mono"/>
+                <a:sym typeface="Roboto Mono"/>
+              </a:rPr>
+              <a:t>def index():</a:t>
+            </a:r>
+            <a:endParaRPr sz="1000">
+              <a:solidFill>
+                <a:srgbClr val="3C78D8"/>
+              </a:solidFill>
+              <a:latin typeface="Roboto Mono"/>
+              <a:ea typeface="Roboto Mono"/>
+              <a:cs typeface="Roboto Mono"/>
+              <a:sym typeface="Roboto Mono"/>
+            </a:endParaRPr>
+          </a:p>
+          <a:p>
+            <a:pPr marL="0" lvl="0" indent="0" algn="l" rtl="0">
+              <a:spcBef>
+                <a:spcPts val="0"/>
+              </a:spcBef>
+              <a:spcAft>
+                <a:spcPts val="0"/>
+              </a:spcAft>
+              <a:buClr>
+                <a:schemeClr val="dk1"/>
+              </a:buClr>
+              <a:buSzPts val="1100"/>
+              <a:buFont typeface="Arial"/>
+              <a:buNone/>
+            </a:pPr>
+            <a:r>
+              <a:rPr lang="en" sz="1000">
+                <a:solidFill>
+                  <a:srgbClr val="3C78D8"/>
+                </a:solidFill>
+                <a:latin typeface="Roboto Mono"/>
+                <a:ea typeface="Roboto Mono"/>
+                <a:cs typeface="Roboto Mono"/>
+                <a:sym typeface="Roboto Mono"/>
+              </a:rPr>
+              <a:t>    return render_template("index.html")</a:t>
+            </a:r>
+            <a:endParaRPr sz="1000">
+              <a:solidFill>
+                <a:srgbClr val="3C78D8"/>
+              </a:solidFill>
+              <a:latin typeface="Roboto Mono"/>
+              <a:ea typeface="Roboto Mono"/>
+              <a:cs typeface="Roboto Mono"/>
+              <a:sym typeface="Roboto Mono"/>
+            </a:endParaRPr>
+          </a:p>
+          <a:p>
+            <a:pPr marL="0" lvl="0" indent="0" algn="l" rtl="0">
+              <a:spcBef>
+                <a:spcPts val="0"/>
+              </a:spcBef>
+              <a:spcAft>
+                <a:spcPts val="0"/>
+              </a:spcAft>
+              <a:buClr>
+                <a:schemeClr val="dk1"/>
+              </a:buClr>
+              <a:buSzPts val="1100"/>
+              <a:buFont typeface="Arial"/>
+              <a:buNone/>
+            </a:pPr>
+            <a:endParaRPr sz="1000">
+              <a:solidFill>
+                <a:srgbClr val="3C78D8"/>
+              </a:solidFill>
+              <a:latin typeface="Roboto Mono"/>
+              <a:ea typeface="Roboto Mono"/>
+              <a:cs typeface="Roboto Mono"/>
+              <a:sym typeface="Roboto Mono"/>
+            </a:endParaRPr>
+          </a:p>
+          <a:p>
+            <a:pPr marL="0" lvl="0" indent="0" algn="l" rtl="0">
+              <a:spcBef>
+                <a:spcPts val="0"/>
+              </a:spcBef>
+              <a:spcAft>
+                <a:spcPts val="0"/>
+              </a:spcAft>
+              <a:buClr>
+                <a:schemeClr val="dk1"/>
+              </a:buClr>
+              <a:buSzPts val="1100"/>
+              <a:buFont typeface="Arial"/>
+              <a:buNone/>
+            </a:pPr>
+            <a:r>
+              <a:rPr lang="en" sz="1000">
+                <a:solidFill>
+                  <a:srgbClr val="3C78D8"/>
+                </a:solidFill>
+                <a:latin typeface="Roboto Mono"/>
+                <a:ea typeface="Roboto Mono"/>
+                <a:cs typeface="Roboto Mono"/>
+                <a:sym typeface="Roboto Mono"/>
+              </a:rPr>
+              <a:t>@app.route("/chat", methods=["POST"])</a:t>
+            </a:r>
+            <a:endParaRPr sz="1000">
+              <a:solidFill>
+                <a:srgbClr val="3C78D8"/>
+              </a:solidFill>
+              <a:latin typeface="Roboto Mono"/>
+              <a:ea typeface="Roboto Mono"/>
+              <a:cs typeface="Roboto Mono"/>
+              <a:sym typeface="Roboto Mono"/>
+            </a:endParaRPr>
+          </a:p>
+          <a:p>
+            <a:pPr marL="0" lvl="0" indent="0" algn="l" rtl="0">
+              <a:spcBef>
+                <a:spcPts val="0"/>
+              </a:spcBef>
+              <a:spcAft>
+                <a:spcPts val="0"/>
+              </a:spcAft>
+              <a:buClr>
+                <a:schemeClr val="dk1"/>
+              </a:buClr>
+              <a:buSzPts val="1100"/>
+              <a:buFont typeface="Arial"/>
+              <a:buNone/>
+            </a:pPr>
+            <a:r>
+              <a:rPr lang="en" sz="1000">
+                <a:solidFill>
+                  <a:srgbClr val="3C78D8"/>
+                </a:solidFill>
+                <a:latin typeface="Roboto Mono"/>
+                <a:ea typeface="Roboto Mono"/>
+                <a:cs typeface="Roboto Mono"/>
+                <a:sym typeface="Roboto Mono"/>
+              </a:rPr>
+              <a:t>def chat():</a:t>
+            </a:r>
+            <a:endParaRPr sz="1000">
+              <a:solidFill>
+                <a:srgbClr val="3C78D8"/>
+              </a:solidFill>
+              <a:latin typeface="Roboto Mono"/>
+              <a:ea typeface="Roboto Mono"/>
+              <a:cs typeface="Roboto Mono"/>
+              <a:sym typeface="Roboto Mono"/>
+            </a:endParaRPr>
+          </a:p>
+          <a:p>
+            <a:pPr marL="0" lvl="0" indent="0" algn="l" rtl="0">
+              <a:spcBef>
+                <a:spcPts val="0"/>
+              </a:spcBef>
+              <a:spcAft>
+                <a:spcPts val="0"/>
+              </a:spcAft>
+              <a:buClr>
+                <a:schemeClr val="dk1"/>
+              </a:buClr>
+              <a:buSzPts val="1100"/>
+              <a:buFont typeface="Arial"/>
+              <a:buNone/>
+            </a:pPr>
+            <a:r>
+              <a:rPr lang="en" sz="1000">
+                <a:solidFill>
+                  <a:srgbClr val="3C78D8"/>
+                </a:solidFill>
+                <a:latin typeface="Roboto Mono"/>
+                <a:ea typeface="Roboto Mono"/>
+                <a:cs typeface="Roboto Mono"/>
+                <a:sym typeface="Roboto Mono"/>
+              </a:rPr>
+              <a:t>    user_input = request.form["user_input"]</a:t>
+            </a:r>
+            <a:endParaRPr sz="1000">
+              <a:solidFill>
+                <a:srgbClr val="3C78D8"/>
+              </a:solidFill>
+              <a:latin typeface="Roboto Mono"/>
+              <a:ea typeface="Roboto Mono"/>
+              <a:cs typeface="Roboto Mono"/>
+              <a:sym typeface="Roboto Mono"/>
+            </a:endParaRPr>
+          </a:p>
+          <a:p>
+            <a:pPr marL="0" lvl="0" indent="0" algn="l" rtl="0">
+              <a:spcBef>
+                <a:spcPts val="0"/>
+              </a:spcBef>
+              <a:spcAft>
+                <a:spcPts val="0"/>
+              </a:spcAft>
+              <a:buClr>
+                <a:schemeClr val="dk1"/>
+              </a:buClr>
+              <a:buSzPts val="1100"/>
+              <a:buFont typeface="Arial"/>
+              <a:buNone/>
+            </a:pPr>
+            <a:r>
+              <a:rPr lang="en" sz="1000">
+                <a:solidFill>
+                  <a:srgbClr val="3C78D8"/>
+                </a:solidFill>
+                <a:latin typeface="Roboto Mono"/>
+                <a:ea typeface="Roboto Mono"/>
+                <a:cs typeface="Roboto Mono"/>
+                <a:sym typeface="Roboto Mono"/>
+              </a:rPr>
+              <a:t>    response = client.chat.completions.create(</a:t>
+            </a:r>
+            <a:endParaRPr sz="1000">
+              <a:solidFill>
+                <a:srgbClr val="3C78D8"/>
+              </a:solidFill>
+              <a:latin typeface="Roboto Mono"/>
+              <a:ea typeface="Roboto Mono"/>
+              <a:cs typeface="Roboto Mono"/>
+              <a:sym typeface="Roboto Mono"/>
+            </a:endParaRPr>
+          </a:p>
+          <a:p>
+            <a:pPr marL="0" lvl="0" indent="0" algn="l" rtl="0">
+              <a:spcBef>
+                <a:spcPts val="0"/>
+              </a:spcBef>
+              <a:spcAft>
+                <a:spcPts val="0"/>
+              </a:spcAft>
+              <a:buNone/>
+            </a:pPr>
+            <a:r>
+              <a:rPr lang="en" sz="1000">
+                <a:solidFill>
+                  <a:srgbClr val="3C78D8"/>
+                </a:solidFill>
+                <a:latin typeface="Roboto Mono"/>
+                <a:ea typeface="Roboto Mono"/>
+                <a:cs typeface="Roboto Mono"/>
+                <a:sym typeface="Roboto Mono"/>
+              </a:rPr>
+              <a:t>        messages=[</a:t>
+            </a:r>
+            <a:endParaRPr sz="1000">
+              <a:solidFill>
+                <a:srgbClr val="3C78D8"/>
+              </a:solidFill>
+              <a:latin typeface="Roboto Mono"/>
+              <a:ea typeface="Roboto Mono"/>
+              <a:cs typeface="Roboto Mono"/>
+              <a:sym typeface="Roboto Mono"/>
+            </a:endParaRPr>
+          </a:p>
+          <a:p>
+            <a:pPr marL="0" lvl="0" indent="0" algn="l" rtl="0">
+              <a:spcBef>
+                <a:spcPts val="0"/>
+              </a:spcBef>
+              <a:spcAft>
+                <a:spcPts val="0"/>
+              </a:spcAft>
+              <a:buNone/>
+            </a:pPr>
+            <a:r>
+              <a:rPr lang="en" sz="1000">
+                <a:solidFill>
+                  <a:srgbClr val="3C78D8"/>
+                </a:solidFill>
+                <a:latin typeface="Roboto Mono"/>
+                <a:ea typeface="Roboto Mono"/>
+                <a:cs typeface="Roboto Mono"/>
+                <a:sym typeface="Roboto Mono"/>
+              </a:rPr>
+              <a:t>          {"role":"user","content":f"{user_input}",}</a:t>
+            </a:r>
+            <a:endParaRPr sz="1000">
+              <a:solidFill>
+                <a:srgbClr val="3C78D8"/>
+              </a:solidFill>
+              <a:latin typeface="Roboto Mono"/>
+              <a:ea typeface="Roboto Mono"/>
+              <a:cs typeface="Roboto Mono"/>
+              <a:sym typeface="Roboto Mono"/>
+            </a:endParaRPr>
+          </a:p>
+          <a:p>
+            <a:pPr marL="0" lvl="0" indent="0" algn="l" rtl="0">
+              <a:spcBef>
+                <a:spcPts val="0"/>
+              </a:spcBef>
+              <a:spcAft>
+                <a:spcPts val="0"/>
+              </a:spcAft>
+              <a:buClr>
+                <a:schemeClr val="dk1"/>
+              </a:buClr>
+              <a:buSzPts val="1100"/>
+              <a:buFont typeface="Arial"/>
+              <a:buNone/>
+            </a:pPr>
+            <a:r>
+              <a:rPr lang="en" sz="1000">
+                <a:solidFill>
+                  <a:srgbClr val="3C78D8"/>
+                </a:solidFill>
+                <a:latin typeface="Roboto Mono"/>
+                <a:ea typeface="Roboto Mono"/>
+                <a:cs typeface="Roboto Mono"/>
+                <a:sym typeface="Roboto Mono"/>
+              </a:rPr>
+              <a:t>        ],</a:t>
+            </a:r>
+            <a:endParaRPr sz="1000">
+              <a:solidFill>
+                <a:srgbClr val="3C78D8"/>
+              </a:solidFill>
+              <a:latin typeface="Roboto Mono"/>
+              <a:ea typeface="Roboto Mono"/>
+              <a:cs typeface="Roboto Mono"/>
+              <a:sym typeface="Roboto Mono"/>
+            </a:endParaRPr>
+          </a:p>
+          <a:p>
+            <a:pPr marL="0" lvl="0" indent="0" algn="l" rtl="0">
+              <a:spcBef>
+                <a:spcPts val="0"/>
+              </a:spcBef>
+              <a:spcAft>
+                <a:spcPts val="0"/>
+              </a:spcAft>
+              <a:buClr>
+                <a:schemeClr val="dk1"/>
+              </a:buClr>
+              <a:buSzPts val="1100"/>
+              <a:buFont typeface="Arial"/>
+              <a:buNone/>
+            </a:pPr>
+            <a:r>
+              <a:rPr lang="en" sz="1000">
+                <a:solidFill>
+                  <a:srgbClr val="3C78D8"/>
+                </a:solidFill>
+                <a:latin typeface="Roboto Mono"/>
+                <a:ea typeface="Roboto Mono"/>
+                <a:cs typeface="Roboto Mono"/>
+                <a:sym typeface="Roboto Mono"/>
+              </a:rPr>
+              <a:t>        model="gpt-3.5-turbo",</a:t>
+            </a:r>
+            <a:endParaRPr sz="1000">
+              <a:solidFill>
+                <a:srgbClr val="3C78D8"/>
+              </a:solidFill>
+              <a:latin typeface="Roboto Mono"/>
+              <a:ea typeface="Roboto Mono"/>
+              <a:cs typeface="Roboto Mono"/>
+              <a:sym typeface="Roboto Mono"/>
+            </a:endParaRPr>
+          </a:p>
+          <a:p>
+            <a:pPr marL="0" lvl="0" indent="0" algn="l" rtl="0">
+              <a:spcBef>
+                <a:spcPts val="0"/>
+              </a:spcBef>
+              <a:spcAft>
+                <a:spcPts val="0"/>
+              </a:spcAft>
+              <a:buClr>
+                <a:schemeClr val="dk1"/>
+              </a:buClr>
+              <a:buSzPts val="1100"/>
+              <a:buFont typeface="Arial"/>
+              <a:buNone/>
+            </a:pPr>
+            <a:r>
+              <a:rPr lang="en" sz="1000">
+                <a:solidFill>
+                  <a:srgbClr val="3C78D8"/>
+                </a:solidFill>
+                <a:latin typeface="Roboto Mono"/>
+                <a:ea typeface="Roboto Mono"/>
+                <a:cs typeface="Roboto Mono"/>
+                <a:sym typeface="Roboto Mono"/>
+              </a:rPr>
+              <a:t>    )</a:t>
+            </a:r>
+            <a:endParaRPr sz="1000">
+              <a:solidFill>
+                <a:srgbClr val="3C78D8"/>
+              </a:solidFill>
+              <a:latin typeface="Roboto Mono"/>
+              <a:ea typeface="Roboto Mono"/>
+              <a:cs typeface="Roboto Mono"/>
+              <a:sym typeface="Roboto Mono"/>
+            </a:endParaRPr>
+          </a:p>
+          <a:p>
+            <a:pPr marL="0" lvl="0" indent="0" algn="l" rtl="0">
+              <a:spcBef>
+                <a:spcPts val="0"/>
+              </a:spcBef>
+              <a:spcAft>
+                <a:spcPts val="0"/>
+              </a:spcAft>
+              <a:buClr>
+                <a:schemeClr val="dk1"/>
+              </a:buClr>
+              <a:buSzPts val="1100"/>
+              <a:buFont typeface="Arial"/>
+              <a:buNone/>
+            </a:pPr>
+            <a:r>
+              <a:rPr lang="en" sz="1000">
+                <a:solidFill>
+                  <a:srgbClr val="3C78D8"/>
+                </a:solidFill>
+                <a:latin typeface="Roboto Mono"/>
+                <a:ea typeface="Roboto Mono"/>
+                <a:cs typeface="Roboto Mono"/>
+                <a:sym typeface="Roboto Mono"/>
+              </a:rPr>
+              <a:t>    ai_response = response.choices[0].message.content.strip()</a:t>
+            </a:r>
+            <a:endParaRPr sz="1000">
+              <a:solidFill>
+                <a:srgbClr val="3C78D8"/>
+              </a:solidFill>
+              <a:latin typeface="Roboto Mono"/>
+              <a:ea typeface="Roboto Mono"/>
+              <a:cs typeface="Roboto Mono"/>
+              <a:sym typeface="Roboto Mono"/>
+            </a:endParaRPr>
+          </a:p>
+          <a:p>
+            <a:pPr marL="0" lvl="0" indent="0" algn="l" rtl="0">
+              <a:spcBef>
+                <a:spcPts val="0"/>
+              </a:spcBef>
+              <a:spcAft>
+                <a:spcPts val="0"/>
+              </a:spcAft>
+              <a:buClr>
+                <a:schemeClr val="dk1"/>
+              </a:buClr>
+              <a:buSzPts val="1100"/>
+              <a:buFont typeface="Arial"/>
+              <a:buNone/>
+            </a:pPr>
+            <a:r>
+              <a:rPr lang="en" sz="1000">
+                <a:solidFill>
+                  <a:srgbClr val="3C78D8"/>
+                </a:solidFill>
+                <a:latin typeface="Roboto Mono"/>
+                <a:ea typeface="Roboto Mono"/>
+                <a:cs typeface="Roboto Mono"/>
+                <a:sym typeface="Roboto Mono"/>
+              </a:rPr>
+              <a:t>    return render_template("index.html",</a:t>
+            </a:r>
+            <a:endParaRPr sz="1000">
+              <a:solidFill>
+                <a:srgbClr val="3C78D8"/>
+              </a:solidFill>
+              <a:latin typeface="Roboto Mono"/>
+              <a:ea typeface="Roboto Mono"/>
+              <a:cs typeface="Roboto Mono"/>
+              <a:sym typeface="Roboto Mono"/>
+            </a:endParaRPr>
+          </a:p>
+          <a:p>
+            <a:pPr marL="0" lvl="0" indent="0" algn="l" rtl="0">
+              <a:spcBef>
+                <a:spcPts val="0"/>
+              </a:spcBef>
+              <a:spcAft>
+                <a:spcPts val="0"/>
+              </a:spcAft>
+              <a:buClr>
+                <a:schemeClr val="dk1"/>
+              </a:buClr>
+              <a:buSzPts val="1100"/>
+              <a:buFont typeface="Arial"/>
+              <a:buNone/>
+            </a:pPr>
+            <a:r>
+              <a:rPr lang="en" sz="1000">
+                <a:solidFill>
+                  <a:srgbClr val="3C78D8"/>
+                </a:solidFill>
+                <a:latin typeface="Roboto Mono"/>
+                <a:ea typeface="Roboto Mono"/>
+                <a:cs typeface="Roboto Mono"/>
+                <a:sym typeface="Roboto Mono"/>
+              </a:rPr>
+              <a:t>                           user_input=user_input,</a:t>
+            </a:r>
+            <a:endParaRPr sz="1000">
+              <a:solidFill>
+                <a:srgbClr val="3C78D8"/>
+              </a:solidFill>
+              <a:latin typeface="Roboto Mono"/>
+              <a:ea typeface="Roboto Mono"/>
+              <a:cs typeface="Roboto Mono"/>
+              <a:sym typeface="Roboto Mono"/>
+            </a:endParaRPr>
+          </a:p>
+          <a:p>
+            <a:pPr marL="0" lvl="0" indent="0" algn="l" rtl="0">
+              <a:spcBef>
+                <a:spcPts val="0"/>
+              </a:spcBef>
+              <a:spcAft>
+                <a:spcPts val="0"/>
+              </a:spcAft>
+              <a:buClr>
+                <a:schemeClr val="dk1"/>
+              </a:buClr>
+              <a:buSzPts val="1100"/>
+              <a:buFont typeface="Arial"/>
+              <a:buNone/>
+            </a:pPr>
+            <a:r>
+              <a:rPr lang="en" sz="1000">
+                <a:solidFill>
+                  <a:srgbClr val="3C78D8"/>
+                </a:solidFill>
+                <a:latin typeface="Roboto Mono"/>
+                <a:ea typeface="Roboto Mono"/>
+                <a:cs typeface="Roboto Mono"/>
+                <a:sym typeface="Roboto Mono"/>
+              </a:rPr>
+              <a:t>                           ai_response=ai_response)</a:t>
+            </a:r>
+            <a:endParaRPr sz="1000">
+              <a:solidFill>
+                <a:srgbClr val="3C78D8"/>
+              </a:solidFill>
+              <a:latin typeface="Roboto Mono"/>
+              <a:ea typeface="Roboto Mono"/>
+              <a:cs typeface="Roboto Mono"/>
+              <a:sym typeface="Roboto Mono"/>
+            </a:endParaRPr>
+          </a:p>
+          <a:p>
+            <a:pPr marL="0" lvl="0" indent="0" algn="l" rtl="0">
+              <a:spcBef>
+                <a:spcPts val="0"/>
+              </a:spcBef>
+              <a:spcAft>
+                <a:spcPts val="0"/>
+              </a:spcAft>
+              <a:buClr>
+                <a:schemeClr val="dk1"/>
+              </a:buClr>
+              <a:buSzPts val="1100"/>
+              <a:buFont typeface="Arial"/>
+              <a:buNone/>
+            </a:pPr>
+            <a:r>
+              <a:rPr lang="en" sz="1000">
+                <a:solidFill>
+                  <a:srgbClr val="3C78D8"/>
+                </a:solidFill>
+                <a:latin typeface="Roboto Mono"/>
+                <a:ea typeface="Roboto Mono"/>
+                <a:cs typeface="Roboto Mono"/>
+                <a:sym typeface="Roboto Mono"/>
+              </a:rPr>
+              <a:t>if __name__ == "__main__":</a:t>
+            </a:r>
+            <a:endParaRPr sz="1000">
+              <a:solidFill>
+                <a:srgbClr val="3C78D8"/>
+              </a:solidFill>
+              <a:latin typeface="Roboto Mono"/>
+              <a:ea typeface="Roboto Mono"/>
+              <a:cs typeface="Roboto Mono"/>
+              <a:sym typeface="Roboto Mono"/>
+            </a:endParaRPr>
+          </a:p>
+          <a:p>
+            <a:pPr marL="0" lvl="0" indent="0" algn="l" rtl="0">
+              <a:spcBef>
+                <a:spcPts val="0"/>
+              </a:spcBef>
+              <a:spcAft>
+                <a:spcPts val="0"/>
+              </a:spcAft>
+              <a:buNone/>
+            </a:pPr>
+            <a:r>
+              <a:rPr lang="en" sz="1000">
+                <a:solidFill>
+                  <a:srgbClr val="3C78D8"/>
+                </a:solidFill>
+                <a:latin typeface="Roboto Mono"/>
+                <a:ea typeface="Roboto Mono"/>
+                <a:cs typeface="Roboto Mono"/>
+                <a:sym typeface="Roboto Mono"/>
+              </a:rPr>
+              <a:t>    app.run(debug=True)   # http://127.0.0.1:5000</a:t>
+            </a:r>
+            <a:endParaRPr sz="1000">
+              <a:solidFill>
+                <a:srgbClr val="3C78D8"/>
+              </a:solidFill>
+              <a:latin typeface="Roboto Mono"/>
+              <a:ea typeface="Roboto Mono"/>
+              <a:cs typeface="Roboto Mono"/>
+              <a:sym typeface="Roboto Mono"/>
+            </a:endParaRPr>
+          </a:p>
+        </p:txBody>
+      </p:sp>
+      <p:sp>
+        <p:nvSpPr>
+          <p:cNvPr id="149" name="Google Shape;149;p23"/>
+          <p:cNvSpPr txBox="1"/>
+          <p:nvPr/>
+        </p:nvSpPr>
+        <p:spPr>
+          <a:xfrm>
+            <a:off x="5992750" y="299425"/>
+            <a:ext cx="1823700" cy="338700"/>
+          </a:xfrm>
+          <a:prstGeom prst="rect">
+            <a:avLst/>
+          </a:prstGeom>
+          <a:noFill/>
+          <a:ln>
+            <a:noFill/>
+          </a:ln>
+        </p:spPr>
+        <p:txBody>
+          <a:bodyPr spcFirstLastPara="1" wrap="square" lIns="91425" tIns="91425" rIns="91425" bIns="91425" anchor="t" anchorCtr="0">
+            <a:spAutoFit/>
+          </a:bodyPr>
+          <a:lstStyle/>
+          <a:p>
+            <a:pPr marL="0" lvl="0" indent="0" algn="l" rtl="0">
+              <a:spcBef>
+                <a:spcPts val="0"/>
+              </a:spcBef>
+              <a:spcAft>
+                <a:spcPts val="0"/>
+              </a:spcAft>
+              <a:buNone/>
+            </a:pPr>
+            <a:r>
+              <a:rPr lang="en" sz="1000">
+                <a:solidFill>
+                  <a:srgbClr val="3C78D8"/>
+                </a:solidFill>
+                <a:latin typeface="Roboto Mono"/>
+                <a:ea typeface="Roboto Mono"/>
+                <a:cs typeface="Roboto Mono"/>
+                <a:sym typeface="Roboto Mono"/>
+              </a:rPr>
+              <a:t>templates/index.html</a:t>
+            </a:r>
+            <a:endParaRPr sz="1000">
+              <a:solidFill>
+                <a:srgbClr val="3C78D8"/>
+              </a:solidFill>
+              <a:latin typeface="Roboto Mono"/>
+              <a:ea typeface="Roboto Mono"/>
+              <a:cs typeface="Roboto Mono"/>
+              <a:sym typeface="Roboto Mono"/>
+            </a:endParaRPr>
+          </a:p>
+        </p:txBody>
+      </p:sp>
+      <p:sp>
+        <p:nvSpPr>
+          <p:cNvPr id="150" name="Google Shape;150;p23"/>
+          <p:cNvSpPr txBox="1"/>
+          <p:nvPr/>
+        </p:nvSpPr>
+        <p:spPr>
+          <a:xfrm>
+            <a:off x="1597950" y="299425"/>
+            <a:ext cx="1395300" cy="338700"/>
+          </a:xfrm>
+          <a:prstGeom prst="rect">
+            <a:avLst/>
+          </a:prstGeom>
+          <a:noFill/>
+          <a:ln>
+            <a:noFill/>
+          </a:ln>
+        </p:spPr>
+        <p:txBody>
+          <a:bodyPr spcFirstLastPara="1" wrap="square" lIns="91425" tIns="91425" rIns="91425" bIns="91425" anchor="t" anchorCtr="0">
+            <a:spAutoFit/>
+          </a:bodyPr>
+          <a:lstStyle/>
+          <a:p>
+            <a:pPr marL="0" lvl="0" indent="0" algn="l" rtl="0">
+              <a:spcBef>
+                <a:spcPts val="0"/>
+              </a:spcBef>
+              <a:spcAft>
+                <a:spcPts val="0"/>
+              </a:spcAft>
+              <a:buNone/>
+            </a:pPr>
+            <a:r>
+              <a:rPr lang="en" sz="1000">
+                <a:solidFill>
+                  <a:srgbClr val="3C78D8"/>
+                </a:solidFill>
+                <a:latin typeface="Roboto Mono"/>
+                <a:ea typeface="Roboto Mono"/>
+                <a:cs typeface="Roboto Mono"/>
+                <a:sym typeface="Roboto Mono"/>
+              </a:rPr>
+              <a:t>python app.py</a:t>
+            </a:r>
+            <a:endParaRPr sz="1000">
+              <a:solidFill>
+                <a:srgbClr val="3C78D8"/>
+              </a:solidFill>
+              <a:latin typeface="Roboto Mono"/>
+              <a:ea typeface="Roboto Mono"/>
+              <a:cs typeface="Roboto Mono"/>
+              <a:sym typeface="Roboto Mono"/>
+            </a:endParaRPr>
+          </a:p>
+        </p:txBody>
+      </p:sp>
+      <p:pic>
+        <p:nvPicPr>
+          <p:cNvPr id="151" name="Google Shape;151;p23"/>
+          <p:cNvPicPr preferRelativeResize="0"/>
+          <p:nvPr/>
+        </p:nvPicPr>
+        <p:blipFill rotWithShape="1">
+          <a:blip r:embed="rId3" cstate="email">
+            <a:alphaModFix/>
+            <a:extLst>
+              <a:ext uri="{28A0092B-C50C-407E-A947-70E740481C1C}">
+                <a14:useLocalDpi xmlns:a14="http://schemas.microsoft.com/office/drawing/2010/main"/>
+              </a:ext>
+            </a:extLst>
+          </a:blip>
+          <a:srcRect/>
+          <a:stretch/>
+        </p:blipFill>
+        <p:spPr>
+          <a:xfrm>
+            <a:off x="5320163" y="3656125"/>
+            <a:ext cx="3106950" cy="1296250"/>
+          </a:xfrm>
+          <a:prstGeom prst="rect">
+            <a:avLst/>
+          </a:prstGeom>
+          <a:noFill/>
+          <a:ln w="9525" cap="flat" cmpd="sng">
+            <a:solidFill>
+              <a:srgbClr val="FF0000"/>
+            </a:solidFill>
+            <a:prstDash val="solid"/>
+            <a:round/>
+            <a:headEnd type="none" w="sm" len="sm"/>
+            <a:tailEnd type="none" w="sm" len="sm"/>
+          </a:ln>
+        </p:spPr>
+      </p:pic>
+    </p:spTree>
+  </p:cSld>
+  <p:clrMapOvr>
+    <a:masterClrMapping/>
+  </p:clrMapOvr>
+</p:sld>
+</file>
+
+<file path=ppt/slides/slide12.xml><?xml version="1.0" encoding="utf-8"?>
+<p:sld xmlns:a="http://schemas.openxmlformats.org/drawingml/2006/main" xmlns:r="http://schemas.openxmlformats.org/officeDocument/2006/relationships" xmlns:p="http://schemas.openxmlformats.org/presentationml/2006/main">
+  <p:cSld>
+    <p:spTree>
+      <p:nvGrpSpPr>
+        <p:cNvPr id="1" name="Shape 155"/>
+        <p:cNvGrpSpPr/>
+        <p:nvPr/>
+      </p:nvGrpSpPr>
+      <p:grpSpPr>
+        <a:xfrm>
+          <a:off x="0" y="0"/>
+          <a:ext cx="0" cy="0"/>
+          <a:chOff x="0" y="0"/>
+          <a:chExt cx="0" cy="0"/>
+        </a:xfrm>
+      </p:grpSpPr>
+      <p:sp>
+        <p:nvSpPr>
+          <p:cNvPr id="156" name="Google Shape;156;p24"/>
+          <p:cNvSpPr txBox="1"/>
+          <p:nvPr/>
+        </p:nvSpPr>
+        <p:spPr>
+          <a:xfrm>
+            <a:off x="72300" y="0"/>
+            <a:ext cx="4133400" cy="326400"/>
+          </a:xfrm>
+          <a:prstGeom prst="rect">
+            <a:avLst/>
+          </a:prstGeom>
+          <a:noFill/>
+          <a:ln>
+            <a:noFill/>
+          </a:ln>
+        </p:spPr>
+        <p:txBody>
+          <a:bodyPr spcFirstLastPara="1" wrap="square" lIns="9125" tIns="9125" rIns="9125" bIns="9125" anchor="t" anchorCtr="0">
+            <a:spAutoFit/>
+          </a:bodyPr>
+          <a:lstStyle/>
+          <a:p>
+            <a:pPr marL="0" marR="0" lvl="0" indent="0" algn="l" rtl="0">
+              <a:lnSpc>
+                <a:spcPct val="100000"/>
+              </a:lnSpc>
+              <a:spcBef>
+                <a:spcPts val="0"/>
+              </a:spcBef>
+              <a:spcAft>
+                <a:spcPts val="0"/>
+              </a:spcAft>
+              <a:buClr>
+                <a:srgbClr val="000000"/>
+              </a:buClr>
+              <a:buSzPts val="2000"/>
+              <a:buFont typeface="Arial"/>
+              <a:buNone/>
+            </a:pPr>
+            <a:r>
+              <a:rPr lang="en" sz="2000" b="1">
+                <a:solidFill>
+                  <a:schemeClr val="dk1"/>
+                </a:solidFill>
+                <a:latin typeface="Calibri"/>
+                <a:ea typeface="Calibri"/>
+                <a:cs typeface="Calibri"/>
+                <a:sym typeface="Calibri"/>
+              </a:rPr>
+              <a:t>Multiple Ways to Create AI Chatbots</a:t>
+            </a:r>
+            <a:endParaRPr sz="2000" b="1" i="0" u="none" strike="noStrike" cap="none">
+              <a:solidFill>
+                <a:srgbClr val="000000"/>
+              </a:solidFill>
+              <a:latin typeface="Calibri"/>
+              <a:ea typeface="Calibri"/>
+              <a:cs typeface="Calibri"/>
+              <a:sym typeface="Calibri"/>
+            </a:endParaRPr>
+          </a:p>
+        </p:txBody>
+      </p:sp>
+      <p:sp>
+        <p:nvSpPr>
+          <p:cNvPr id="157" name="Google Shape;157;p24"/>
+          <p:cNvSpPr txBox="1"/>
+          <p:nvPr/>
+        </p:nvSpPr>
+        <p:spPr>
+          <a:xfrm>
+            <a:off x="4650750" y="397425"/>
+            <a:ext cx="4381500" cy="4402200"/>
+          </a:xfrm>
+          <a:prstGeom prst="rect">
+            <a:avLst/>
+          </a:prstGeom>
+          <a:solidFill>
+            <a:srgbClr val="FFF2CC"/>
+          </a:solidFill>
+          <a:ln w="9525" cap="flat" cmpd="sng">
+            <a:solidFill>
+              <a:srgbClr val="FF0000"/>
+            </a:solidFill>
+            <a:prstDash val="solid"/>
+            <a:round/>
+            <a:headEnd type="none" w="sm" len="sm"/>
+            <a:tailEnd type="none" w="sm" len="sm"/>
+          </a:ln>
+        </p:spPr>
+        <p:txBody>
+          <a:bodyPr spcFirstLastPara="1" wrap="square" lIns="91425" tIns="91425" rIns="91425" bIns="91425" anchor="t" anchorCtr="0">
+            <a:spAutoFit/>
+          </a:bodyPr>
+          <a:lstStyle/>
+          <a:p>
+            <a:pPr marL="0" lvl="0" indent="0" algn="l" rtl="0">
+              <a:spcBef>
+                <a:spcPts val="0"/>
+              </a:spcBef>
+              <a:spcAft>
+                <a:spcPts val="0"/>
+              </a:spcAft>
+              <a:buNone/>
+            </a:pPr>
+            <a:r>
+              <a:rPr lang="en" sz="1300" b="1">
+                <a:solidFill>
+                  <a:srgbClr val="FF0000"/>
+                </a:solidFill>
+                <a:latin typeface="Calibri"/>
+                <a:ea typeface="Calibri"/>
+                <a:cs typeface="Calibri"/>
+                <a:sym typeface="Calibri"/>
+              </a:rPr>
+              <a:t>GPT4All</a:t>
+            </a:r>
+            <a:r>
+              <a:rPr lang="en" sz="1300">
+                <a:solidFill>
+                  <a:schemeClr val="dk1"/>
+                </a:solidFill>
+                <a:latin typeface="Calibri"/>
+                <a:ea typeface="Calibri"/>
+                <a:cs typeface="Calibri"/>
+                <a:sym typeface="Calibri"/>
+              </a:rPr>
+              <a:t> - ecosystem to train and deploy LLMs that run locally on consumer grade CPUs. Written in C++, has python and Javascript bindings.</a:t>
+            </a:r>
+            <a:endParaRPr sz="1300">
+              <a:solidFill>
+                <a:schemeClr val="dk1"/>
+              </a:solidFill>
+              <a:latin typeface="Calibri"/>
+              <a:ea typeface="Calibri"/>
+              <a:cs typeface="Calibri"/>
+              <a:sym typeface="Calibri"/>
+            </a:endParaRPr>
+          </a:p>
+          <a:p>
+            <a:pPr marL="457200" lvl="0" indent="-292100" algn="l" rtl="0">
+              <a:spcBef>
+                <a:spcPts val="0"/>
+              </a:spcBef>
+              <a:spcAft>
+                <a:spcPts val="0"/>
+              </a:spcAft>
+              <a:buSzPts val="1000"/>
+              <a:buFont typeface="Calibri"/>
+              <a:buChar char="●"/>
+            </a:pPr>
+            <a:r>
+              <a:rPr lang="en" sz="1000" u="sng">
+                <a:solidFill>
+                  <a:schemeClr val="hlink"/>
+                </a:solidFill>
+                <a:latin typeface="Calibri"/>
+                <a:ea typeface="Calibri"/>
+                <a:cs typeface="Calibri"/>
+                <a:sym typeface="Calibri"/>
+                <a:hlinkClick r:id="rId3"/>
+              </a:rPr>
+              <a:t>https://gpt4all.io</a:t>
+            </a:r>
+            <a:r>
+              <a:rPr lang="en" sz="1000">
+                <a:solidFill>
+                  <a:schemeClr val="dk1"/>
+                </a:solidFill>
+                <a:latin typeface="Calibri"/>
+                <a:ea typeface="Calibri"/>
+                <a:cs typeface="Calibri"/>
+                <a:sym typeface="Calibri"/>
+              </a:rPr>
+              <a:t> </a:t>
+            </a:r>
+            <a:endParaRPr sz="1000">
+              <a:solidFill>
+                <a:schemeClr val="dk1"/>
+              </a:solidFill>
+              <a:latin typeface="Calibri"/>
+              <a:ea typeface="Calibri"/>
+              <a:cs typeface="Calibri"/>
+              <a:sym typeface="Calibri"/>
+            </a:endParaRPr>
+          </a:p>
+          <a:p>
+            <a:pPr marL="457200" lvl="0" indent="-292100" algn="l" rtl="0">
+              <a:spcBef>
+                <a:spcPts val="0"/>
+              </a:spcBef>
+              <a:spcAft>
+                <a:spcPts val="0"/>
+              </a:spcAft>
+              <a:buSzPts val="1000"/>
+              <a:buFont typeface="Calibri"/>
+              <a:buChar char="●"/>
+            </a:pPr>
+            <a:r>
+              <a:rPr lang="en" sz="1000" u="sng">
+                <a:solidFill>
+                  <a:schemeClr val="hlink"/>
+                </a:solidFill>
+                <a:latin typeface="Calibri"/>
+                <a:ea typeface="Calibri"/>
+                <a:cs typeface="Calibri"/>
+                <a:sym typeface="Calibri"/>
+                <a:hlinkClick r:id="rId4"/>
+              </a:rPr>
+              <a:t>https://github.com/nomic-ai/gpt4all</a:t>
+            </a:r>
+            <a:r>
+              <a:rPr lang="en" sz="1000">
+                <a:solidFill>
+                  <a:schemeClr val="dk1"/>
+                </a:solidFill>
+                <a:latin typeface="Calibri"/>
+                <a:ea typeface="Calibri"/>
+                <a:cs typeface="Calibri"/>
+                <a:sym typeface="Calibri"/>
+              </a:rPr>
+              <a:t> </a:t>
+            </a:r>
+            <a:endParaRPr sz="1000">
+              <a:solidFill>
+                <a:schemeClr val="dk1"/>
+              </a:solidFill>
+              <a:latin typeface="Calibri"/>
+              <a:ea typeface="Calibri"/>
+              <a:cs typeface="Calibri"/>
+              <a:sym typeface="Calibri"/>
+            </a:endParaRPr>
+          </a:p>
+          <a:p>
+            <a:pPr marL="0" lvl="0" indent="0" algn="l" rtl="0">
+              <a:spcBef>
+                <a:spcPts val="0"/>
+              </a:spcBef>
+              <a:spcAft>
+                <a:spcPts val="0"/>
+              </a:spcAft>
+              <a:buNone/>
+            </a:pPr>
+            <a:r>
+              <a:rPr lang="en" sz="1300" b="1">
+                <a:solidFill>
+                  <a:srgbClr val="FF0000"/>
+                </a:solidFill>
+                <a:latin typeface="Calibri"/>
+                <a:ea typeface="Calibri"/>
+                <a:cs typeface="Calibri"/>
+                <a:sym typeface="Calibri"/>
+              </a:rPr>
+              <a:t>PrivateGPT</a:t>
+            </a:r>
+            <a:r>
+              <a:rPr lang="en" sz="1300">
+                <a:solidFill>
+                  <a:schemeClr val="dk1"/>
+                </a:solidFill>
+                <a:latin typeface="Calibri"/>
+                <a:ea typeface="Calibri"/>
+                <a:cs typeface="Calibri"/>
+                <a:sym typeface="Calibri"/>
+              </a:rPr>
+              <a:t> - python-based, llama.cpp, gradio UI</a:t>
+            </a:r>
+            <a:endParaRPr sz="1300">
+              <a:solidFill>
+                <a:schemeClr val="dk1"/>
+              </a:solidFill>
+              <a:latin typeface="Calibri"/>
+              <a:ea typeface="Calibri"/>
+              <a:cs typeface="Calibri"/>
+              <a:sym typeface="Calibri"/>
+            </a:endParaRPr>
+          </a:p>
+          <a:p>
+            <a:pPr marL="457200" lvl="0" indent="-292100" algn="l" rtl="0">
+              <a:spcBef>
+                <a:spcPts val="0"/>
+              </a:spcBef>
+              <a:spcAft>
+                <a:spcPts val="0"/>
+              </a:spcAft>
+              <a:buSzPts val="1000"/>
+              <a:buFont typeface="Calibri"/>
+              <a:buChar char="●"/>
+            </a:pPr>
+            <a:r>
+              <a:rPr lang="en" sz="1000" u="sng">
+                <a:solidFill>
+                  <a:schemeClr val="hlink"/>
+                </a:solidFill>
+                <a:latin typeface="Calibri"/>
+                <a:ea typeface="Calibri"/>
+                <a:cs typeface="Calibri"/>
+                <a:sym typeface="Calibri"/>
+                <a:hlinkClick r:id="rId5"/>
+              </a:rPr>
+              <a:t>https://github.com/imartinez/privateGPT</a:t>
+            </a:r>
+            <a:r>
+              <a:rPr lang="en" sz="1000">
+                <a:solidFill>
+                  <a:schemeClr val="dk1"/>
+                </a:solidFill>
+                <a:latin typeface="Calibri"/>
+                <a:ea typeface="Calibri"/>
+                <a:cs typeface="Calibri"/>
+                <a:sym typeface="Calibri"/>
+              </a:rPr>
+              <a:t> </a:t>
+            </a:r>
+            <a:endParaRPr sz="1000">
+              <a:solidFill>
+                <a:schemeClr val="dk1"/>
+              </a:solidFill>
+              <a:latin typeface="Calibri"/>
+              <a:ea typeface="Calibri"/>
+              <a:cs typeface="Calibri"/>
+              <a:sym typeface="Calibri"/>
+            </a:endParaRPr>
+          </a:p>
+          <a:p>
+            <a:pPr marL="457200" lvl="0" indent="-292100" algn="l" rtl="0">
+              <a:spcBef>
+                <a:spcPts val="0"/>
+              </a:spcBef>
+              <a:spcAft>
+                <a:spcPts val="0"/>
+              </a:spcAft>
+              <a:buClr>
+                <a:schemeClr val="dk1"/>
+              </a:buClr>
+              <a:buSzPts val="1000"/>
+              <a:buFont typeface="Calibri"/>
+              <a:buChar char="●"/>
+            </a:pPr>
+            <a:r>
+              <a:rPr lang="en" sz="1000" u="sng">
+                <a:solidFill>
+                  <a:schemeClr val="hlink"/>
+                </a:solidFill>
+                <a:latin typeface="Calibri"/>
+                <a:ea typeface="Calibri"/>
+                <a:cs typeface="Calibri"/>
+                <a:sym typeface="Calibri"/>
+                <a:hlinkClick r:id="rId6"/>
+              </a:rPr>
+              <a:t>https://docs.privategpt.dev</a:t>
+            </a:r>
+            <a:r>
+              <a:rPr lang="en" sz="1000">
+                <a:solidFill>
+                  <a:schemeClr val="dk1"/>
+                </a:solidFill>
+                <a:latin typeface="Calibri"/>
+                <a:ea typeface="Calibri"/>
+                <a:cs typeface="Calibri"/>
+                <a:sym typeface="Calibri"/>
+              </a:rPr>
+              <a:t> </a:t>
+            </a:r>
+            <a:endParaRPr sz="1000">
+              <a:solidFill>
+                <a:schemeClr val="dk1"/>
+              </a:solidFill>
+              <a:latin typeface="Calibri"/>
+              <a:ea typeface="Calibri"/>
+              <a:cs typeface="Calibri"/>
+              <a:sym typeface="Calibri"/>
+            </a:endParaRPr>
+          </a:p>
+          <a:p>
+            <a:pPr marL="457200" lvl="0" indent="-292100" algn="l" rtl="0">
+              <a:spcBef>
+                <a:spcPts val="0"/>
+              </a:spcBef>
+              <a:spcAft>
+                <a:spcPts val="0"/>
+              </a:spcAft>
+              <a:buClr>
+                <a:schemeClr val="dk1"/>
+              </a:buClr>
+              <a:buSzPts val="1000"/>
+              <a:buFont typeface="Calibri"/>
+              <a:buChar char="●"/>
+            </a:pPr>
+            <a:r>
+              <a:rPr lang="en" sz="1000" u="sng">
+                <a:solidFill>
+                  <a:schemeClr val="hlink"/>
+                </a:solidFill>
+                <a:latin typeface="Calibri"/>
+                <a:ea typeface="Calibri"/>
+                <a:cs typeface="Calibri"/>
+                <a:sym typeface="Calibri"/>
+                <a:hlinkClick r:id="rId7"/>
+              </a:rPr>
+              <a:t>https://www.gradio.app</a:t>
+            </a:r>
+            <a:r>
+              <a:rPr lang="en" sz="1000">
+                <a:solidFill>
+                  <a:schemeClr val="dk1"/>
+                </a:solidFill>
+                <a:latin typeface="Calibri"/>
+                <a:ea typeface="Calibri"/>
+                <a:cs typeface="Calibri"/>
+                <a:sym typeface="Calibri"/>
+              </a:rPr>
+              <a:t> </a:t>
+            </a:r>
+            <a:endParaRPr sz="1000">
+              <a:solidFill>
+                <a:schemeClr val="dk1"/>
+              </a:solidFill>
+              <a:latin typeface="Calibri"/>
+              <a:ea typeface="Calibri"/>
+              <a:cs typeface="Calibri"/>
+              <a:sym typeface="Calibri"/>
+            </a:endParaRPr>
+          </a:p>
+          <a:p>
+            <a:pPr marL="0" lvl="0" indent="0" algn="l" rtl="0">
+              <a:spcBef>
+                <a:spcPts val="0"/>
+              </a:spcBef>
+              <a:spcAft>
+                <a:spcPts val="0"/>
+              </a:spcAft>
+              <a:buNone/>
+            </a:pPr>
+            <a:r>
+              <a:rPr lang="en" sz="1300" b="1">
+                <a:solidFill>
+                  <a:srgbClr val="FF0000"/>
+                </a:solidFill>
+                <a:latin typeface="Calibri"/>
+                <a:ea typeface="Calibri"/>
+                <a:cs typeface="Calibri"/>
+                <a:sym typeface="Calibri"/>
+              </a:rPr>
+              <a:t>MLC LLM</a:t>
+            </a:r>
+            <a:r>
+              <a:rPr lang="en" sz="1300">
+                <a:solidFill>
+                  <a:schemeClr val="dk1"/>
+                </a:solidFill>
+                <a:latin typeface="Calibri"/>
+                <a:ea typeface="Calibri"/>
+                <a:cs typeface="Calibri"/>
+                <a:sym typeface="Calibri"/>
+              </a:rPr>
+              <a:t> - open-source apps (cpp, python, rust)</a:t>
+            </a:r>
+            <a:endParaRPr sz="1300">
+              <a:solidFill>
+                <a:schemeClr val="dk1"/>
+              </a:solidFill>
+              <a:latin typeface="Calibri"/>
+              <a:ea typeface="Calibri"/>
+              <a:cs typeface="Calibri"/>
+              <a:sym typeface="Calibri"/>
+            </a:endParaRPr>
+          </a:p>
+          <a:p>
+            <a:pPr marL="457200" lvl="0" indent="-292100" algn="l" rtl="0">
+              <a:spcBef>
+                <a:spcPts val="0"/>
+              </a:spcBef>
+              <a:spcAft>
+                <a:spcPts val="0"/>
+              </a:spcAft>
+              <a:buClr>
+                <a:schemeClr val="dk1"/>
+              </a:buClr>
+              <a:buSzPts val="1000"/>
+              <a:buFont typeface="Calibri"/>
+              <a:buChar char="●"/>
+            </a:pPr>
+            <a:r>
+              <a:rPr lang="en" sz="1000" u="sng">
+                <a:solidFill>
+                  <a:schemeClr val="hlink"/>
+                </a:solidFill>
+                <a:latin typeface="Calibri"/>
+                <a:ea typeface="Calibri"/>
+                <a:cs typeface="Calibri"/>
+                <a:sym typeface="Calibri"/>
+                <a:hlinkClick r:id="rId8"/>
+              </a:rPr>
+              <a:t>https://llm.mlc.ai</a:t>
+            </a:r>
+            <a:r>
+              <a:rPr lang="en" sz="1000">
+                <a:solidFill>
+                  <a:schemeClr val="dk1"/>
+                </a:solidFill>
+                <a:latin typeface="Calibri"/>
+                <a:ea typeface="Calibri"/>
+                <a:cs typeface="Calibri"/>
+                <a:sym typeface="Calibri"/>
+              </a:rPr>
+              <a:t> </a:t>
+            </a:r>
+            <a:endParaRPr sz="1000">
+              <a:solidFill>
+                <a:schemeClr val="dk1"/>
+              </a:solidFill>
+              <a:latin typeface="Calibri"/>
+              <a:ea typeface="Calibri"/>
+              <a:cs typeface="Calibri"/>
+              <a:sym typeface="Calibri"/>
+            </a:endParaRPr>
+          </a:p>
+          <a:p>
+            <a:pPr marL="457200" lvl="0" indent="-292100" algn="l" rtl="0">
+              <a:spcBef>
+                <a:spcPts val="0"/>
+              </a:spcBef>
+              <a:spcAft>
+                <a:spcPts val="0"/>
+              </a:spcAft>
+              <a:buClr>
+                <a:schemeClr val="dk1"/>
+              </a:buClr>
+              <a:buSzPts val="1000"/>
+              <a:buFont typeface="Calibri"/>
+              <a:buChar char="●"/>
+            </a:pPr>
+            <a:r>
+              <a:rPr lang="en" sz="1000" u="sng">
+                <a:solidFill>
+                  <a:schemeClr val="hlink"/>
+                </a:solidFill>
+                <a:latin typeface="Calibri"/>
+                <a:ea typeface="Calibri"/>
+                <a:cs typeface="Calibri"/>
+                <a:sym typeface="Calibri"/>
+                <a:hlinkClick r:id="rId9"/>
+              </a:rPr>
+              <a:t>https://github.com/mlc-ai/mlc-llm</a:t>
+            </a:r>
+            <a:r>
+              <a:rPr lang="en" sz="1000">
+                <a:solidFill>
+                  <a:schemeClr val="dk1"/>
+                </a:solidFill>
+                <a:latin typeface="Calibri"/>
+                <a:ea typeface="Calibri"/>
+                <a:cs typeface="Calibri"/>
+                <a:sym typeface="Calibri"/>
+              </a:rPr>
+              <a:t> </a:t>
+            </a:r>
+            <a:endParaRPr sz="1000">
+              <a:solidFill>
+                <a:schemeClr val="dk1"/>
+              </a:solidFill>
+              <a:latin typeface="Calibri"/>
+              <a:ea typeface="Calibri"/>
+              <a:cs typeface="Calibri"/>
+              <a:sym typeface="Calibri"/>
+            </a:endParaRPr>
+          </a:p>
+          <a:p>
+            <a:pPr marL="0" lvl="0" indent="0" algn="l" rtl="0">
+              <a:spcBef>
+                <a:spcPts val="0"/>
+              </a:spcBef>
+              <a:spcAft>
+                <a:spcPts val="0"/>
+              </a:spcAft>
+              <a:buNone/>
+            </a:pPr>
+            <a:r>
+              <a:rPr lang="en" sz="1300" b="1">
+                <a:solidFill>
+                  <a:srgbClr val="FF0000"/>
+                </a:solidFill>
+                <a:latin typeface="Calibri"/>
+                <a:ea typeface="Calibri"/>
+                <a:cs typeface="Calibri"/>
+                <a:sym typeface="Calibri"/>
+              </a:rPr>
+              <a:t>Streamlit GUI</a:t>
+            </a:r>
+            <a:endParaRPr sz="1300" b="1">
+              <a:solidFill>
+                <a:srgbClr val="FF0000"/>
+              </a:solidFill>
+              <a:latin typeface="Calibri"/>
+              <a:ea typeface="Calibri"/>
+              <a:cs typeface="Calibri"/>
+              <a:sym typeface="Calibri"/>
+            </a:endParaRPr>
+          </a:p>
+          <a:p>
+            <a:pPr marL="457200" lvl="0" indent="-292100" algn="l" rtl="0">
+              <a:spcBef>
+                <a:spcPts val="0"/>
+              </a:spcBef>
+              <a:spcAft>
+                <a:spcPts val="0"/>
+              </a:spcAft>
+              <a:buSzPts val="1000"/>
+              <a:buFont typeface="Calibri"/>
+              <a:buChar char="●"/>
+            </a:pPr>
+            <a:r>
+              <a:rPr lang="en" sz="1000" u="sng">
+                <a:solidFill>
+                  <a:schemeClr val="accent5"/>
+                </a:solidFill>
+                <a:latin typeface="Calibri"/>
+                <a:ea typeface="Calibri"/>
+                <a:cs typeface="Calibri"/>
+                <a:sym typeface="Calibri"/>
+                <a:hlinkClick r:id="rId10">
+                  <a:extLst>
+                    <a:ext uri="{A12FA001-AC4F-418D-AE19-62706E023703}">
+                      <ahyp:hlinkClr xmlns:ahyp="http://schemas.microsoft.com/office/drawing/2018/hyperlinkcolor" val="tx"/>
+                    </a:ext>
+                  </a:extLst>
+                </a:hlinkClick>
+              </a:rPr>
+              <a:t>https://github.com/alejandro-ao/chat-with-websites</a:t>
+            </a:r>
+            <a:endParaRPr sz="1000">
+              <a:solidFill>
+                <a:schemeClr val="dk1"/>
+              </a:solidFill>
+              <a:latin typeface="Calibri"/>
+              <a:ea typeface="Calibri"/>
+              <a:cs typeface="Calibri"/>
+              <a:sym typeface="Calibri"/>
+            </a:endParaRPr>
+          </a:p>
+          <a:p>
+            <a:pPr marL="457200" lvl="0" indent="-292100" algn="l" rtl="0">
+              <a:spcBef>
+                <a:spcPts val="0"/>
+              </a:spcBef>
+              <a:spcAft>
+                <a:spcPts val="0"/>
+              </a:spcAft>
+              <a:buClr>
+                <a:schemeClr val="dk1"/>
+              </a:buClr>
+              <a:buSzPts val="1000"/>
+              <a:buFont typeface="Calibri"/>
+              <a:buChar char="●"/>
+            </a:pPr>
+            <a:r>
+              <a:rPr lang="en" sz="1000" u="sng">
+                <a:solidFill>
+                  <a:schemeClr val="hlink"/>
+                </a:solidFill>
+                <a:latin typeface="Calibri"/>
+                <a:ea typeface="Calibri"/>
+                <a:cs typeface="Calibri"/>
+                <a:sym typeface="Calibri"/>
+                <a:hlinkClick r:id="rId11"/>
+              </a:rPr>
+              <a:t>https://github.com/shashankdeshpande/langchain-chatbot</a:t>
+            </a:r>
+            <a:r>
+              <a:rPr lang="en" sz="1000">
+                <a:solidFill>
+                  <a:schemeClr val="dk1"/>
+                </a:solidFill>
+                <a:latin typeface="Calibri"/>
+                <a:ea typeface="Calibri"/>
+                <a:cs typeface="Calibri"/>
+                <a:sym typeface="Calibri"/>
+              </a:rPr>
+              <a:t> </a:t>
+            </a:r>
+            <a:endParaRPr sz="1000">
+              <a:solidFill>
+                <a:schemeClr val="dk1"/>
+              </a:solidFill>
+              <a:latin typeface="Calibri"/>
+              <a:ea typeface="Calibri"/>
+              <a:cs typeface="Calibri"/>
+              <a:sym typeface="Calibri"/>
+            </a:endParaRPr>
+          </a:p>
+          <a:p>
+            <a:pPr marL="0" lvl="0" indent="0" algn="l" rtl="0">
+              <a:spcBef>
+                <a:spcPts val="0"/>
+              </a:spcBef>
+              <a:spcAft>
+                <a:spcPts val="0"/>
+              </a:spcAft>
+              <a:buNone/>
+            </a:pPr>
+            <a:r>
+              <a:rPr lang="en" sz="1300" b="1">
+                <a:solidFill>
+                  <a:srgbClr val="FF0000"/>
+                </a:solidFill>
+                <a:latin typeface="Calibri"/>
+                <a:ea typeface="Calibri"/>
+                <a:cs typeface="Calibri"/>
+                <a:sym typeface="Calibri"/>
+              </a:rPr>
+              <a:t>LangChain</a:t>
+            </a:r>
+            <a:endParaRPr sz="1300" b="1">
+              <a:solidFill>
+                <a:srgbClr val="FF0000"/>
+              </a:solidFill>
+              <a:latin typeface="Calibri"/>
+              <a:ea typeface="Calibri"/>
+              <a:cs typeface="Calibri"/>
+              <a:sym typeface="Calibri"/>
+            </a:endParaRPr>
+          </a:p>
+          <a:p>
+            <a:pPr marL="457200" lvl="0" indent="-292100" algn="l" rtl="0">
+              <a:spcBef>
+                <a:spcPts val="0"/>
+              </a:spcBef>
+              <a:spcAft>
+                <a:spcPts val="0"/>
+              </a:spcAft>
+              <a:buClr>
+                <a:schemeClr val="dk1"/>
+              </a:buClr>
+              <a:buSzPts val="1000"/>
+              <a:buFont typeface="Calibri"/>
+              <a:buChar char="●"/>
+            </a:pPr>
+            <a:r>
+              <a:rPr lang="en" sz="1000" u="sng">
+                <a:solidFill>
+                  <a:schemeClr val="hlink"/>
+                </a:solidFill>
+                <a:latin typeface="Calibri"/>
+                <a:ea typeface="Calibri"/>
+                <a:cs typeface="Calibri"/>
+                <a:sym typeface="Calibri"/>
+                <a:hlinkClick r:id="rId12"/>
+              </a:rPr>
+              <a:t>https://github.com/kyrolabs/awesome-langchain</a:t>
+            </a:r>
+            <a:r>
+              <a:rPr lang="en" sz="1000">
+                <a:solidFill>
+                  <a:schemeClr val="dk1"/>
+                </a:solidFill>
+                <a:latin typeface="Calibri"/>
+                <a:ea typeface="Calibri"/>
+                <a:cs typeface="Calibri"/>
+                <a:sym typeface="Calibri"/>
+              </a:rPr>
+              <a:t> </a:t>
+            </a:r>
+            <a:endParaRPr sz="1000">
+              <a:solidFill>
+                <a:schemeClr val="dk1"/>
+              </a:solidFill>
+              <a:latin typeface="Calibri"/>
+              <a:ea typeface="Calibri"/>
+              <a:cs typeface="Calibri"/>
+              <a:sym typeface="Calibri"/>
+            </a:endParaRPr>
+          </a:p>
+          <a:p>
+            <a:pPr marL="457200" lvl="0" indent="-292100" algn="l" rtl="0">
+              <a:spcBef>
+                <a:spcPts val="0"/>
+              </a:spcBef>
+              <a:spcAft>
+                <a:spcPts val="0"/>
+              </a:spcAft>
+              <a:buClr>
+                <a:schemeClr val="dk1"/>
+              </a:buClr>
+              <a:buSzPts val="1000"/>
+              <a:buFont typeface="Calibri"/>
+              <a:buChar char="●"/>
+            </a:pPr>
+            <a:r>
+              <a:rPr lang="en" sz="1000" u="sng">
+                <a:solidFill>
+                  <a:schemeClr val="hlink"/>
+                </a:solidFill>
+                <a:latin typeface="Calibri"/>
+                <a:ea typeface="Calibri"/>
+                <a:cs typeface="Calibri"/>
+                <a:sym typeface="Calibri"/>
+                <a:hlinkClick r:id="rId13"/>
+              </a:rPr>
+              <a:t>https://github.com/homanp/superagent</a:t>
+            </a:r>
+            <a:r>
+              <a:rPr lang="en" sz="1000">
+                <a:solidFill>
+                  <a:schemeClr val="dk1"/>
+                </a:solidFill>
+                <a:latin typeface="Calibri"/>
+                <a:ea typeface="Calibri"/>
+                <a:cs typeface="Calibri"/>
+                <a:sym typeface="Calibri"/>
+              </a:rPr>
+              <a:t> </a:t>
+            </a:r>
+            <a:endParaRPr sz="1000">
+              <a:solidFill>
+                <a:schemeClr val="dk1"/>
+              </a:solidFill>
+              <a:latin typeface="Calibri"/>
+              <a:ea typeface="Calibri"/>
+              <a:cs typeface="Calibri"/>
+              <a:sym typeface="Calibri"/>
+            </a:endParaRPr>
+          </a:p>
+          <a:p>
+            <a:pPr marL="457200" lvl="0" indent="-292100" algn="l" rtl="0">
+              <a:spcBef>
+                <a:spcPts val="0"/>
+              </a:spcBef>
+              <a:spcAft>
+                <a:spcPts val="0"/>
+              </a:spcAft>
+              <a:buClr>
+                <a:schemeClr val="dk1"/>
+              </a:buClr>
+              <a:buSzPts val="1000"/>
+              <a:buFont typeface="Calibri"/>
+              <a:buChar char="●"/>
+            </a:pPr>
+            <a:r>
+              <a:rPr lang="en" sz="1000" u="sng">
+                <a:solidFill>
+                  <a:schemeClr val="hlink"/>
+                </a:solidFill>
+                <a:latin typeface="Calibri"/>
+                <a:ea typeface="Calibri"/>
+                <a:cs typeface="Calibri"/>
+                <a:sym typeface="Calibri"/>
+                <a:hlinkClick r:id="rId14"/>
+              </a:rPr>
+              <a:t>https://www.analyticsvidhya.com/blog/2023/06/langflow-ui-for-langchain-to-develop-applications-with-llms/</a:t>
+            </a:r>
+            <a:r>
+              <a:rPr lang="en" sz="1000">
+                <a:solidFill>
+                  <a:schemeClr val="dk1"/>
+                </a:solidFill>
+                <a:latin typeface="Calibri"/>
+                <a:ea typeface="Calibri"/>
+                <a:cs typeface="Calibri"/>
+                <a:sym typeface="Calibri"/>
+              </a:rPr>
+              <a:t> - </a:t>
+            </a:r>
+            <a:r>
+              <a:rPr lang="en" sz="1000" b="1">
+                <a:solidFill>
+                  <a:srgbClr val="FF0000"/>
+                </a:solidFill>
+                <a:latin typeface="Calibri"/>
+                <a:ea typeface="Calibri"/>
+                <a:cs typeface="Calibri"/>
+                <a:sym typeface="Calibri"/>
+              </a:rPr>
+              <a:t>LangFlow</a:t>
+            </a:r>
+            <a:endParaRPr sz="1000" b="1">
+              <a:solidFill>
+                <a:srgbClr val="FF0000"/>
+              </a:solidFill>
+              <a:latin typeface="Calibri"/>
+              <a:ea typeface="Calibri"/>
+              <a:cs typeface="Calibri"/>
+              <a:sym typeface="Calibri"/>
+            </a:endParaRPr>
+          </a:p>
+          <a:p>
+            <a:pPr marL="457200" lvl="0" indent="-292100" algn="l" rtl="0">
+              <a:spcBef>
+                <a:spcPts val="0"/>
+              </a:spcBef>
+              <a:spcAft>
+                <a:spcPts val="0"/>
+              </a:spcAft>
+              <a:buClr>
+                <a:schemeClr val="dk1"/>
+              </a:buClr>
+              <a:buSzPts val="1000"/>
+              <a:buFont typeface="Calibri"/>
+              <a:buChar char="●"/>
+            </a:pPr>
+            <a:r>
+              <a:rPr lang="en" sz="1000" u="sng">
+                <a:solidFill>
+                  <a:schemeClr val="hlink"/>
+                </a:solidFill>
+                <a:latin typeface="Calibri"/>
+                <a:ea typeface="Calibri"/>
+                <a:cs typeface="Calibri"/>
+                <a:sym typeface="Calibri"/>
+                <a:hlinkClick r:id="rId15"/>
+              </a:rPr>
+              <a:t>https://www.langflow.org</a:t>
+            </a:r>
+            <a:r>
+              <a:rPr lang="en" sz="1000">
+                <a:solidFill>
+                  <a:schemeClr val="dk1"/>
+                </a:solidFill>
+                <a:latin typeface="Calibri"/>
+                <a:ea typeface="Calibri"/>
+                <a:cs typeface="Calibri"/>
+                <a:sym typeface="Calibri"/>
+              </a:rPr>
+              <a:t> ; </a:t>
+            </a:r>
+            <a:r>
+              <a:rPr lang="en" sz="1000" u="sng">
+                <a:solidFill>
+                  <a:schemeClr val="hlink"/>
+                </a:solidFill>
+                <a:latin typeface="Calibri"/>
+                <a:ea typeface="Calibri"/>
+                <a:cs typeface="Calibri"/>
+                <a:sym typeface="Calibri"/>
+                <a:hlinkClick r:id="rId16"/>
+              </a:rPr>
+              <a:t>https://github.com/logspace-ai/langflow</a:t>
+            </a:r>
+            <a:r>
+              <a:rPr lang="en" sz="1000">
+                <a:solidFill>
+                  <a:schemeClr val="dk1"/>
+                </a:solidFill>
+                <a:latin typeface="Calibri"/>
+                <a:ea typeface="Calibri"/>
+                <a:cs typeface="Calibri"/>
+                <a:sym typeface="Calibri"/>
+              </a:rPr>
+              <a:t> </a:t>
+            </a:r>
+            <a:endParaRPr sz="1000">
+              <a:solidFill>
+                <a:schemeClr val="dk1"/>
+              </a:solidFill>
+              <a:latin typeface="Calibri"/>
+              <a:ea typeface="Calibri"/>
+              <a:cs typeface="Calibri"/>
+              <a:sym typeface="Calibri"/>
+            </a:endParaRPr>
+          </a:p>
+          <a:p>
+            <a:pPr marL="457200" lvl="0" indent="-292100" algn="l" rtl="0">
+              <a:spcBef>
+                <a:spcPts val="0"/>
+              </a:spcBef>
+              <a:spcAft>
+                <a:spcPts val="0"/>
+              </a:spcAft>
+              <a:buClr>
+                <a:schemeClr val="dk1"/>
+              </a:buClr>
+              <a:buSzPts val="1000"/>
+              <a:buFont typeface="Calibri"/>
+              <a:buChar char="●"/>
+            </a:pPr>
+            <a:r>
+              <a:rPr lang="en" sz="1000" u="sng">
+                <a:solidFill>
+                  <a:schemeClr val="hlink"/>
+                </a:solidFill>
+                <a:latin typeface="Calibri"/>
+                <a:ea typeface="Calibri"/>
+                <a:cs typeface="Calibri"/>
+                <a:sym typeface="Calibri"/>
+                <a:hlinkClick r:id="rId17"/>
+              </a:rPr>
+              <a:t>https://github.com/chatscope/chat-ui-kit-react</a:t>
+            </a:r>
+            <a:r>
+              <a:rPr lang="en" sz="1000">
+                <a:solidFill>
+                  <a:schemeClr val="dk1"/>
+                </a:solidFill>
+                <a:latin typeface="Calibri"/>
+                <a:ea typeface="Calibri"/>
+                <a:cs typeface="Calibri"/>
+                <a:sym typeface="Calibri"/>
+              </a:rPr>
+              <a:t>  </a:t>
+            </a:r>
+            <a:endParaRPr sz="1000">
+              <a:solidFill>
+                <a:schemeClr val="dk1"/>
+              </a:solidFill>
+              <a:latin typeface="Calibri"/>
+              <a:ea typeface="Calibri"/>
+              <a:cs typeface="Calibri"/>
+              <a:sym typeface="Calibri"/>
+            </a:endParaRPr>
+          </a:p>
+          <a:p>
+            <a:pPr marL="0" lvl="0" indent="0" algn="l" rtl="0">
+              <a:spcBef>
+                <a:spcPts val="0"/>
+              </a:spcBef>
+              <a:spcAft>
+                <a:spcPts val="0"/>
+              </a:spcAft>
+              <a:buNone/>
+            </a:pPr>
+            <a:r>
+              <a:rPr lang="en" sz="1300" b="1">
+                <a:solidFill>
+                  <a:srgbClr val="FF0000"/>
+                </a:solidFill>
+                <a:latin typeface="Calibri"/>
+                <a:ea typeface="Calibri"/>
+                <a:cs typeface="Calibri"/>
+                <a:sym typeface="Calibri"/>
+              </a:rPr>
+              <a:t>LlamaIndex</a:t>
+            </a:r>
+            <a:endParaRPr sz="1300" b="1">
+              <a:solidFill>
+                <a:srgbClr val="FF0000"/>
+              </a:solidFill>
+              <a:latin typeface="Calibri"/>
+              <a:ea typeface="Calibri"/>
+              <a:cs typeface="Calibri"/>
+              <a:sym typeface="Calibri"/>
+            </a:endParaRPr>
+          </a:p>
+          <a:p>
+            <a:pPr marL="457200" lvl="0" indent="-292100" algn="l" rtl="0">
+              <a:spcBef>
+                <a:spcPts val="0"/>
+              </a:spcBef>
+              <a:spcAft>
+                <a:spcPts val="0"/>
+              </a:spcAft>
+              <a:buClr>
+                <a:schemeClr val="dk1"/>
+              </a:buClr>
+              <a:buSzPts val="1000"/>
+              <a:buFont typeface="Calibri"/>
+              <a:buChar char="●"/>
+            </a:pPr>
+            <a:r>
+              <a:rPr lang="en" sz="1000" u="sng">
+                <a:solidFill>
+                  <a:schemeClr val="hlink"/>
+                </a:solidFill>
+                <a:latin typeface="Calibri"/>
+                <a:ea typeface="Calibri"/>
+                <a:cs typeface="Calibri"/>
+                <a:sym typeface="Calibri"/>
+                <a:hlinkClick r:id="rId18"/>
+              </a:rPr>
+              <a:t>https://github.com/run-llama</a:t>
+            </a:r>
+            <a:r>
+              <a:rPr lang="en" sz="1000">
+                <a:solidFill>
+                  <a:schemeClr val="dk1"/>
+                </a:solidFill>
+                <a:latin typeface="Calibri"/>
+                <a:ea typeface="Calibri"/>
+                <a:cs typeface="Calibri"/>
+                <a:sym typeface="Calibri"/>
+              </a:rPr>
+              <a:t> - LlamaIndex</a:t>
+            </a:r>
+            <a:endParaRPr sz="1000">
+              <a:solidFill>
+                <a:schemeClr val="dk1"/>
+              </a:solidFill>
+              <a:latin typeface="Calibri"/>
+              <a:ea typeface="Calibri"/>
+              <a:cs typeface="Calibri"/>
+              <a:sym typeface="Calibri"/>
+            </a:endParaRPr>
+          </a:p>
+          <a:p>
+            <a:pPr marL="457200" lvl="0" indent="-292100" algn="l" rtl="0">
+              <a:spcBef>
+                <a:spcPts val="0"/>
+              </a:spcBef>
+              <a:spcAft>
+                <a:spcPts val="0"/>
+              </a:spcAft>
+              <a:buClr>
+                <a:schemeClr val="dk1"/>
+              </a:buClr>
+              <a:buSzPts val="1000"/>
+              <a:buFont typeface="Calibri"/>
+              <a:buChar char="●"/>
+            </a:pPr>
+            <a:r>
+              <a:rPr lang="en" sz="1000" u="sng">
+                <a:solidFill>
+                  <a:schemeClr val="hlink"/>
+                </a:solidFill>
+                <a:latin typeface="Calibri"/>
+                <a:ea typeface="Calibri"/>
+                <a:cs typeface="Calibri"/>
+                <a:sym typeface="Calibri"/>
+                <a:hlinkClick r:id="rId19"/>
+              </a:rPr>
+              <a:t>https://github.com/run-llama/LlamaIndexTS</a:t>
+            </a:r>
+            <a:r>
+              <a:rPr lang="en" sz="1000">
+                <a:solidFill>
+                  <a:schemeClr val="dk1"/>
+                </a:solidFill>
+                <a:latin typeface="Calibri"/>
+                <a:ea typeface="Calibri"/>
+                <a:cs typeface="Calibri"/>
+                <a:sym typeface="Calibri"/>
+              </a:rPr>
+              <a:t> - Javascript apps</a:t>
+            </a:r>
+            <a:endParaRPr sz="1000">
+              <a:solidFill>
+                <a:schemeClr val="dk1"/>
+              </a:solidFill>
+              <a:latin typeface="Calibri"/>
+              <a:ea typeface="Calibri"/>
+              <a:cs typeface="Calibri"/>
+              <a:sym typeface="Calibri"/>
+            </a:endParaRPr>
+          </a:p>
+        </p:txBody>
+      </p:sp>
+      <p:sp>
+        <p:nvSpPr>
+          <p:cNvPr id="158" name="Google Shape;158;p24"/>
+          <p:cNvSpPr txBox="1"/>
+          <p:nvPr/>
+        </p:nvSpPr>
+        <p:spPr>
+          <a:xfrm>
+            <a:off x="72300" y="397425"/>
+            <a:ext cx="4381500" cy="4617600"/>
+          </a:xfrm>
+          <a:prstGeom prst="rect">
+            <a:avLst/>
+          </a:prstGeom>
+          <a:solidFill>
+            <a:srgbClr val="FFF2CC"/>
+          </a:solidFill>
+          <a:ln w="9525" cap="flat" cmpd="sng">
+            <a:solidFill>
+              <a:srgbClr val="FF0000"/>
+            </a:solidFill>
+            <a:prstDash val="solid"/>
+            <a:round/>
+            <a:headEnd type="none" w="sm" len="sm"/>
+            <a:tailEnd type="none" w="sm" len="sm"/>
+          </a:ln>
+        </p:spPr>
+        <p:txBody>
+          <a:bodyPr spcFirstLastPara="1" wrap="square" lIns="91425" tIns="91425" rIns="91425" bIns="91425" anchor="t" anchorCtr="0">
+            <a:spAutoFit/>
+          </a:bodyPr>
+          <a:lstStyle/>
+          <a:p>
+            <a:pPr marL="0" lvl="0" indent="0" algn="l" rtl="0">
+              <a:spcBef>
+                <a:spcPts val="0"/>
+              </a:spcBef>
+              <a:spcAft>
+                <a:spcPts val="0"/>
+              </a:spcAft>
+              <a:buNone/>
+            </a:pPr>
+            <a:r>
+              <a:rPr lang="en" sz="1300" b="1">
+                <a:solidFill>
+                  <a:srgbClr val="FF0000"/>
+                </a:solidFill>
+                <a:latin typeface="Calibri"/>
+                <a:ea typeface="Calibri"/>
+                <a:cs typeface="Calibri"/>
+                <a:sym typeface="Calibri"/>
+              </a:rPr>
+              <a:t>LMStudio</a:t>
+            </a:r>
+            <a:r>
+              <a:rPr lang="en" sz="1300">
+                <a:solidFill>
+                  <a:schemeClr val="dk1"/>
+                </a:solidFill>
+                <a:latin typeface="Calibri"/>
+                <a:ea typeface="Calibri"/>
+                <a:cs typeface="Calibri"/>
+                <a:sym typeface="Calibri"/>
+              </a:rPr>
+              <a:t> - </a:t>
+            </a:r>
+            <a:r>
+              <a:rPr lang="en" sz="1000" u="sng">
+                <a:solidFill>
+                  <a:schemeClr val="hlink"/>
+                </a:solidFill>
+                <a:latin typeface="Calibri"/>
+                <a:ea typeface="Calibri"/>
+                <a:cs typeface="Calibri"/>
+                <a:sym typeface="Calibri"/>
+                <a:hlinkClick r:id="rId20"/>
+              </a:rPr>
+              <a:t>https://lmstudio.ai</a:t>
+            </a:r>
+            <a:r>
+              <a:rPr lang="en" sz="1300">
+                <a:solidFill>
+                  <a:schemeClr val="dk1"/>
+                </a:solidFill>
+                <a:latin typeface="Calibri"/>
+                <a:ea typeface="Calibri"/>
+                <a:cs typeface="Calibri"/>
+                <a:sym typeface="Calibri"/>
+              </a:rPr>
+              <a:t> - app to run chat locally</a:t>
+            </a:r>
+            <a:endParaRPr sz="1300">
+              <a:solidFill>
+                <a:schemeClr val="dk1"/>
+              </a:solidFill>
+              <a:latin typeface="Calibri"/>
+              <a:ea typeface="Calibri"/>
+              <a:cs typeface="Calibri"/>
+              <a:sym typeface="Calibri"/>
+            </a:endParaRPr>
+          </a:p>
+          <a:p>
+            <a:pPr marL="0" lvl="0" indent="0" algn="l" rtl="0">
+              <a:spcBef>
+                <a:spcPts val="0"/>
+              </a:spcBef>
+              <a:spcAft>
+                <a:spcPts val="0"/>
+              </a:spcAft>
+              <a:buNone/>
+            </a:pPr>
+            <a:r>
+              <a:rPr lang="en" sz="1300" b="1">
+                <a:solidFill>
+                  <a:srgbClr val="FF0000"/>
+                </a:solidFill>
+                <a:latin typeface="Calibri"/>
+                <a:ea typeface="Calibri"/>
+                <a:cs typeface="Calibri"/>
+                <a:sym typeface="Calibri"/>
+              </a:rPr>
+              <a:t>Ollama</a:t>
+            </a:r>
+            <a:r>
+              <a:rPr lang="en" sz="1300">
+                <a:solidFill>
+                  <a:schemeClr val="dk1"/>
+                </a:solidFill>
+                <a:latin typeface="Calibri"/>
+                <a:ea typeface="Calibri"/>
+                <a:cs typeface="Calibri"/>
+                <a:sym typeface="Calibri"/>
+              </a:rPr>
+              <a:t> - </a:t>
+            </a:r>
+            <a:r>
+              <a:rPr lang="en" sz="1000" u="sng">
+                <a:solidFill>
+                  <a:schemeClr val="hlink"/>
+                </a:solidFill>
+                <a:latin typeface="Calibri"/>
+                <a:ea typeface="Calibri"/>
+                <a:cs typeface="Calibri"/>
+                <a:sym typeface="Calibri"/>
+                <a:hlinkClick r:id="rId21"/>
+              </a:rPr>
+              <a:t>https://ollama.com</a:t>
+            </a:r>
+            <a:r>
+              <a:rPr lang="en" sz="1300">
+                <a:solidFill>
+                  <a:schemeClr val="dk1"/>
+                </a:solidFill>
+                <a:latin typeface="Calibri"/>
+                <a:ea typeface="Calibri"/>
+                <a:cs typeface="Calibri"/>
+                <a:sym typeface="Calibri"/>
+              </a:rPr>
+              <a:t>  - server, prompt, python API</a:t>
+            </a:r>
+            <a:endParaRPr sz="1300">
+              <a:solidFill>
+                <a:schemeClr val="dk1"/>
+              </a:solidFill>
+              <a:latin typeface="Calibri"/>
+              <a:ea typeface="Calibri"/>
+              <a:cs typeface="Calibri"/>
+              <a:sym typeface="Calibri"/>
+            </a:endParaRPr>
+          </a:p>
+          <a:p>
+            <a:pPr marL="0" lvl="0" indent="0" algn="l" rtl="0">
+              <a:spcBef>
+                <a:spcPts val="0"/>
+              </a:spcBef>
+              <a:spcAft>
+                <a:spcPts val="0"/>
+              </a:spcAft>
+              <a:buNone/>
+            </a:pPr>
+            <a:r>
+              <a:rPr lang="en" sz="1300" b="1">
+                <a:solidFill>
+                  <a:srgbClr val="FF0000"/>
+                </a:solidFill>
+                <a:latin typeface="Calibri"/>
+                <a:ea typeface="Calibri"/>
+                <a:cs typeface="Calibri"/>
+                <a:sym typeface="Calibri"/>
+              </a:rPr>
+              <a:t>llama.cpp</a:t>
+            </a:r>
+            <a:r>
+              <a:rPr lang="en" sz="1300">
+                <a:solidFill>
+                  <a:schemeClr val="dk1"/>
+                </a:solidFill>
+                <a:latin typeface="Calibri"/>
+                <a:ea typeface="Calibri"/>
+                <a:cs typeface="Calibri"/>
+                <a:sym typeface="Calibri"/>
+              </a:rPr>
+              <a:t> - </a:t>
+            </a:r>
+            <a:r>
+              <a:rPr lang="en" sz="1000" u="sng">
+                <a:solidFill>
+                  <a:schemeClr val="hlink"/>
+                </a:solidFill>
+                <a:latin typeface="Calibri"/>
+                <a:ea typeface="Calibri"/>
+                <a:cs typeface="Calibri"/>
+                <a:sym typeface="Calibri"/>
+                <a:hlinkClick r:id="rId22"/>
+              </a:rPr>
+              <a:t>https://github.com/ggerganov/llama.cpp</a:t>
+            </a:r>
+            <a:r>
+              <a:rPr lang="en" sz="1300">
+                <a:solidFill>
+                  <a:schemeClr val="dk1"/>
+                </a:solidFill>
+                <a:latin typeface="Calibri"/>
+                <a:ea typeface="Calibri"/>
+                <a:cs typeface="Calibri"/>
+                <a:sym typeface="Calibri"/>
+              </a:rPr>
+              <a:t> - runtime to efficiently run LLMs (cmd, server)</a:t>
+            </a:r>
+            <a:endParaRPr sz="1300">
+              <a:solidFill>
+                <a:schemeClr val="dk1"/>
+              </a:solidFill>
+              <a:latin typeface="Calibri"/>
+              <a:ea typeface="Calibri"/>
+              <a:cs typeface="Calibri"/>
+              <a:sym typeface="Calibri"/>
+            </a:endParaRPr>
+          </a:p>
+          <a:p>
+            <a:pPr marL="0" lvl="0" indent="0" algn="l" rtl="0">
+              <a:spcBef>
+                <a:spcPts val="0"/>
+              </a:spcBef>
+              <a:spcAft>
+                <a:spcPts val="0"/>
+              </a:spcAft>
+              <a:buNone/>
+            </a:pPr>
+            <a:endParaRPr sz="1300">
+              <a:solidFill>
+                <a:schemeClr val="dk1"/>
+              </a:solidFill>
+              <a:latin typeface="Calibri"/>
+              <a:ea typeface="Calibri"/>
+              <a:cs typeface="Calibri"/>
+              <a:sym typeface="Calibri"/>
+            </a:endParaRPr>
+          </a:p>
+          <a:p>
+            <a:pPr marL="0" lvl="0" indent="0" algn="l" rtl="0">
+              <a:spcBef>
+                <a:spcPts val="0"/>
+              </a:spcBef>
+              <a:spcAft>
+                <a:spcPts val="0"/>
+              </a:spcAft>
+              <a:buClr>
+                <a:schemeClr val="dk1"/>
+              </a:buClr>
+              <a:buSzPts val="1100"/>
+              <a:buFont typeface="Arial"/>
+              <a:buNone/>
+            </a:pPr>
+            <a:r>
+              <a:rPr lang="en" sz="1300" b="1">
+                <a:solidFill>
+                  <a:srgbClr val="FF0000"/>
+                </a:solidFill>
+                <a:latin typeface="Calibri"/>
+                <a:ea typeface="Calibri"/>
+                <a:cs typeface="Calibri"/>
+                <a:sym typeface="Calibri"/>
+              </a:rPr>
+              <a:t>Chainlit</a:t>
+            </a:r>
+            <a:r>
+              <a:rPr lang="en" sz="1300">
+                <a:solidFill>
+                  <a:schemeClr val="dk1"/>
+                </a:solidFill>
+                <a:latin typeface="Calibri"/>
+                <a:ea typeface="Calibri"/>
+                <a:cs typeface="Calibri"/>
+                <a:sym typeface="Calibri"/>
+              </a:rPr>
+              <a:t> - build app in minutes (integrates with </a:t>
+            </a:r>
+            <a:r>
+              <a:rPr lang="en" sz="1300" b="1">
+                <a:solidFill>
+                  <a:srgbClr val="FF0000"/>
+                </a:solidFill>
+                <a:latin typeface="Calibri"/>
+                <a:ea typeface="Calibri"/>
+                <a:cs typeface="Calibri"/>
+                <a:sym typeface="Calibri"/>
+              </a:rPr>
+              <a:t>LangChain</a:t>
+            </a:r>
+            <a:r>
+              <a:rPr lang="en" sz="1300">
+                <a:solidFill>
+                  <a:schemeClr val="dk1"/>
+                </a:solidFill>
+                <a:latin typeface="Calibri"/>
+                <a:ea typeface="Calibri"/>
+                <a:cs typeface="Calibri"/>
+                <a:sym typeface="Calibri"/>
+              </a:rPr>
+              <a:t>)</a:t>
+            </a:r>
+            <a:endParaRPr sz="1300">
+              <a:solidFill>
+                <a:schemeClr val="dk1"/>
+              </a:solidFill>
+              <a:latin typeface="Calibri"/>
+              <a:ea typeface="Calibri"/>
+              <a:cs typeface="Calibri"/>
+              <a:sym typeface="Calibri"/>
+            </a:endParaRPr>
+          </a:p>
+          <a:p>
+            <a:pPr marL="457200" lvl="0" indent="-292100" algn="l" rtl="0">
+              <a:spcBef>
+                <a:spcPts val="0"/>
+              </a:spcBef>
+              <a:spcAft>
+                <a:spcPts val="0"/>
+              </a:spcAft>
+              <a:buClr>
+                <a:schemeClr val="dk1"/>
+              </a:buClr>
+              <a:buSzPts val="1000"/>
+              <a:buFont typeface="Calibri"/>
+              <a:buChar char="●"/>
+            </a:pPr>
+            <a:r>
+              <a:rPr lang="en" sz="1000" u="sng">
+                <a:solidFill>
+                  <a:schemeClr val="hlink"/>
+                </a:solidFill>
+                <a:latin typeface="Calibri"/>
+                <a:ea typeface="Calibri"/>
+                <a:cs typeface="Calibri"/>
+                <a:sym typeface="Calibri"/>
+                <a:hlinkClick r:id="rId23"/>
+              </a:rPr>
+              <a:t>https://docs.chainlit.io/get-started/overview</a:t>
+            </a:r>
+            <a:r>
+              <a:rPr lang="en" sz="1000">
+                <a:solidFill>
+                  <a:schemeClr val="dk1"/>
+                </a:solidFill>
+                <a:latin typeface="Calibri"/>
+                <a:ea typeface="Calibri"/>
+                <a:cs typeface="Calibri"/>
+                <a:sym typeface="Calibri"/>
+              </a:rPr>
+              <a:t> </a:t>
+            </a:r>
+            <a:endParaRPr sz="1000">
+              <a:solidFill>
+                <a:schemeClr val="dk1"/>
+              </a:solidFill>
+              <a:latin typeface="Calibri"/>
+              <a:ea typeface="Calibri"/>
+              <a:cs typeface="Calibri"/>
+              <a:sym typeface="Calibri"/>
+            </a:endParaRPr>
+          </a:p>
+          <a:p>
+            <a:pPr marL="457200" lvl="0" indent="-292100" algn="l" rtl="0">
+              <a:spcBef>
+                <a:spcPts val="0"/>
+              </a:spcBef>
+              <a:spcAft>
+                <a:spcPts val="0"/>
+              </a:spcAft>
+              <a:buClr>
+                <a:schemeClr val="dk1"/>
+              </a:buClr>
+              <a:buSzPts val="1000"/>
+              <a:buFont typeface="Calibri"/>
+              <a:buChar char="●"/>
+            </a:pPr>
+            <a:r>
+              <a:rPr lang="en" sz="1000" u="sng">
+                <a:solidFill>
+                  <a:schemeClr val="hlink"/>
+                </a:solidFill>
+                <a:latin typeface="Calibri"/>
+                <a:ea typeface="Calibri"/>
+                <a:cs typeface="Calibri"/>
+                <a:sym typeface="Calibri"/>
+                <a:hlinkClick r:id="rId24"/>
+              </a:rPr>
+              <a:t>https://github.com/Chainlit/chainlit</a:t>
+            </a:r>
+            <a:r>
+              <a:rPr lang="en" sz="1000">
+                <a:solidFill>
+                  <a:schemeClr val="dk1"/>
+                </a:solidFill>
+                <a:latin typeface="Calibri"/>
+                <a:ea typeface="Calibri"/>
+                <a:cs typeface="Calibri"/>
+                <a:sym typeface="Calibri"/>
+              </a:rPr>
+              <a:t> </a:t>
+            </a:r>
+            <a:endParaRPr sz="1000">
+              <a:solidFill>
+                <a:schemeClr val="dk1"/>
+              </a:solidFill>
+              <a:latin typeface="Calibri"/>
+              <a:ea typeface="Calibri"/>
+              <a:cs typeface="Calibri"/>
+              <a:sym typeface="Calibri"/>
+            </a:endParaRPr>
+          </a:p>
+          <a:p>
+            <a:pPr marL="0" lvl="0" indent="0" algn="l" rtl="0">
+              <a:spcBef>
+                <a:spcPts val="0"/>
+              </a:spcBef>
+              <a:spcAft>
+                <a:spcPts val="0"/>
+              </a:spcAft>
+              <a:buNone/>
+            </a:pPr>
+            <a:endParaRPr sz="1300">
+              <a:solidFill>
+                <a:schemeClr val="dk1"/>
+              </a:solidFill>
+              <a:latin typeface="Calibri"/>
+              <a:ea typeface="Calibri"/>
+              <a:cs typeface="Calibri"/>
+              <a:sym typeface="Calibri"/>
+            </a:endParaRPr>
+          </a:p>
+          <a:p>
+            <a:pPr marL="0" lvl="0" indent="0" algn="l" rtl="0">
+              <a:spcBef>
+                <a:spcPts val="0"/>
+              </a:spcBef>
+              <a:spcAft>
+                <a:spcPts val="0"/>
+              </a:spcAft>
+              <a:buNone/>
+            </a:pPr>
+            <a:r>
+              <a:rPr lang="en" sz="1300" b="1">
+                <a:solidFill>
+                  <a:srgbClr val="FF0000"/>
+                </a:solidFill>
+                <a:latin typeface="Calibri"/>
+                <a:ea typeface="Calibri"/>
+                <a:cs typeface="Calibri"/>
+                <a:sym typeface="Calibri"/>
+              </a:rPr>
+              <a:t>Open WebUI</a:t>
+            </a:r>
+            <a:r>
+              <a:rPr lang="en" sz="1300">
+                <a:solidFill>
+                  <a:schemeClr val="dk1"/>
+                </a:solidFill>
+                <a:latin typeface="Calibri"/>
+                <a:ea typeface="Calibri"/>
+                <a:cs typeface="Calibri"/>
+                <a:sym typeface="Calibri"/>
+              </a:rPr>
+              <a:t> (Formerly Ollama WebUI) - supports Ollama </a:t>
+            </a:r>
+            <a:br>
+              <a:rPr lang="en" sz="1300">
+                <a:solidFill>
+                  <a:schemeClr val="dk1"/>
+                </a:solidFill>
+                <a:latin typeface="Calibri"/>
+                <a:ea typeface="Calibri"/>
+                <a:cs typeface="Calibri"/>
+                <a:sym typeface="Calibri"/>
+              </a:rPr>
+            </a:br>
+            <a:r>
+              <a:rPr lang="en" sz="1300">
+                <a:solidFill>
+                  <a:schemeClr val="dk1"/>
+                </a:solidFill>
+                <a:latin typeface="Calibri"/>
+                <a:ea typeface="Calibri"/>
+                <a:cs typeface="Calibri"/>
+                <a:sym typeface="Calibri"/>
+              </a:rPr>
+              <a:t>and  OpenAI-compatible APIs. Python and Javascript.</a:t>
+            </a:r>
+            <a:endParaRPr sz="1300">
+              <a:solidFill>
+                <a:schemeClr val="dk1"/>
+              </a:solidFill>
+              <a:latin typeface="Calibri"/>
+              <a:ea typeface="Calibri"/>
+              <a:cs typeface="Calibri"/>
+              <a:sym typeface="Calibri"/>
+            </a:endParaRPr>
+          </a:p>
+          <a:p>
+            <a:pPr marL="457200" lvl="0" indent="-292100" algn="l" rtl="0">
+              <a:spcBef>
+                <a:spcPts val="0"/>
+              </a:spcBef>
+              <a:spcAft>
+                <a:spcPts val="0"/>
+              </a:spcAft>
+              <a:buSzPts val="1000"/>
+              <a:buFont typeface="Calibri"/>
+              <a:buChar char="●"/>
+            </a:pPr>
+            <a:r>
+              <a:rPr lang="en" sz="1000" u="sng">
+                <a:solidFill>
+                  <a:schemeClr val="hlink"/>
+                </a:solidFill>
+                <a:latin typeface="Calibri"/>
+                <a:ea typeface="Calibri"/>
+                <a:cs typeface="Calibri"/>
+                <a:sym typeface="Calibri"/>
+                <a:hlinkClick r:id="rId25"/>
+              </a:rPr>
+              <a:t>https://github.com/open-webui/open-webui</a:t>
+            </a:r>
+            <a:r>
+              <a:rPr lang="en" sz="1000">
+                <a:solidFill>
+                  <a:schemeClr val="dk1"/>
+                </a:solidFill>
+                <a:latin typeface="Calibri"/>
+                <a:ea typeface="Calibri"/>
+                <a:cs typeface="Calibri"/>
+                <a:sym typeface="Calibri"/>
+              </a:rPr>
+              <a:t> </a:t>
+            </a:r>
+            <a:endParaRPr sz="1000">
+              <a:solidFill>
+                <a:schemeClr val="dk1"/>
+              </a:solidFill>
+              <a:latin typeface="Calibri"/>
+              <a:ea typeface="Calibri"/>
+              <a:cs typeface="Calibri"/>
+              <a:sym typeface="Calibri"/>
+            </a:endParaRPr>
+          </a:p>
+          <a:p>
+            <a:pPr marL="457200" lvl="0" indent="-292100" algn="l" rtl="0">
+              <a:spcBef>
+                <a:spcPts val="0"/>
+              </a:spcBef>
+              <a:spcAft>
+                <a:spcPts val="0"/>
+              </a:spcAft>
+              <a:buSzPts val="1000"/>
+              <a:buFont typeface="Calibri"/>
+              <a:buChar char="●"/>
+            </a:pPr>
+            <a:r>
+              <a:rPr lang="en" sz="1000" u="sng">
+                <a:solidFill>
+                  <a:schemeClr val="hlink"/>
+                </a:solidFill>
+                <a:latin typeface="Calibri"/>
+                <a:ea typeface="Calibri"/>
+                <a:cs typeface="Calibri"/>
+                <a:sym typeface="Calibri"/>
+                <a:hlinkClick r:id="rId26"/>
+              </a:rPr>
+              <a:t>https://docs.openwebui.com</a:t>
+            </a:r>
+            <a:r>
+              <a:rPr lang="en" sz="1000">
+                <a:solidFill>
+                  <a:schemeClr val="dk1"/>
+                </a:solidFill>
+                <a:latin typeface="Calibri"/>
+                <a:ea typeface="Calibri"/>
+                <a:cs typeface="Calibri"/>
+                <a:sym typeface="Calibri"/>
+              </a:rPr>
+              <a:t> </a:t>
+            </a:r>
+            <a:endParaRPr sz="1000">
+              <a:solidFill>
+                <a:schemeClr val="dk1"/>
+              </a:solidFill>
+              <a:latin typeface="Calibri"/>
+              <a:ea typeface="Calibri"/>
+              <a:cs typeface="Calibri"/>
+              <a:sym typeface="Calibri"/>
+            </a:endParaRPr>
+          </a:p>
+          <a:p>
+            <a:pPr marL="0" lvl="0" indent="0" algn="l" rtl="0">
+              <a:spcBef>
+                <a:spcPts val="0"/>
+              </a:spcBef>
+              <a:spcAft>
+                <a:spcPts val="0"/>
+              </a:spcAft>
+              <a:buNone/>
+            </a:pPr>
+            <a:endParaRPr sz="1300">
+              <a:solidFill>
+                <a:schemeClr val="dk1"/>
+              </a:solidFill>
+              <a:latin typeface="Calibri"/>
+              <a:ea typeface="Calibri"/>
+              <a:cs typeface="Calibri"/>
+              <a:sym typeface="Calibri"/>
+            </a:endParaRPr>
+          </a:p>
+          <a:p>
+            <a:pPr marL="0" lvl="0" indent="0" algn="l" rtl="0">
+              <a:spcBef>
+                <a:spcPts val="0"/>
+              </a:spcBef>
+              <a:spcAft>
+                <a:spcPts val="0"/>
+              </a:spcAft>
+              <a:buNone/>
+            </a:pPr>
+            <a:r>
+              <a:rPr lang="en" sz="1300" b="1">
+                <a:solidFill>
+                  <a:srgbClr val="FF0000"/>
+                </a:solidFill>
+                <a:latin typeface="Calibri"/>
+                <a:ea typeface="Calibri"/>
+                <a:cs typeface="Calibri"/>
+                <a:sym typeface="Calibri"/>
+              </a:rPr>
+              <a:t>Text-Generation</a:t>
+            </a:r>
+            <a:r>
+              <a:rPr lang="en" sz="1300">
+                <a:solidFill>
+                  <a:schemeClr val="dk1"/>
+                </a:solidFill>
+                <a:latin typeface="Calibri"/>
+                <a:ea typeface="Calibri"/>
+                <a:cs typeface="Calibri"/>
+                <a:sym typeface="Calibri"/>
+              </a:rPr>
+              <a:t> - open source, but problem installing (it installs its own miniconda). Python based. Uses transformers and datasets modules, as well as llama.cpp</a:t>
+            </a:r>
+            <a:endParaRPr sz="1300">
+              <a:solidFill>
+                <a:schemeClr val="dk1"/>
+              </a:solidFill>
+              <a:latin typeface="Calibri"/>
+              <a:ea typeface="Calibri"/>
+              <a:cs typeface="Calibri"/>
+              <a:sym typeface="Calibri"/>
+            </a:endParaRPr>
+          </a:p>
+          <a:p>
+            <a:pPr marL="457200" lvl="0" indent="-292100" algn="l" rtl="0">
+              <a:spcBef>
+                <a:spcPts val="0"/>
+              </a:spcBef>
+              <a:spcAft>
+                <a:spcPts val="0"/>
+              </a:spcAft>
+              <a:buSzPts val="1000"/>
+              <a:buFont typeface="Calibri"/>
+              <a:buChar char="●"/>
+            </a:pPr>
+            <a:r>
+              <a:rPr lang="en" sz="1000" u="sng">
+                <a:solidFill>
+                  <a:schemeClr val="hlink"/>
+                </a:solidFill>
+                <a:latin typeface="Calibri"/>
+                <a:ea typeface="Calibri"/>
+                <a:cs typeface="Calibri"/>
+                <a:sym typeface="Calibri"/>
+                <a:hlinkClick r:id="rId27"/>
+              </a:rPr>
+              <a:t>https://github.com/oobabooga/text-generation-webui</a:t>
+            </a:r>
+            <a:r>
+              <a:rPr lang="en" sz="1000">
+                <a:solidFill>
+                  <a:schemeClr val="dk1"/>
+                </a:solidFill>
+                <a:latin typeface="Calibri"/>
+                <a:ea typeface="Calibri"/>
+                <a:cs typeface="Calibri"/>
+                <a:sym typeface="Calibri"/>
+              </a:rPr>
+              <a:t> </a:t>
+            </a:r>
+            <a:endParaRPr sz="1000">
+              <a:solidFill>
+                <a:schemeClr val="dk1"/>
+              </a:solidFill>
+              <a:latin typeface="Calibri"/>
+              <a:ea typeface="Calibri"/>
+              <a:cs typeface="Calibri"/>
+              <a:sym typeface="Calibri"/>
+            </a:endParaRPr>
+          </a:p>
+          <a:p>
+            <a:pPr marL="457200" lvl="0" indent="-292100" algn="l" rtl="0">
+              <a:spcBef>
+                <a:spcPts val="0"/>
+              </a:spcBef>
+              <a:spcAft>
+                <a:spcPts val="0"/>
+              </a:spcAft>
+              <a:buSzPts val="1000"/>
+              <a:buFont typeface="Calibri"/>
+              <a:buChar char="●"/>
+            </a:pPr>
+            <a:r>
+              <a:rPr lang="en" sz="1000" u="sng">
+                <a:solidFill>
+                  <a:schemeClr val="hlink"/>
+                </a:solidFill>
+                <a:latin typeface="Calibri"/>
+                <a:ea typeface="Calibri"/>
+                <a:cs typeface="Calibri"/>
+                <a:sym typeface="Calibri"/>
+                <a:hlinkClick r:id="rId28"/>
+              </a:rPr>
+              <a:t>https://github.com/oobabooga/text-generation-webui/wiki/12-%E2%80%90-OpenAI-API#examples</a:t>
+            </a:r>
+            <a:r>
+              <a:rPr lang="en" sz="1000">
+                <a:solidFill>
+                  <a:schemeClr val="dk1"/>
+                </a:solidFill>
+                <a:latin typeface="Calibri"/>
+                <a:ea typeface="Calibri"/>
+                <a:cs typeface="Calibri"/>
+                <a:sym typeface="Calibri"/>
+              </a:rPr>
+              <a:t> </a:t>
+            </a:r>
+            <a:endParaRPr sz="1000">
+              <a:solidFill>
+                <a:schemeClr val="dk1"/>
+              </a:solidFill>
+              <a:latin typeface="Calibri"/>
+              <a:ea typeface="Calibri"/>
+              <a:cs typeface="Calibri"/>
+              <a:sym typeface="Calibri"/>
+            </a:endParaRPr>
+          </a:p>
+          <a:p>
+            <a:pPr marL="0" lvl="0" indent="0" algn="l" rtl="0">
+              <a:spcBef>
+                <a:spcPts val="0"/>
+              </a:spcBef>
+              <a:spcAft>
+                <a:spcPts val="0"/>
+              </a:spcAft>
+              <a:buNone/>
+            </a:pPr>
+            <a:endParaRPr sz="1300">
+              <a:solidFill>
+                <a:schemeClr val="dk1"/>
+              </a:solidFill>
+              <a:latin typeface="Calibri"/>
+              <a:ea typeface="Calibri"/>
+              <a:cs typeface="Calibri"/>
+              <a:sym typeface="Calibri"/>
+            </a:endParaRPr>
+          </a:p>
+          <a:p>
+            <a:pPr marL="0" lvl="0" indent="0" algn="l" rtl="0">
+              <a:spcBef>
+                <a:spcPts val="0"/>
+              </a:spcBef>
+              <a:spcAft>
+                <a:spcPts val="0"/>
+              </a:spcAft>
+              <a:buNone/>
+            </a:pPr>
+            <a:r>
+              <a:rPr lang="en" sz="1300" b="1">
+                <a:solidFill>
+                  <a:srgbClr val="FF0000"/>
+                </a:solidFill>
+                <a:latin typeface="Calibri"/>
+                <a:ea typeface="Calibri"/>
+                <a:cs typeface="Calibri"/>
+                <a:sym typeface="Calibri"/>
+              </a:rPr>
+              <a:t>Ollama GUI</a:t>
+            </a:r>
+            <a:r>
+              <a:rPr lang="en" sz="1300">
+                <a:solidFill>
+                  <a:schemeClr val="dk1"/>
+                </a:solidFill>
+                <a:latin typeface="Calibri"/>
+                <a:ea typeface="Calibri"/>
+                <a:cs typeface="Calibri"/>
+                <a:sym typeface="Calibri"/>
+              </a:rPr>
+              <a:t> - open-source pure Javascript chat app to use local LLMs via Ollama.</a:t>
+            </a:r>
+            <a:endParaRPr sz="1300">
+              <a:solidFill>
+                <a:schemeClr val="dk1"/>
+              </a:solidFill>
+              <a:latin typeface="Calibri"/>
+              <a:ea typeface="Calibri"/>
+              <a:cs typeface="Calibri"/>
+              <a:sym typeface="Calibri"/>
+            </a:endParaRPr>
+          </a:p>
+          <a:p>
+            <a:pPr marL="457200" lvl="0" indent="-292100" algn="l" rtl="0">
+              <a:spcBef>
+                <a:spcPts val="0"/>
+              </a:spcBef>
+              <a:spcAft>
+                <a:spcPts val="0"/>
+              </a:spcAft>
+              <a:buSzPts val="1000"/>
+              <a:buFont typeface="Calibri"/>
+              <a:buChar char="●"/>
+            </a:pPr>
+            <a:r>
+              <a:rPr lang="en" sz="1000" u="sng">
+                <a:solidFill>
+                  <a:schemeClr val="hlink"/>
+                </a:solidFill>
+                <a:latin typeface="Calibri"/>
+                <a:ea typeface="Calibri"/>
+                <a:cs typeface="Calibri"/>
+                <a:sym typeface="Calibri"/>
+                <a:hlinkClick r:id="rId29"/>
+              </a:rPr>
+              <a:t>https://github.com/HelgeSverre/ollama-gui</a:t>
+            </a:r>
+            <a:r>
+              <a:rPr lang="en" sz="1000">
+                <a:solidFill>
+                  <a:schemeClr val="dk1"/>
+                </a:solidFill>
+                <a:latin typeface="Calibri"/>
+                <a:ea typeface="Calibri"/>
+                <a:cs typeface="Calibri"/>
+                <a:sym typeface="Calibri"/>
+              </a:rPr>
+              <a:t> </a:t>
+            </a:r>
+            <a:endParaRPr sz="700">
+              <a:solidFill>
+                <a:schemeClr val="dk1"/>
+              </a:solidFill>
+              <a:latin typeface="Roboto Mono"/>
+              <a:ea typeface="Roboto Mono"/>
+              <a:cs typeface="Roboto Mono"/>
+              <a:sym typeface="Roboto Mono"/>
+            </a:endParaRPr>
+          </a:p>
+        </p:txBody>
+      </p:sp>
+    </p:spTree>
+  </p:cSld>
+  <p:clrMapOvr>
+    <a:masterClrMapping/>
+  </p:clrMapOvr>
+</p:sld>
+</file>
+
+<file path=ppt/slides/slide13.xml><?xml version="1.0" encoding="utf-8"?>
+<p:sld xmlns:a="http://schemas.openxmlformats.org/drawingml/2006/main" xmlns:r="http://schemas.openxmlformats.org/officeDocument/2006/relationships" xmlns:p="http://schemas.openxmlformats.org/presentationml/2006/main">
+  <p:cSld>
+    <p:spTree>
+      <p:nvGrpSpPr>
+        <p:cNvPr id="1" name="Shape 162"/>
+        <p:cNvGrpSpPr/>
+        <p:nvPr/>
+      </p:nvGrpSpPr>
+      <p:grpSpPr>
+        <a:xfrm>
+          <a:off x="0" y="0"/>
+          <a:ext cx="0" cy="0"/>
+          <a:chOff x="0" y="0"/>
+          <a:chExt cx="0" cy="0"/>
+        </a:xfrm>
+      </p:grpSpPr>
+      <p:sp>
+        <p:nvSpPr>
+          <p:cNvPr id="163" name="Google Shape;163;p25"/>
+          <p:cNvSpPr txBox="1"/>
+          <p:nvPr/>
+        </p:nvSpPr>
+        <p:spPr>
+          <a:xfrm>
+            <a:off x="72300" y="0"/>
+            <a:ext cx="4133400" cy="326400"/>
+          </a:xfrm>
+          <a:prstGeom prst="rect">
+            <a:avLst/>
+          </a:prstGeom>
+          <a:noFill/>
+          <a:ln>
+            <a:noFill/>
+          </a:ln>
+        </p:spPr>
+        <p:txBody>
+          <a:bodyPr spcFirstLastPara="1" wrap="square" lIns="9125" tIns="9125" rIns="9125" bIns="9125" anchor="t" anchorCtr="0">
+            <a:spAutoFit/>
+          </a:bodyPr>
+          <a:lstStyle/>
+          <a:p>
+            <a:pPr marL="0" marR="0" lvl="0" indent="0" algn="l" rtl="0">
+              <a:lnSpc>
+                <a:spcPct val="100000"/>
+              </a:lnSpc>
+              <a:spcBef>
+                <a:spcPts val="0"/>
+              </a:spcBef>
+              <a:spcAft>
+                <a:spcPts val="0"/>
+              </a:spcAft>
+              <a:buClr>
+                <a:srgbClr val="000000"/>
+              </a:buClr>
+              <a:buSzPts val="2000"/>
+              <a:buFont typeface="Arial"/>
+              <a:buNone/>
+            </a:pPr>
+            <a:r>
+              <a:rPr lang="en" sz="2000" b="1">
+                <a:solidFill>
+                  <a:schemeClr val="dk1"/>
+                </a:solidFill>
+                <a:latin typeface="Calibri"/>
+                <a:ea typeface="Calibri"/>
+                <a:cs typeface="Calibri"/>
+                <a:sym typeface="Calibri"/>
+              </a:rPr>
+              <a:t>Web Research using LLM</a:t>
+            </a:r>
+            <a:endParaRPr sz="2000" b="1" i="0" u="none" strike="noStrike" cap="none">
+              <a:solidFill>
+                <a:srgbClr val="000000"/>
+              </a:solidFill>
+              <a:latin typeface="Calibri"/>
+              <a:ea typeface="Calibri"/>
+              <a:cs typeface="Calibri"/>
+              <a:sym typeface="Calibri"/>
+            </a:endParaRPr>
+          </a:p>
+        </p:txBody>
+      </p:sp>
+      <p:sp>
+        <p:nvSpPr>
+          <p:cNvPr id="164" name="Google Shape;164;p25"/>
+          <p:cNvSpPr txBox="1"/>
+          <p:nvPr/>
+        </p:nvSpPr>
+        <p:spPr>
+          <a:xfrm>
+            <a:off x="72300" y="397425"/>
+            <a:ext cx="4381500" cy="2555100"/>
+          </a:xfrm>
+          <a:prstGeom prst="rect">
+            <a:avLst/>
+          </a:prstGeom>
+          <a:solidFill>
+            <a:srgbClr val="FFF2CC"/>
+          </a:solidFill>
+          <a:ln w="9525" cap="flat" cmpd="sng">
+            <a:solidFill>
+              <a:srgbClr val="FF0000"/>
+            </a:solidFill>
+            <a:prstDash val="solid"/>
+            <a:round/>
+            <a:headEnd type="none" w="sm" len="sm"/>
+            <a:tailEnd type="none" w="sm" len="sm"/>
+          </a:ln>
+        </p:spPr>
+        <p:txBody>
+          <a:bodyPr spcFirstLastPara="1" wrap="square" lIns="91425" tIns="91425" rIns="91425" bIns="91425" anchor="t" anchorCtr="0">
+            <a:spAutoFit/>
+          </a:bodyPr>
+          <a:lstStyle/>
+          <a:p>
+            <a:pPr marL="0" lvl="0" indent="0" algn="l" rtl="0">
+              <a:spcBef>
+                <a:spcPts val="0"/>
+              </a:spcBef>
+              <a:spcAft>
+                <a:spcPts val="0"/>
+              </a:spcAft>
+              <a:buNone/>
+            </a:pPr>
+            <a:r>
+              <a:rPr lang="en" sz="1100">
+                <a:latin typeface="Calibri"/>
+                <a:ea typeface="Calibri"/>
+                <a:cs typeface="Calibri"/>
+                <a:sym typeface="Calibri"/>
+              </a:rPr>
+              <a:t>GPT Researcher</a:t>
+            </a:r>
+            <a:endParaRPr sz="1100">
+              <a:latin typeface="Calibri"/>
+              <a:ea typeface="Calibri"/>
+              <a:cs typeface="Calibri"/>
+              <a:sym typeface="Calibri"/>
+            </a:endParaRPr>
+          </a:p>
+          <a:p>
+            <a:pPr marL="0" lvl="0" indent="0" algn="l" rtl="0">
+              <a:spcBef>
+                <a:spcPts val="0"/>
+              </a:spcBef>
+              <a:spcAft>
+                <a:spcPts val="0"/>
+              </a:spcAft>
+              <a:buNone/>
+            </a:pPr>
+            <a:r>
+              <a:rPr lang="en" sz="1100" u="sng">
+                <a:solidFill>
+                  <a:schemeClr val="hlink"/>
+                </a:solidFill>
+                <a:latin typeface="Calibri"/>
+                <a:ea typeface="Calibri"/>
+                <a:cs typeface="Calibri"/>
+                <a:sym typeface="Calibri"/>
+                <a:hlinkClick r:id="rId3"/>
+              </a:rPr>
+              <a:t>https://github.com/assafelovic/gpt-researcher</a:t>
+            </a:r>
+            <a:r>
+              <a:rPr lang="en" sz="1100">
+                <a:solidFill>
+                  <a:schemeClr val="dk1"/>
+                </a:solidFill>
+                <a:latin typeface="Calibri"/>
+                <a:ea typeface="Calibri"/>
+                <a:cs typeface="Calibri"/>
+                <a:sym typeface="Calibri"/>
+              </a:rPr>
+              <a:t> </a:t>
+            </a:r>
+            <a:endParaRPr sz="1100">
+              <a:solidFill>
+                <a:schemeClr val="dk1"/>
+              </a:solidFill>
+              <a:latin typeface="Calibri"/>
+              <a:ea typeface="Calibri"/>
+              <a:cs typeface="Calibri"/>
+              <a:sym typeface="Calibri"/>
+            </a:endParaRPr>
+          </a:p>
+          <a:p>
+            <a:pPr marL="0" lvl="0" indent="0" algn="l" rtl="0">
+              <a:spcBef>
+                <a:spcPts val="0"/>
+              </a:spcBef>
+              <a:spcAft>
+                <a:spcPts val="0"/>
+              </a:spcAft>
+              <a:buNone/>
+            </a:pPr>
+            <a:r>
+              <a:rPr lang="en" sz="1100">
+                <a:solidFill>
+                  <a:schemeClr val="dk1"/>
+                </a:solidFill>
+                <a:latin typeface="Calibri"/>
+                <a:ea typeface="Calibri"/>
+                <a:cs typeface="Calibri"/>
+                <a:sym typeface="Calibri"/>
+              </a:rPr>
+              <a:t>Web scraping</a:t>
+            </a:r>
+            <a:endParaRPr sz="1100">
+              <a:solidFill>
+                <a:schemeClr val="dk1"/>
+              </a:solidFill>
+              <a:latin typeface="Calibri"/>
+              <a:ea typeface="Calibri"/>
+              <a:cs typeface="Calibri"/>
+              <a:sym typeface="Calibri"/>
+            </a:endParaRPr>
+          </a:p>
+          <a:p>
+            <a:pPr marL="0" lvl="0" indent="0" algn="l" rtl="0">
+              <a:spcBef>
+                <a:spcPts val="0"/>
+              </a:spcBef>
+              <a:spcAft>
+                <a:spcPts val="0"/>
+              </a:spcAft>
+              <a:buNone/>
+            </a:pPr>
+            <a:r>
+              <a:rPr lang="en" sz="1100" u="sng">
+                <a:solidFill>
+                  <a:schemeClr val="hlink"/>
+                </a:solidFill>
+                <a:latin typeface="Calibri"/>
+                <a:ea typeface="Calibri"/>
+                <a:cs typeface="Calibri"/>
+                <a:sym typeface="Calibri"/>
+                <a:hlinkClick r:id="rId4"/>
+              </a:rPr>
+              <a:t>https://python.langchain.com/docs/use_cases/web_scraping</a:t>
+            </a:r>
+            <a:endParaRPr sz="1100">
+              <a:solidFill>
+                <a:schemeClr val="dk1"/>
+              </a:solidFill>
+              <a:latin typeface="Calibri"/>
+              <a:ea typeface="Calibri"/>
+              <a:cs typeface="Calibri"/>
+              <a:sym typeface="Calibri"/>
+            </a:endParaRPr>
+          </a:p>
+          <a:p>
+            <a:pPr marL="0" lvl="0" indent="0" algn="l" rtl="0">
+              <a:spcBef>
+                <a:spcPts val="0"/>
+              </a:spcBef>
+              <a:spcAft>
+                <a:spcPts val="0"/>
+              </a:spcAft>
+              <a:buNone/>
+            </a:pPr>
+            <a:r>
+              <a:rPr lang="en" sz="1100">
+                <a:solidFill>
+                  <a:schemeClr val="dk1"/>
+                </a:solidFill>
+                <a:latin typeface="Calibri"/>
+                <a:ea typeface="Calibri"/>
+                <a:cs typeface="Calibri"/>
+                <a:sym typeface="Calibri"/>
+              </a:rPr>
+              <a:t>Web Research chatbot LangChain+OpenAI:</a:t>
+            </a:r>
+            <a:endParaRPr sz="1100">
+              <a:solidFill>
+                <a:schemeClr val="dk1"/>
+              </a:solidFill>
+              <a:latin typeface="Calibri"/>
+              <a:ea typeface="Calibri"/>
+              <a:cs typeface="Calibri"/>
+              <a:sym typeface="Calibri"/>
+            </a:endParaRPr>
+          </a:p>
+          <a:p>
+            <a:pPr marL="0" lvl="0" indent="0" algn="l" rtl="0">
+              <a:spcBef>
+                <a:spcPts val="0"/>
+              </a:spcBef>
+              <a:spcAft>
+                <a:spcPts val="0"/>
+              </a:spcAft>
+              <a:buNone/>
+            </a:pPr>
+            <a:r>
+              <a:rPr lang="en" sz="1100" u="sng">
+                <a:solidFill>
+                  <a:schemeClr val="hlink"/>
+                </a:solidFill>
+                <a:latin typeface="Calibri"/>
+                <a:ea typeface="Calibri"/>
+                <a:cs typeface="Calibri"/>
+                <a:sym typeface="Calibri"/>
+                <a:hlinkClick r:id="rId5"/>
+              </a:rPr>
+              <a:t>https://medium.com/simform-engineering/creating-a-web-research-chatbot-using-langchain-and-openai-aa7113c9ccbf</a:t>
+            </a:r>
+            <a:r>
+              <a:rPr lang="en" sz="1100">
+                <a:solidFill>
+                  <a:schemeClr val="dk1"/>
+                </a:solidFill>
+                <a:latin typeface="Calibri"/>
+                <a:ea typeface="Calibri"/>
+                <a:cs typeface="Calibri"/>
+                <a:sym typeface="Calibri"/>
+              </a:rPr>
+              <a:t>  </a:t>
+            </a:r>
+            <a:endParaRPr sz="1100">
+              <a:solidFill>
+                <a:schemeClr val="dk1"/>
+              </a:solidFill>
+              <a:latin typeface="Calibri"/>
+              <a:ea typeface="Calibri"/>
+              <a:cs typeface="Calibri"/>
+              <a:sym typeface="Calibri"/>
+            </a:endParaRPr>
+          </a:p>
+          <a:p>
+            <a:pPr marL="0" lvl="0" indent="0" algn="l" rtl="0">
+              <a:spcBef>
+                <a:spcPts val="0"/>
+              </a:spcBef>
+              <a:spcAft>
+                <a:spcPts val="0"/>
+              </a:spcAft>
+              <a:buNone/>
+            </a:pPr>
+            <a:r>
+              <a:rPr lang="en" sz="1100">
+                <a:solidFill>
+                  <a:schemeClr val="dk1"/>
+                </a:solidFill>
+                <a:latin typeface="Calibri"/>
+                <a:ea typeface="Calibri"/>
+                <a:cs typeface="Calibri"/>
+                <a:sym typeface="Calibri"/>
+              </a:rPr>
+              <a:t>Pioneering the Future of Web Scraping with Intelligent AI Agents: Unleash the Power of AutoGen</a:t>
+            </a:r>
+            <a:endParaRPr sz="1100">
+              <a:solidFill>
+                <a:schemeClr val="dk1"/>
+              </a:solidFill>
+              <a:latin typeface="Calibri"/>
+              <a:ea typeface="Calibri"/>
+              <a:cs typeface="Calibri"/>
+              <a:sym typeface="Calibri"/>
+            </a:endParaRPr>
+          </a:p>
+          <a:p>
+            <a:pPr marL="0" lvl="0" indent="0" algn="l" rtl="0">
+              <a:spcBef>
+                <a:spcPts val="0"/>
+              </a:spcBef>
+              <a:spcAft>
+                <a:spcPts val="0"/>
+              </a:spcAft>
+              <a:buNone/>
+            </a:pPr>
+            <a:r>
+              <a:rPr lang="en" sz="1100" u="sng">
+                <a:solidFill>
+                  <a:schemeClr val="hlink"/>
+                </a:solidFill>
+                <a:latin typeface="Calibri"/>
+                <a:ea typeface="Calibri"/>
+                <a:cs typeface="Calibri"/>
+                <a:sym typeface="Calibri"/>
+                <a:hlinkClick r:id="rId6"/>
+              </a:rPr>
+              <a:t>https://ai.plainenglish.io/pioneering-the-future-of-web-scraping-with-intelligent-ai-agents-unleash-the-power-of-autogen-222aa73daad6</a:t>
+            </a:r>
+            <a:endParaRPr sz="1100">
+              <a:solidFill>
+                <a:schemeClr val="dk1"/>
+              </a:solidFill>
+              <a:latin typeface="Calibri"/>
+              <a:ea typeface="Calibri"/>
+              <a:cs typeface="Calibri"/>
+              <a:sym typeface="Calibri"/>
+            </a:endParaRPr>
+          </a:p>
+          <a:p>
+            <a:pPr marL="0" lvl="0" indent="0" algn="l" rtl="0">
+              <a:spcBef>
+                <a:spcPts val="0"/>
+              </a:spcBef>
+              <a:spcAft>
+                <a:spcPts val="0"/>
+              </a:spcAft>
+              <a:buNone/>
+            </a:pPr>
+            <a:r>
+              <a:rPr lang="en" sz="1100">
+                <a:solidFill>
+                  <a:schemeClr val="dk1"/>
+                </a:solidFill>
+                <a:latin typeface="Calibri"/>
+                <a:ea typeface="Calibri"/>
+                <a:cs typeface="Calibri"/>
+                <a:sym typeface="Calibri"/>
+              </a:rPr>
+              <a:t>AutoGen Part 4 | Create Multi-Agents GPT for Research Apps !!! </a:t>
+            </a:r>
+            <a:endParaRPr sz="1100">
+              <a:solidFill>
+                <a:schemeClr val="dk1"/>
+              </a:solidFill>
+              <a:latin typeface="Calibri"/>
+              <a:ea typeface="Calibri"/>
+              <a:cs typeface="Calibri"/>
+              <a:sym typeface="Calibri"/>
+            </a:endParaRPr>
+          </a:p>
+          <a:p>
+            <a:pPr marL="0" lvl="0" indent="0" algn="l" rtl="0">
+              <a:spcBef>
+                <a:spcPts val="0"/>
+              </a:spcBef>
+              <a:spcAft>
+                <a:spcPts val="0"/>
+              </a:spcAft>
+              <a:buNone/>
+            </a:pPr>
+            <a:r>
+              <a:rPr lang="en" sz="1100" u="sng">
+                <a:solidFill>
+                  <a:schemeClr val="hlink"/>
+                </a:solidFill>
+                <a:latin typeface="Calibri"/>
+                <a:ea typeface="Calibri"/>
+                <a:cs typeface="Calibri"/>
+                <a:sym typeface="Calibri"/>
+                <a:hlinkClick r:id="rId7"/>
+              </a:rPr>
+              <a:t>https://www.youtube.com/watch?v=WJIzVok-0GI</a:t>
+            </a:r>
+            <a:r>
+              <a:rPr lang="en" sz="1100">
+                <a:solidFill>
+                  <a:schemeClr val="dk1"/>
+                </a:solidFill>
+                <a:latin typeface="Calibri"/>
+                <a:ea typeface="Calibri"/>
+                <a:cs typeface="Calibri"/>
+                <a:sym typeface="Calibri"/>
+              </a:rPr>
+              <a:t> </a:t>
+            </a:r>
+            <a:endParaRPr sz="1100">
+              <a:solidFill>
+                <a:schemeClr val="dk1"/>
+              </a:solidFill>
+              <a:latin typeface="Calibri"/>
+              <a:ea typeface="Calibri"/>
+              <a:cs typeface="Calibri"/>
+              <a:sym typeface="Calibri"/>
+            </a:endParaRPr>
+          </a:p>
+          <a:p>
+            <a:pPr marL="0" lvl="0" indent="0" algn="l" rtl="0">
+              <a:spcBef>
+                <a:spcPts val="0"/>
+              </a:spcBef>
+              <a:spcAft>
+                <a:spcPts val="0"/>
+              </a:spcAft>
+              <a:buNone/>
+            </a:pPr>
+            <a:endParaRPr sz="1100">
+              <a:solidFill>
+                <a:schemeClr val="dk1"/>
+              </a:solidFill>
+              <a:latin typeface="Calibri"/>
+              <a:ea typeface="Calibri"/>
+              <a:cs typeface="Calibri"/>
+              <a:sym typeface="Calibri"/>
+            </a:endParaRPr>
+          </a:p>
+        </p:txBody>
+      </p:sp>
+      <p:sp>
+        <p:nvSpPr>
+          <p:cNvPr id="165" name="Google Shape;165;p25"/>
+          <p:cNvSpPr txBox="1"/>
+          <p:nvPr/>
+        </p:nvSpPr>
+        <p:spPr>
+          <a:xfrm>
+            <a:off x="4670225" y="397425"/>
+            <a:ext cx="4381500" cy="292500"/>
+          </a:xfrm>
+          <a:prstGeom prst="rect">
+            <a:avLst/>
+          </a:prstGeom>
+          <a:solidFill>
+            <a:srgbClr val="FFF2CC"/>
+          </a:solidFill>
+          <a:ln w="9525" cap="flat" cmpd="sng">
+            <a:solidFill>
+              <a:srgbClr val="FF0000"/>
+            </a:solidFill>
+            <a:prstDash val="solid"/>
+            <a:round/>
+            <a:headEnd type="none" w="sm" len="sm"/>
+            <a:tailEnd type="none" w="sm" len="sm"/>
+          </a:ln>
+        </p:spPr>
+        <p:txBody>
+          <a:bodyPr spcFirstLastPara="1" wrap="square" lIns="91425" tIns="91425" rIns="91425" bIns="91425" anchor="t" anchorCtr="0">
+            <a:spAutoFit/>
+          </a:bodyPr>
+          <a:lstStyle/>
+          <a:p>
+            <a:pPr marL="0" lvl="0" indent="0" algn="l" rtl="0">
+              <a:spcBef>
+                <a:spcPts val="0"/>
+              </a:spcBef>
+              <a:spcAft>
+                <a:spcPts val="0"/>
+              </a:spcAft>
+              <a:buNone/>
+            </a:pPr>
+            <a:r>
+              <a:rPr lang="en" sz="700">
+                <a:solidFill>
+                  <a:schemeClr val="dk1"/>
+                </a:solidFill>
+                <a:latin typeface="Roboto Mono"/>
+                <a:ea typeface="Roboto Mono"/>
+                <a:cs typeface="Roboto Mono"/>
+                <a:sym typeface="Roboto Mono"/>
+              </a:rPr>
+              <a:t>xxx</a:t>
+            </a:r>
+            <a:endParaRPr sz="700">
+              <a:solidFill>
+                <a:schemeClr val="dk1"/>
+              </a:solidFill>
+              <a:latin typeface="Roboto Mono"/>
+              <a:ea typeface="Roboto Mono"/>
+              <a:cs typeface="Roboto Mono"/>
+              <a:sym typeface="Roboto Mono"/>
+            </a:endParaRPr>
+          </a:p>
+        </p:txBody>
+      </p:sp>
+    </p:spTree>
+  </p:cSld>
+  <p:clrMapOvr>
+    <a:masterClrMapping/>
+  </p:clrMapOvr>
+</p:sld>
+</file>
+
+<file path=ppt/slides/slide14.xml><?xml version="1.0" encoding="utf-8"?>
+<p:sld xmlns:a="http://schemas.openxmlformats.org/drawingml/2006/main" xmlns:r="http://schemas.openxmlformats.org/officeDocument/2006/relationships" xmlns:p="http://schemas.openxmlformats.org/presentationml/2006/main">
+  <p:cSld>
+    <p:spTree>
+      <p:nvGrpSpPr>
+        <p:cNvPr id="1" name="Shape 169"/>
+        <p:cNvGrpSpPr/>
+        <p:nvPr/>
+      </p:nvGrpSpPr>
+      <p:grpSpPr>
+        <a:xfrm>
+          <a:off x="0" y="0"/>
+          <a:ext cx="0" cy="0"/>
+          <a:chOff x="0" y="0"/>
+          <a:chExt cx="0" cy="0"/>
+        </a:xfrm>
+      </p:grpSpPr>
+      <p:sp>
+        <p:nvSpPr>
+          <p:cNvPr id="170" name="Google Shape;170;p26"/>
           <p:cNvSpPr txBox="1"/>
           <p:nvPr/>
         </p:nvSpPr>
@@ -10745,7 +16366,7 @@
       </p:sp>
       <p:sp>
         <p:nvSpPr>
-          <p:cNvPr id="140" name="Google Shape;140;p23"/>
+          <p:cNvPr id="171" name="Google Shape;171;p26"/>
           <p:cNvSpPr txBox="1"/>
           <p:nvPr/>
         </p:nvSpPr>
@@ -10859,7 +16480,7 @@
       </p:sp>
       <p:sp>
         <p:nvSpPr>
-          <p:cNvPr id="141" name="Google Shape;141;p23"/>
+          <p:cNvPr id="172" name="Google Shape;172;p26"/>
           <p:cNvSpPr txBox="1"/>
           <p:nvPr/>
         </p:nvSpPr>
@@ -10925,7 +16546,7 @@
       </p:sp>
       <p:sp>
         <p:nvSpPr>
-          <p:cNvPr id="142" name="Google Shape;142;p23"/>
+          <p:cNvPr id="173" name="Google Shape;173;p26"/>
           <p:cNvSpPr txBox="1"/>
           <p:nvPr/>
         </p:nvSpPr>
@@ -11004,7 +16625,7 @@
       </p:sp>
       <p:pic>
         <p:nvPicPr>
-          <p:cNvPr id="143" name="Google Shape;143;p23"/>
+          <p:cNvPr id="174" name="Google Shape;174;p26"/>
           <p:cNvPicPr preferRelativeResize="0"/>
           <p:nvPr/>
         </p:nvPicPr>
@@ -11043,12 +16664,12 @@
 </p:sld>
 </file>
 
-<file path=ppt/slides/slide12.xml><?xml version="1.0" encoding="utf-8"?>
+<file path=ppt/slides/slide15.xml><?xml version="1.0" encoding="utf-8"?>
 <p:sld xmlns:a="http://schemas.openxmlformats.org/drawingml/2006/main" xmlns:r="http://schemas.openxmlformats.org/officeDocument/2006/relationships" xmlns:p="http://schemas.openxmlformats.org/presentationml/2006/main">
   <p:cSld>
     <p:spTree>
       <p:nvGrpSpPr>
-        <p:cNvPr id="1" name="Shape 147"/>
+        <p:cNvPr id="1" name="Shape 178"/>
         <p:cNvGrpSpPr/>
         <p:nvPr/>
       </p:nvGrpSpPr>
@@ -11062,7 +16683,7 @@
       </p:grpSpPr>
       <p:sp>
         <p:nvSpPr>
-          <p:cNvPr id="148" name="Google Shape;148;p24"/>
+          <p:cNvPr id="179" name="Google Shape;179;p27"/>
           <p:cNvSpPr txBox="1"/>
           <p:nvPr/>
         </p:nvSpPr>
@@ -11128,7 +16749,7 @@
       </p:sp>
       <p:sp>
         <p:nvSpPr>
-          <p:cNvPr id="149" name="Google Shape;149;p24"/>
+          <p:cNvPr id="180" name="Google Shape;180;p27"/>
           <p:cNvSpPr txBox="1"/>
           <p:nvPr/>
         </p:nvSpPr>
@@ -11219,7 +16840,7 @@
       </p:sp>
       <p:sp>
         <p:nvSpPr>
-          <p:cNvPr id="150" name="Google Shape;150;p24"/>
+          <p:cNvPr id="181" name="Google Shape;181;p27"/>
           <p:cNvSpPr txBox="1"/>
           <p:nvPr/>
         </p:nvSpPr>
@@ -11287,7 +16908,7 @@
       </p:sp>
       <p:pic>
         <p:nvPicPr>
-          <p:cNvPr id="151" name="Google Shape;151;p24"/>
+          <p:cNvPr id="182" name="Google Shape;182;p27"/>
           <p:cNvPicPr preferRelativeResize="0"/>
           <p:nvPr/>
         </p:nvPicPr>
@@ -11320,12 +16941,12 @@
 </p:sld>
 </file>
 
-<file path=ppt/slides/slide13.xml><?xml version="1.0" encoding="utf-8"?>
+<file path=ppt/slides/slide16.xml><?xml version="1.0" encoding="utf-8"?>
 <p:sld xmlns:a="http://schemas.openxmlformats.org/drawingml/2006/main" xmlns:r="http://schemas.openxmlformats.org/officeDocument/2006/relationships" xmlns:p="http://schemas.openxmlformats.org/presentationml/2006/main">
   <p:cSld>
     <p:spTree>
       <p:nvGrpSpPr>
-        <p:cNvPr id="1" name="Shape 155"/>
+        <p:cNvPr id="1" name="Shape 186"/>
         <p:cNvGrpSpPr/>
         <p:nvPr/>
       </p:nvGrpSpPr>
@@ -11339,7 +16960,7 @@
       </p:grpSpPr>
       <p:sp>
         <p:nvSpPr>
-          <p:cNvPr id="156" name="Google Shape;156;p25"/>
+          <p:cNvPr id="187" name="Google Shape;187;p28"/>
           <p:cNvSpPr txBox="1"/>
           <p:nvPr/>
         </p:nvSpPr>
@@ -12161,8 +17782,8 @@
         </p:nvSpPr>
         <p:spPr>
           <a:xfrm>
-            <a:off x="72300" y="783600"/>
-            <a:ext cx="4133400" cy="785100"/>
+            <a:off x="72300" y="402600"/>
+            <a:ext cx="4133400" cy="2185800"/>
           </a:xfrm>
           <a:prstGeom prst="rect">
             <a:avLst/>
@@ -12213,11 +17834,70 @@
                 <a:cs typeface="Calibri"/>
                 <a:sym typeface="Calibri"/>
               </a:rPr>
-              <a:t>Mistral Large model</a:t>
-            </a:r>
-            <a:endParaRPr sz="1300" b="0" i="0" u="none" strike="noStrike" cap="none">
+              <a:t>Mistral Large model - </a:t>
+            </a:r>
+            <a:r>
+              <a:rPr lang="en" sz="1100" b="0" i="0" u="sng" strike="noStrike" cap="none">
+                <a:solidFill>
+                  <a:schemeClr val="hlink"/>
+                </a:solidFill>
+                <a:latin typeface="Calibri"/>
+                <a:ea typeface="Calibri"/>
+                <a:cs typeface="Calibri"/>
+                <a:sym typeface="Calibri"/>
+                <a:hlinkClick r:id="rId3"/>
+              </a:rPr>
+              <a:t>https://mistral.ai/news/mistral-large/</a:t>
+            </a:r>
+            <a:r>
+              <a:rPr lang="en" sz="1100" b="0" i="0" u="none" strike="noStrike" cap="none">
+                <a:solidFill>
+                  <a:srgbClr val="000000"/>
+                </a:solidFill>
+                <a:latin typeface="Calibri"/>
+                <a:ea typeface="Calibri"/>
+                <a:cs typeface="Calibri"/>
+                <a:sym typeface="Calibri"/>
+              </a:rPr>
+              <a:t> </a:t>
+            </a:r>
+            <a:endParaRPr sz="1100">
+              <a:latin typeface="Calibri"/>
+              <a:ea typeface="Calibri"/>
+              <a:cs typeface="Calibri"/>
+              <a:sym typeface="Calibri"/>
+            </a:endParaRPr>
+          </a:p>
+          <a:p>
+            <a:pPr marL="0" lvl="0" indent="0" algn="l" rtl="0">
+              <a:spcBef>
+                <a:spcPts val="0"/>
+              </a:spcBef>
+              <a:spcAft>
+                <a:spcPts val="0"/>
+              </a:spcAft>
+              <a:buClr>
+                <a:schemeClr val="dk1"/>
+              </a:buClr>
+              <a:buSzPts val="1300"/>
+              <a:buFont typeface="Arial"/>
+              <a:buNone/>
+            </a:pPr>
+            <a:r>
+              <a:rPr lang="en" sz="1300">
+                <a:solidFill>
+                  <a:schemeClr val="dk1"/>
+                </a:solidFill>
+                <a:latin typeface="Calibri"/>
+                <a:ea typeface="Calibri"/>
+                <a:cs typeface="Calibri"/>
+                <a:sym typeface="Calibri"/>
+              </a:rPr>
+              <a:t>Really close to GPT-4, good at reasoning, multilingual. good at following instructions</a:t>
+            </a:r>
+            <a:endParaRPr sz="1300">
               <a:solidFill>
-                <a:srgbClr val="000000"/>
+                <a:schemeClr val="dk1"/>
               </a:solidFill>
               <a:latin typeface="Calibri"/>
               <a:ea typeface="Calibri"/>
@@ -12243,6 +17923,31 @@
               <a:buFont typeface="Arial"/>
               <a:buNone/>
             </a:pPr>
+            <a:endParaRPr sz="1300">
+              <a:latin typeface="Calibri"/>
+              <a:ea typeface="Calibri"/>
+              <a:cs typeface="Calibri"/>
+              <a:sym typeface="Calibri"/>
+            </a:endParaRPr>
+          </a:p>
+          <a:p>
+            <a:pPr marL="0" marR="0" lvl="0" indent="0" algn="l" rtl="0">
+              <a:lnSpc>
+                <a:spcPct val="100000"/>
+              </a:lnSpc>
+              <a:spcBef>
+                <a:spcPts val="0"/>
+              </a:spcBef>
+              <a:spcAft>
+                <a:spcPts val="0"/>
+              </a:spcAft>
+              <a:buClr>
+                <a:srgbClr val="000000"/>
+              </a:buClr>
+              <a:buSzPts val="1300"/>
+              <a:buFont typeface="Arial"/>
+              <a:buNone/>
+            </a:pPr>
             <a:r>
               <a:rPr lang="en" sz="1300" b="0" i="0" u="none" strike="noStrike" cap="none">
                 <a:solidFill>
@@ -12253,7 +17958,7 @@
                 <a:cs typeface="Calibri"/>
                 <a:sym typeface="Calibri"/>
               </a:rPr>
-              <a:t>Mistral partners with Microsoft</a:t>
+              <a:t>Mistral models also available from Microsoft</a:t>
             </a:r>
             <a:endParaRPr sz="1300" b="0" i="0" u="none" strike="noStrike" cap="none">
               <a:solidFill>
@@ -12266,39 +17971,148 @@
             </a:endParaRPr>
           </a:p>
           <a:p>
-            <a:pPr marL="0" marR="0" lvl="0" indent="0" algn="l" rtl="0">
-              <a:lnSpc>
-                <a:spcPct val="100000"/>
-              </a:lnSpc>
-              <a:spcBef>
-                <a:spcPts val="0"/>
-              </a:spcBef>
-              <a:spcAft>
-                <a:spcPts val="0"/>
-              </a:spcAft>
-              <a:buClr>
-                <a:srgbClr val="000000"/>
-              </a:buClr>
+            <a:pPr marL="457200" lvl="0" indent="-311150" algn="l" rtl="0">
+              <a:spcBef>
+                <a:spcPts val="0"/>
+              </a:spcBef>
+              <a:spcAft>
+                <a:spcPts val="0"/>
+              </a:spcAft>
               <a:buSzPts val="1300"/>
-              <a:buFont typeface="Arial"/>
-              <a:buNone/>
-            </a:pPr>
-            <a:r>
-              <a:rPr lang="en" sz="1300" b="0" i="0" u="none" strike="noStrike" cap="none">
-                <a:solidFill>
-                  <a:srgbClr val="000000"/>
-                </a:solidFill>
+              <a:buFont typeface="Calibri"/>
+              <a:buChar char="●"/>
+            </a:pPr>
+            <a:r>
+              <a:rPr lang="en" sz="1300">
                 <a:latin typeface="Calibri"/>
                 <a:ea typeface="Calibri"/>
                 <a:cs typeface="Calibri"/>
                 <a:sym typeface="Calibri"/>
               </a:rPr>
-              <a:t>Close to GPT-4, good at reasoning</a:t>
-            </a:r>
-            <a:endParaRPr sz="1300" b="0" i="0" u="none" strike="noStrike" cap="none">
+              <a:t>open-mistral-7B</a:t>
+            </a:r>
+            <a:endParaRPr sz="1300">
+              <a:latin typeface="Calibri"/>
+              <a:ea typeface="Calibri"/>
+              <a:cs typeface="Calibri"/>
+              <a:sym typeface="Calibri"/>
+            </a:endParaRPr>
+          </a:p>
+          <a:p>
+            <a:pPr marL="457200" lvl="0" indent="-311150" algn="l" rtl="0">
+              <a:spcBef>
+                <a:spcPts val="0"/>
+              </a:spcBef>
+              <a:spcAft>
+                <a:spcPts val="0"/>
+              </a:spcAft>
+              <a:buSzPts val="1300"/>
+              <a:buFont typeface="Calibri"/>
+              <a:buChar char="●"/>
+            </a:pPr>
+            <a:r>
+              <a:rPr lang="en" sz="1300">
+                <a:latin typeface="Calibri"/>
+                <a:ea typeface="Calibri"/>
+                <a:cs typeface="Calibri"/>
+                <a:sym typeface="Calibri"/>
+              </a:rPr>
+              <a:t>open-mixtral-8x7b.</a:t>
+            </a:r>
+            <a:endParaRPr sz="1300">
+              <a:latin typeface="Calibri"/>
+              <a:ea typeface="Calibri"/>
+              <a:cs typeface="Calibri"/>
+              <a:sym typeface="Calibri"/>
+            </a:endParaRPr>
+          </a:p>
+          <a:p>
+            <a:pPr marL="457200" lvl="0" indent="-311150" algn="l" rtl="0">
+              <a:spcBef>
+                <a:spcPts val="0"/>
+              </a:spcBef>
+              <a:spcAft>
+                <a:spcPts val="0"/>
+              </a:spcAft>
+              <a:buSzPts val="1300"/>
+              <a:buFont typeface="Calibri"/>
+              <a:buChar char="●"/>
+            </a:pPr>
+            <a:r>
+              <a:rPr lang="en" sz="1300">
+                <a:latin typeface="Calibri"/>
+                <a:ea typeface="Calibri"/>
+                <a:cs typeface="Calibri"/>
+                <a:sym typeface="Calibri"/>
+              </a:rPr>
+              <a:t>mistral-small-2402</a:t>
+            </a:r>
+            <a:endParaRPr sz="1300">
+              <a:latin typeface="Calibri"/>
+              <a:ea typeface="Calibri"/>
+              <a:cs typeface="Calibri"/>
+              <a:sym typeface="Calibri"/>
+            </a:endParaRPr>
+          </a:p>
+          <a:p>
+            <a:pPr marL="457200" lvl="0" indent="-311150" algn="l" rtl="0">
+              <a:spcBef>
+                <a:spcPts val="0"/>
+              </a:spcBef>
+              <a:spcAft>
+                <a:spcPts val="0"/>
+              </a:spcAft>
+              <a:buClr>
+                <a:schemeClr val="dk1"/>
+              </a:buClr>
+              <a:buSzPts val="1300"/>
+              <a:buFont typeface="Calibri"/>
+              <a:buChar char="●"/>
+            </a:pPr>
+            <a:r>
+              <a:rPr lang="en" sz="1300">
+                <a:solidFill>
+                  <a:schemeClr val="dk1"/>
+                </a:solidFill>
+                <a:latin typeface="Calibri"/>
+                <a:ea typeface="Calibri"/>
+                <a:cs typeface="Calibri"/>
+                <a:sym typeface="Calibri"/>
+              </a:rPr>
+              <a:t>mistral-medium</a:t>
+            </a:r>
+            <a:endParaRPr sz="1300">
               <a:solidFill>
-                <a:srgbClr val="000000"/>
+                <a:schemeClr val="dk1"/>
               </a:solidFill>
+              <a:latin typeface="Calibri"/>
+              <a:ea typeface="Calibri"/>
+              <a:cs typeface="Calibri"/>
+              <a:sym typeface="Calibri"/>
+            </a:endParaRPr>
+          </a:p>
+          <a:p>
+            <a:pPr marL="457200" lvl="0" indent="-311150" algn="l" rtl="0">
+              <a:spcBef>
+                <a:spcPts val="0"/>
+              </a:spcBef>
+              <a:spcAft>
+                <a:spcPts val="0"/>
+              </a:spcAft>
+              <a:buSzPts val="1300"/>
+              <a:buFont typeface="Calibri"/>
+              <a:buChar char="●"/>
+            </a:pPr>
+            <a:r>
+              <a:rPr lang="en" sz="1300">
+                <a:latin typeface="Calibri"/>
+                <a:ea typeface="Calibri"/>
+                <a:cs typeface="Calibri"/>
+                <a:sym typeface="Calibri"/>
+              </a:rPr>
+              <a:t>mistral-large-2402</a:t>
+            </a:r>
+            <a:endParaRPr sz="1300">
               <a:latin typeface="Calibri"/>
               <a:ea typeface="Calibri"/>
               <a:cs typeface="Calibri"/>
@@ -12314,7 +18128,7 @@
           <p:nvPr/>
         </p:nvPicPr>
         <p:blipFill rotWithShape="1">
-          <a:blip r:embed="rId3">
+          <a:blip r:embed="rId4">
             <a:alphaModFix/>
           </a:blip>
           <a:srcRect/>
@@ -12347,7 +18161,7 @@
           <p:nvPr/>
         </p:nvPicPr>
         <p:blipFill rotWithShape="1">
-          <a:blip r:embed="rId4">
+          <a:blip r:embed="rId5">
             <a:alphaModFix/>
           </a:blip>
           <a:srcRect/>
@@ -12380,7 +18194,7 @@
           <p:nvPr/>
         </p:nvPicPr>
         <p:blipFill rotWithShape="1">
-          <a:blip r:embed="rId5">
+          <a:blip r:embed="rId6">
             <a:alphaModFix/>
           </a:blip>
           <a:srcRect/>
@@ -12388,7 +18202,7 @@
         </p:blipFill>
         <p:spPr>
           <a:xfrm>
-            <a:off x="4273075" y="228600"/>
+            <a:off x="4273075" y="783965"/>
             <a:ext cx="4794726" cy="1420425"/>
           </a:xfrm>
           <a:prstGeom prst="rect">
@@ -12924,7 +18738,7 @@
         <p:spPr>
           <a:xfrm>
             <a:off x="72300" y="466175"/>
-            <a:ext cx="4392300" cy="1185300"/>
+            <a:ext cx="4359066" cy="1185300"/>
           </a:xfrm>
           <a:prstGeom prst="rect">
             <a:avLst/>
@@ -13173,7 +18987,7 @@
         <p:spPr>
           <a:xfrm>
             <a:off x="72300" y="1787100"/>
-            <a:ext cx="4392300" cy="1431600"/>
+            <a:ext cx="4359066" cy="1615797"/>
           </a:xfrm>
           <a:prstGeom prst="rect">
             <a:avLst/>
@@ -13215,7 +19029,7 @@
               <a:buNone/>
             </a:pPr>
             <a:r>
-              <a:rPr lang="en" sz="1400" b="0" i="0" u="none" strike="noStrike" cap="none">
+              <a:rPr lang="en" sz="1400" b="0" i="0" u="none" strike="noStrike" cap="none" dirty="0">
                 <a:solidFill>
                   <a:srgbClr val="000000"/>
                 </a:solidFill>
@@ -13226,7 +19040,7 @@
               </a:rPr>
               <a:t>Eureka: Human-Level Reward Design via Coding LLMs (Nvidia, UPenn, Caltech, UT Austin) </a:t>
             </a:r>
-            <a:endParaRPr sz="1400" b="0" i="0" u="none" strike="noStrike" cap="none">
+            <a:endParaRPr sz="1400" b="0" i="0" u="none" strike="noStrike" cap="none" dirty="0">
               <a:solidFill>
                 <a:srgbClr val="000000"/>
               </a:solidFill>
@@ -13255,7 +19069,7 @@
               <a:buChar char="●"/>
             </a:pPr>
             <a:r>
-              <a:rPr lang="en" sz="1300" b="0" i="0" u="sng" strike="noStrike" cap="none">
+              <a:rPr lang="en" sz="1300" b="0" i="0" u="sng" strike="noStrike" cap="none" dirty="0">
                 <a:solidFill>
                   <a:schemeClr val="hlink"/>
                 </a:solidFill>
@@ -13268,7 +19082,7 @@
               <a:t>https://eureka-research.github.io</a:t>
             </a:r>
             <a:r>
-              <a:rPr lang="en" sz="1300" b="0" i="0" u="none" strike="noStrike" cap="none">
+              <a:rPr lang="en" sz="1300" b="0" i="0" u="none" strike="noStrike" cap="none" dirty="0">
                 <a:solidFill>
                   <a:srgbClr val="000000"/>
                 </a:solidFill>
@@ -13279,7 +19093,7 @@
               </a:rPr>
               <a:t> </a:t>
             </a:r>
-            <a:endParaRPr sz="1300" b="0" i="0" u="none" strike="noStrike" cap="none">
+            <a:endParaRPr sz="1300" b="0" i="0" u="none" strike="noStrike" cap="none" dirty="0">
               <a:solidFill>
                 <a:srgbClr val="000000"/>
               </a:solidFill>
@@ -13308,7 +19122,7 @@
               <a:buChar char="●"/>
             </a:pPr>
             <a:r>
-              <a:rPr lang="en" sz="1300" b="0" i="0" u="sng" strike="noStrike" cap="none">
+              <a:rPr lang="en" sz="1300" b="0" i="0" u="sng" strike="noStrike" cap="none" dirty="0">
                 <a:solidFill>
                   <a:schemeClr val="hlink"/>
                 </a:solidFill>
@@ -13321,7 +19135,7 @@
               <a:t>https://arxiv.org/abs/2310.12931</a:t>
             </a:r>
             <a:r>
-              <a:rPr lang="en" sz="1300" b="0" i="0" u="none" strike="noStrike" cap="none">
+              <a:rPr lang="en" sz="1300" b="0" i="0" u="none" strike="noStrike" cap="none" dirty="0">
                 <a:solidFill>
                   <a:srgbClr val="000000"/>
                 </a:solidFill>
@@ -13332,7 +19146,7 @@
               </a:rPr>
               <a:t> </a:t>
             </a:r>
-            <a:endParaRPr sz="1300" b="0" i="0" u="none" strike="noStrike" cap="none">
+            <a:endParaRPr sz="1300" b="0" i="0" u="none" strike="noStrike" cap="none" dirty="0">
               <a:solidFill>
                 <a:srgbClr val="000000"/>
               </a:solidFill>
@@ -13361,7 +19175,7 @@
               <a:buChar char="●"/>
             </a:pPr>
             <a:r>
-              <a:rPr lang="en" sz="1300" b="0" i="0" u="sng" strike="noStrike" cap="none">
+              <a:rPr lang="en" sz="1300" b="0" i="0" u="sng" strike="noStrike" cap="none" dirty="0">
                 <a:solidFill>
                   <a:schemeClr val="hlink"/>
                 </a:solidFill>
@@ -13374,7 +19188,7 @@
               <a:t>https://eureka-research.github.io/assets/eureka_paper.pdf</a:t>
             </a:r>
             <a:r>
-              <a:rPr lang="en" sz="1300" b="0" i="0" u="none" strike="noStrike" cap="none">
+              <a:rPr lang="en" sz="1300" b="0" i="0" u="none" strike="noStrike" cap="none" dirty="0">
                 <a:solidFill>
                   <a:srgbClr val="000000"/>
                 </a:solidFill>
@@ -13385,7 +19199,7 @@
               </a:rPr>
               <a:t> </a:t>
             </a:r>
-            <a:endParaRPr sz="1300" b="0" i="0" u="none" strike="noStrike" cap="none">
+            <a:endParaRPr sz="1300" b="0" i="0" u="none" strike="noStrike" cap="none" dirty="0">
               <a:solidFill>
                 <a:srgbClr val="000000"/>
               </a:solidFill>
@@ -13414,7 +19228,7 @@
               <a:buChar char="●"/>
             </a:pPr>
             <a:r>
-              <a:rPr lang="en" sz="1300" b="0" i="0" u="sng" strike="noStrike" cap="none">
+              <a:rPr lang="en" sz="1300" b="0" i="0" u="sng" strike="noStrike" cap="none" dirty="0">
                 <a:solidFill>
                   <a:schemeClr val="hlink"/>
                 </a:solidFill>
@@ -13427,7 +19241,7 @@
               <a:t>https://github.com/eureka-research/Eureka</a:t>
             </a:r>
             <a:r>
-              <a:rPr lang="en" sz="1300" b="0" i="0" u="none" strike="noStrike" cap="none">
+              <a:rPr lang="en" sz="1300" b="0" i="0" u="none" strike="noStrike" cap="none" dirty="0">
                 <a:solidFill>
                   <a:srgbClr val="000000"/>
                 </a:solidFill>
@@ -13438,7 +19252,7 @@
               </a:rPr>
               <a:t> </a:t>
             </a:r>
-            <a:endParaRPr sz="1300" b="0" i="0" u="none" strike="noStrike" cap="none">
+            <a:endParaRPr sz="1300" b="0" i="0" u="none" strike="noStrike" cap="none" dirty="0">
               <a:solidFill>
                 <a:srgbClr val="000000"/>
               </a:solidFill>
@@ -13632,7 +19446,7 @@
               <a:buNone/>
             </a:pPr>
             <a:r>
-              <a:rPr lang="en" sz="2000" b="1" i="0" u="none" strike="noStrike" cap="none">
+              <a:rPr lang="en" sz="2000" b="1">
                 <a:solidFill>
                   <a:schemeClr val="dk1"/>
                 </a:solidFill>
@@ -13641,7 +19455,7 @@
                 <a:cs typeface="Calibri"/>
                 <a:sym typeface="Calibri"/>
               </a:rPr>
-              <a:t>RAG, Embeddings, ...</a:t>
+              <a:t>NVIDIA Foundation Agent</a:t>
             </a:r>
             <a:endParaRPr sz="2000" b="1" i="0" u="none" strike="noStrike" cap="none">
               <a:solidFill>
@@ -14337,7 +20151,7 @@
         </p:nvSpPr>
         <p:spPr>
           <a:xfrm>
-            <a:off x="72300" y="783600"/>
+            <a:off x="72300" y="553750"/>
             <a:ext cx="4133400" cy="384900"/>
           </a:xfrm>
           <a:prstGeom prst="rect">
@@ -14403,6 +20217,200 @@
           </a:p>
         </p:txBody>
       </p:sp>
+      <p:pic>
+        <p:nvPicPr>
+          <p:cNvPr id="107" name="Google Shape;107;p19"/>
+          <p:cNvPicPr preferRelativeResize="0"/>
+          <p:nvPr/>
+        </p:nvPicPr>
+        <p:blipFill>
+          <a:blip r:embed="rId3" cstate="email">
+            <a:alphaModFix/>
+            <a:extLst>
+              <a:ext uri="{28A0092B-C50C-407E-A947-70E740481C1C}">
+                <a14:useLocalDpi xmlns:a14="http://schemas.microsoft.com/office/drawing/2010/main"/>
+              </a:ext>
+            </a:extLst>
+          </a:blip>
+          <a:stretch>
+            <a:fillRect/>
+          </a:stretch>
+        </p:blipFill>
+        <p:spPr>
+          <a:xfrm>
+            <a:off x="4795775" y="1423925"/>
+            <a:ext cx="4290125" cy="2702276"/>
+          </a:xfrm>
+          <a:prstGeom prst="rect">
+            <a:avLst/>
+          </a:prstGeom>
+          <a:noFill/>
+          <a:ln w="9525" cap="flat" cmpd="sng">
+            <a:solidFill>
+              <a:srgbClr val="FF0000"/>
+            </a:solidFill>
+            <a:prstDash val="solid"/>
+            <a:round/>
+            <a:headEnd type="none" w="sm" len="sm"/>
+            <a:tailEnd type="none" w="sm" len="sm"/>
+          </a:ln>
+        </p:spPr>
+      </p:pic>
+      <p:sp>
+        <p:nvSpPr>
+          <p:cNvPr id="108" name="Google Shape;108;p19"/>
+          <p:cNvSpPr txBox="1"/>
+          <p:nvPr/>
+        </p:nvSpPr>
+        <p:spPr>
+          <a:xfrm>
+            <a:off x="4952500" y="380900"/>
+            <a:ext cx="4133400" cy="785100"/>
+          </a:xfrm>
+          <a:prstGeom prst="rect">
+            <a:avLst/>
+          </a:prstGeom>
+          <a:solidFill>
+            <a:srgbClr val="FFF2CC"/>
+          </a:solidFill>
+          <a:ln w="9525" cap="flat" cmpd="sng">
+            <a:solidFill>
+              <a:srgbClr val="FF0000"/>
+            </a:solidFill>
+            <a:prstDash val="solid"/>
+            <a:round/>
+            <a:headEnd type="none" w="sm" len="sm"/>
+            <a:tailEnd type="none" w="sm" len="sm"/>
+          </a:ln>
+        </p:spPr>
+        <p:txBody>
+          <a:bodyPr spcFirstLastPara="1" wrap="square" lIns="91425" tIns="91425" rIns="91425" bIns="91425" anchor="t" anchorCtr="0">
+            <a:spAutoFit/>
+          </a:bodyPr>
+          <a:lstStyle/>
+          <a:p>
+            <a:pPr marL="0" marR="0" lvl="0" indent="0" algn="l" rtl="0">
+              <a:lnSpc>
+                <a:spcPct val="100000"/>
+              </a:lnSpc>
+              <a:spcBef>
+                <a:spcPts val="0"/>
+              </a:spcBef>
+              <a:spcAft>
+                <a:spcPts val="0"/>
+              </a:spcAft>
+              <a:buClr>
+                <a:schemeClr val="dk1"/>
+              </a:buClr>
+              <a:buSzPts val="1100"/>
+              <a:buFont typeface="Arial"/>
+              <a:buNone/>
+            </a:pPr>
+            <a:r>
+              <a:rPr lang="en" sz="1300">
+                <a:latin typeface="Calibri"/>
+                <a:ea typeface="Calibri"/>
+                <a:cs typeface="Calibri"/>
+                <a:sym typeface="Calibri"/>
+              </a:rPr>
+              <a:t>Enterprise </a:t>
+            </a:r>
+            <a:r>
+              <a:rPr lang="en" sz="1300" b="0" i="0" u="none" strike="noStrike" cap="none">
+                <a:solidFill>
+                  <a:srgbClr val="000000"/>
+                </a:solidFill>
+                <a:latin typeface="Calibri"/>
+                <a:ea typeface="Calibri"/>
+                <a:cs typeface="Calibri"/>
+                <a:sym typeface="Calibri"/>
+              </a:rPr>
+              <a:t>RAG</a:t>
+            </a:r>
+            <a:br>
+              <a:rPr lang="en" sz="1300" b="0" i="0" u="none" strike="noStrike" cap="none">
+                <a:solidFill>
+                  <a:srgbClr val="000000"/>
+                </a:solidFill>
+                <a:latin typeface="Calibri"/>
+                <a:ea typeface="Calibri"/>
+                <a:cs typeface="Calibri"/>
+                <a:sym typeface="Calibri"/>
+              </a:rPr>
+            </a:br>
+            <a:r>
+              <a:rPr lang="en" sz="1300" b="0" i="0" u="sng" strike="noStrike" cap="none">
+                <a:solidFill>
+                  <a:schemeClr val="hlink"/>
+                </a:solidFill>
+                <a:latin typeface="Calibri"/>
+                <a:ea typeface="Calibri"/>
+                <a:cs typeface="Calibri"/>
+                <a:sym typeface="Calibri"/>
+                <a:hlinkClick r:id="rId4"/>
+              </a:rPr>
+              <a:t>https://www.rungalileo.io/blog/mastering-rag-how-to-architect-an-enterprise-rag-system</a:t>
+            </a:r>
+            <a:r>
+              <a:rPr lang="en" sz="1300">
+                <a:latin typeface="Calibri"/>
+                <a:ea typeface="Calibri"/>
+                <a:cs typeface="Calibri"/>
+                <a:sym typeface="Calibri"/>
+              </a:rPr>
+              <a:t> </a:t>
+            </a:r>
+            <a:endParaRPr sz="1300" b="0" i="0" u="none" strike="noStrike" cap="none">
+              <a:solidFill>
+                <a:srgbClr val="000000"/>
+              </a:solidFill>
+              <a:latin typeface="Calibri"/>
+              <a:ea typeface="Calibri"/>
+              <a:cs typeface="Calibri"/>
+              <a:sym typeface="Calibri"/>
+            </a:endParaRPr>
+          </a:p>
+        </p:txBody>
+      </p:sp>
+      <p:pic>
+        <p:nvPicPr>
+          <p:cNvPr id="109" name="Google Shape;109;p19"/>
+          <p:cNvPicPr preferRelativeResize="0"/>
+          <p:nvPr/>
+        </p:nvPicPr>
+        <p:blipFill>
+          <a:blip r:embed="rId5" cstate="email">
+            <a:alphaModFix/>
+            <a:extLst>
+              <a:ext uri="{28A0092B-C50C-407E-A947-70E740481C1C}">
+                <a14:useLocalDpi xmlns:a14="http://schemas.microsoft.com/office/drawing/2010/main"/>
+              </a:ext>
+            </a:extLst>
+          </a:blip>
+          <a:stretch>
+            <a:fillRect/>
+          </a:stretch>
+        </p:blipFill>
+        <p:spPr>
+          <a:xfrm>
+            <a:off x="72301" y="1434227"/>
+            <a:ext cx="4572001" cy="2082850"/>
+          </a:xfrm>
+          <a:prstGeom prst="rect">
+            <a:avLst/>
+          </a:prstGeom>
+          <a:noFill/>
+          <a:ln w="9525" cap="flat" cmpd="sng">
+            <a:solidFill>
+              <a:srgbClr val="FF0000"/>
+            </a:solidFill>
+            <a:prstDash val="solid"/>
+            <a:round/>
+            <a:headEnd type="none" w="sm" len="sm"/>
+            <a:tailEnd type="none" w="sm" len="sm"/>
+          </a:ln>
+        </p:spPr>
+      </p:pic>
     </p:spTree>
   </p:cSld>
   <p:clrMapOvr>
@@ -14416,7 +20424,7 @@
   <p:cSld>
     <p:spTree>
       <p:nvGrpSpPr>
-        <p:cNvPr id="1" name="Shape 110"/>
+        <p:cNvPr id="1" name="Shape 113"/>
         <p:cNvGrpSpPr/>
         <p:nvPr/>
       </p:nvGrpSpPr>
@@ -14430,7 +20438,7 @@
       </p:grpSpPr>
       <p:sp>
         <p:nvSpPr>
-          <p:cNvPr id="111" name="Google Shape;111;p20"/>
+          <p:cNvPr id="114" name="Google Shape;114;p20"/>
           <p:cNvSpPr txBox="1"/>
           <p:nvPr/>
         </p:nvSpPr>
@@ -14496,7 +20504,7 @@
       </p:sp>
       <p:sp>
         <p:nvSpPr>
-          <p:cNvPr id="112" name="Google Shape;112;p20"/>
+          <p:cNvPr id="115" name="Google Shape;115;p20"/>
           <p:cNvSpPr txBox="1"/>
           <p:nvPr/>
         </p:nvSpPr>
@@ -14758,14 +20766,14 @@
       </p:sp>
       <p:sp>
         <p:nvSpPr>
-          <p:cNvPr id="113" name="Google Shape;113;p20"/>
+          <p:cNvPr id="116" name="Google Shape;116;p20"/>
           <p:cNvSpPr txBox="1"/>
           <p:nvPr/>
         </p:nvSpPr>
         <p:spPr>
           <a:xfrm>
             <a:off x="72300" y="466175"/>
-            <a:ext cx="4133400" cy="2586000"/>
+            <a:ext cx="4221404" cy="2586000"/>
           </a:xfrm>
           <a:prstGeom prst="rect">
             <a:avLst/>
@@ -14807,7 +20815,7 @@
               <a:buNone/>
             </a:pPr>
             <a:r>
-              <a:rPr lang="en" sz="1300" b="1" i="0" u="none" strike="noStrike" cap="none">
+              <a:rPr lang="en" sz="1300" b="1" i="0" u="none" strike="noStrike" cap="none" dirty="0">
                 <a:solidFill>
                   <a:srgbClr val="FF0000"/>
                 </a:solidFill>
@@ -14818,7 +20826,7 @@
               </a:rPr>
               <a:t>Moore's Law for Everything</a:t>
             </a:r>
-            <a:endParaRPr sz="1300" b="1" i="0" u="none" strike="noStrike" cap="none">
+            <a:endParaRPr sz="1300" b="1" i="0" u="none" strike="noStrike" cap="none" dirty="0">
               <a:solidFill>
                 <a:srgbClr val="FF0000"/>
               </a:solidFill>
@@ -14847,7 +20855,7 @@
               <a:buNone/>
             </a:pPr>
             <a:r>
-              <a:rPr lang="en" sz="1300" b="1" i="0" u="none" strike="noStrike" cap="none">
+              <a:rPr lang="en" sz="1300" b="1" i="0" u="none" strike="noStrike" cap="none" dirty="0">
                 <a:solidFill>
                   <a:srgbClr val="FF0000"/>
                 </a:solidFill>
@@ -14858,7 +20866,7 @@
               </a:rPr>
               <a:t>by Sam Altman · March 16, 2021</a:t>
             </a:r>
-            <a:endParaRPr sz="1300" b="1" i="0" u="none" strike="noStrike" cap="none">
+            <a:endParaRPr sz="1300" b="1" i="0" u="none" strike="noStrike" cap="none" dirty="0">
               <a:solidFill>
                 <a:srgbClr val="FF0000"/>
               </a:solidFill>
@@ -14887,7 +20895,7 @@
               <a:buNone/>
             </a:pPr>
             <a:r>
-              <a:rPr lang="en" sz="1300" b="0" i="0" u="sng" strike="noStrike" cap="none">
+              <a:rPr lang="en" sz="1300" b="0" i="0" u="sng" strike="noStrike" cap="none" dirty="0">
                 <a:solidFill>
                   <a:schemeClr val="hlink"/>
                 </a:solidFill>
@@ -14900,7 +20908,7 @@
               <a:t>https://moores.samaltman.com</a:t>
             </a:r>
             <a:r>
-              <a:rPr lang="en" sz="1300" b="0" i="0" u="none" strike="noStrike" cap="none">
+              <a:rPr lang="en" sz="1300" b="0" i="0" u="none" strike="noStrike" cap="none" dirty="0">
                 <a:solidFill>
                   <a:srgbClr val="000000"/>
                 </a:solidFill>
@@ -14911,7 +20919,7 @@
               </a:rPr>
               <a:t> </a:t>
             </a:r>
-            <a:endParaRPr sz="1300" b="0" i="0" u="none" strike="noStrike" cap="none">
+            <a:endParaRPr sz="1300" b="0" i="0" u="none" strike="noStrike" cap="none" dirty="0">
               <a:solidFill>
                 <a:srgbClr val="000000"/>
               </a:solidFill>
@@ -14940,7 +20948,7 @@
               <a:buNone/>
             </a:pPr>
             <a:r>
-              <a:rPr lang="en" sz="1300" b="0" i="0" u="sng" strike="noStrike" cap="none">
+              <a:rPr lang="en" sz="1300" b="0" i="0" u="sng" strike="noStrike" cap="none" dirty="0">
                 <a:solidFill>
                   <a:schemeClr val="hlink"/>
                 </a:solidFill>
@@ -14953,7 +20961,7 @@
               <a:t>https://www.youtube.com/watch?v=JEFEJsTxPCc</a:t>
             </a:r>
             <a:r>
-              <a:rPr lang="en" sz="1300" b="0" i="0" u="none" strike="noStrike" cap="none">
+              <a:rPr lang="en" sz="1300" b="0" i="0" u="none" strike="noStrike" cap="none" dirty="0">
                 <a:solidFill>
                   <a:srgbClr val="000000"/>
                 </a:solidFill>
@@ -14964,7 +20972,7 @@
               </a:rPr>
               <a:t> </a:t>
             </a:r>
-            <a:endParaRPr sz="1300" b="0" i="0" u="none" strike="noStrike" cap="none">
+            <a:endParaRPr sz="1300" b="0" i="0" u="none" strike="noStrike" cap="none" dirty="0">
               <a:solidFill>
                 <a:srgbClr val="000000"/>
               </a:solidFill>
@@ -14992,7 +21000,7 @@
               <a:buFont typeface="Arial"/>
               <a:buNone/>
             </a:pPr>
-            <a:endParaRPr sz="1300" b="0" i="0" u="none" strike="noStrike" cap="none">
+            <a:endParaRPr sz="1300" b="0" i="0" u="none" strike="noStrike" cap="none" dirty="0">
               <a:solidFill>
                 <a:srgbClr val="000000"/>
               </a:solidFill>
@@ -15021,7 +21029,7 @@
               <a:buChar char="●"/>
             </a:pPr>
             <a:r>
-              <a:rPr lang="en" sz="1300" b="0" i="0" u="none" strike="noStrike" cap="none">
+              <a:rPr lang="en" sz="1300" b="0" i="0" u="none" strike="noStrike" cap="none" dirty="0">
                 <a:solidFill>
                   <a:schemeClr val="dk1"/>
                 </a:solidFill>
@@ -15032,7 +21040,7 @@
               </a:rPr>
               <a:t>Sam Altman predicts technological advancement (AI, robotics) causing all costs decreasing exponentially over time (like Moore's Law in computing)</a:t>
             </a:r>
-            <a:endParaRPr sz="1300" b="0" i="0" u="none" strike="noStrike" cap="none">
+            <a:endParaRPr sz="1300" b="0" i="0" u="none" strike="noStrike" cap="none" dirty="0">
               <a:solidFill>
                 <a:schemeClr val="dk1"/>
               </a:solidFill>
@@ -15061,7 +21069,7 @@
               <a:buChar char="●"/>
             </a:pPr>
             <a:r>
-              <a:rPr lang="en" sz="1300" b="0" i="0" u="none" strike="noStrike" cap="none">
+              <a:rPr lang="en" sz="1300" b="0" i="0" u="none" strike="noStrike" cap="none" dirty="0">
                 <a:solidFill>
                   <a:schemeClr val="dk1"/>
                 </a:solidFill>
@@ -15072,7 +21080,7 @@
               </a:rPr>
               <a:t>This will expand in all areas beyond just computing. </a:t>
             </a:r>
-            <a:endParaRPr sz="1300" b="0" i="0" u="none" strike="noStrike" cap="none">
+            <a:endParaRPr sz="1300" b="0" i="0" u="none" strike="noStrike" cap="none" dirty="0">
               <a:solidFill>
                 <a:schemeClr val="dk1"/>
               </a:solidFill>
@@ -15101,7 +21109,7 @@
               <a:buChar char="●"/>
             </a:pPr>
             <a:r>
-              <a:rPr lang="en" sz="1300" b="0" i="0" u="none" strike="noStrike" cap="none">
+              <a:rPr lang="en" sz="1300" b="0" i="0" u="none" strike="noStrike" cap="none" dirty="0">
                 <a:solidFill>
                   <a:schemeClr val="dk1"/>
                 </a:solidFill>
@@ -15112,7 +21120,7 @@
               </a:rPr>
               <a:t>It will dramatically lower costs in key sectors like healthcare, education, energy, and more. </a:t>
             </a:r>
-            <a:endParaRPr sz="1300" b="0" i="0" u="none" strike="noStrike" cap="none">
+            <a:endParaRPr sz="1300" b="0" i="0" u="none" strike="noStrike" cap="none" dirty="0">
               <a:solidFill>
                 <a:schemeClr val="dk1"/>
               </a:solidFill>
@@ -15141,7 +21149,7 @@
               <a:buChar char="●"/>
             </a:pPr>
             <a:r>
-              <a:rPr lang="en" sz="1300" b="0" i="0" u="none" strike="noStrike" cap="none">
+              <a:rPr lang="en" sz="1300" b="0" i="0" u="none" strike="noStrike" cap="none" dirty="0">
                 <a:solidFill>
                   <a:schemeClr val="dk1"/>
                 </a:solidFill>
@@ -15152,7 +21160,7 @@
               </a:rPr>
               <a:t>He believes this will lead to unprecedented abundance.</a:t>
             </a:r>
-            <a:endParaRPr sz="1300" b="0" i="0" u="none" strike="noStrike" cap="none">
+            <a:endParaRPr sz="1300" b="0" i="0" u="none" strike="noStrike" cap="none" dirty="0">
               <a:solidFill>
                 <a:srgbClr val="000000"/>
               </a:solidFill>
@@ -15166,7 +21174,7 @@
       </p:sp>
       <p:pic>
         <p:nvPicPr>
-          <p:cNvPr id="114" name="Google Shape;114;p20"/>
+          <p:cNvPr id="117" name="Google Shape;117;p20"/>
           <p:cNvPicPr preferRelativeResize="0"/>
           <p:nvPr/>
         </p:nvPicPr>
@@ -15193,7 +21201,7 @@
       </p:pic>
       <p:pic>
         <p:nvPicPr>
-          <p:cNvPr id="115" name="Google Shape;115;p20"/>
+          <p:cNvPr id="118" name="Google Shape;118;p20"/>
           <p:cNvPicPr preferRelativeResize="0"/>
           <p:nvPr/>
         </p:nvPicPr>
@@ -15231,7 +21239,7 @@
   <p:cSld>
     <p:spTree>
       <p:nvGrpSpPr>
-        <p:cNvPr id="1" name="Shape 119"/>
+        <p:cNvPr id="1" name="Shape 122"/>
         <p:cNvGrpSpPr/>
         <p:nvPr/>
       </p:nvGrpSpPr>
@@ -15245,7 +21253,7 @@
       </p:grpSpPr>
       <p:sp>
         <p:nvSpPr>
-          <p:cNvPr id="120" name="Google Shape;120;p21"/>
+          <p:cNvPr id="123" name="Google Shape;123;p21"/>
           <p:cNvSpPr txBox="1"/>
           <p:nvPr/>
         </p:nvSpPr>
@@ -15311,7 +21319,7 @@
       </p:sp>
       <p:sp>
         <p:nvSpPr>
-          <p:cNvPr id="121" name="Google Shape;121;p21"/>
+          <p:cNvPr id="124" name="Google Shape;124;p21"/>
           <p:cNvSpPr txBox="1"/>
           <p:nvPr/>
         </p:nvSpPr>
@@ -15625,7 +21633,7 @@
       </p:sp>
       <p:pic>
         <p:nvPicPr>
-          <p:cNvPr id="122" name="Google Shape;122;p21"/>
+          <p:cNvPr id="125" name="Google Shape;125;p21"/>
           <p:cNvPicPr preferRelativeResize="0"/>
           <p:nvPr/>
         </p:nvPicPr>
@@ -15652,7 +21660,7 @@
       </p:pic>
       <p:pic>
         <p:nvPicPr>
-          <p:cNvPr id="123" name="Google Shape;123;p21"/>
+          <p:cNvPr id="126" name="Google Shape;126;p21"/>
           <p:cNvPicPr preferRelativeResize="0"/>
           <p:nvPr/>
         </p:nvPicPr>
@@ -15679,7 +21687,7 @@
       </p:pic>
       <p:pic>
         <p:nvPicPr>
-          <p:cNvPr id="124" name="Google Shape;124;p21"/>
+          <p:cNvPr id="127" name="Google Shape;127;p21"/>
           <p:cNvPicPr preferRelativeResize="0"/>
           <p:nvPr/>
         </p:nvPicPr>
@@ -15706,7 +21714,7 @@
       </p:pic>
       <p:pic>
         <p:nvPicPr>
-          <p:cNvPr id="125" name="Google Shape;125;p21"/>
+          <p:cNvPr id="128" name="Google Shape;128;p21"/>
           <p:cNvPicPr preferRelativeResize="0"/>
           <p:nvPr/>
         </p:nvPicPr>
@@ -15733,7 +21741,7 @@
       </p:pic>
       <p:pic>
         <p:nvPicPr>
-          <p:cNvPr id="126" name="Google Shape;126;p21"/>
+          <p:cNvPr id="129" name="Google Shape;129;p21"/>
           <p:cNvPicPr preferRelativeResize="0"/>
           <p:nvPr/>
         </p:nvPicPr>
@@ -15760,7 +21768,7 @@
       </p:pic>
       <p:pic>
         <p:nvPicPr>
-          <p:cNvPr id="127" name="Google Shape;127;p21"/>
+          <p:cNvPr id="130" name="Google Shape;130;p21"/>
           <p:cNvPicPr preferRelativeResize="0"/>
           <p:nvPr/>
         </p:nvPicPr>
@@ -15787,7 +21795,7 @@
       </p:pic>
       <p:pic>
         <p:nvPicPr>
-          <p:cNvPr id="128" name="Google Shape;128;p21"/>
+          <p:cNvPr id="131" name="Google Shape;131;p21"/>
           <p:cNvPicPr preferRelativeResize="0"/>
           <p:nvPr/>
         </p:nvPicPr>
